--- a/presentation/GB884_Case1_ReturnPolicy_Presentation.pptx
+++ b/presentation/GB884_Case1_ReturnPolicy_Presentation.pptx
@@ -5,12 +5,12 @@
     <p:sldMasterId id="2147483648" r:id="rId1"/>
   </p:sldMasterIdLst>
   <p:sldIdLst>
-    <p:sldId id="256" r:id="rId7"/>
-    <p:sldId id="257" r:id="rId8"/>
-    <p:sldId id="258" r:id="rId9"/>
-    <p:sldId id="259" r:id="rId10"/>
+    <p:sldId id="256" r:id="rId2"/>
+    <p:sldId id="257" r:id="rId3"/>
+    <p:sldId id="258" r:id="rId4"/>
+    <p:sldId id="259" r:id="rId5"/>
   </p:sldIdLst>
-  <p:sldSz cx="12188952" cy="6858000" type="screen4x3"/>
+  <p:sldSz cx="12188825" cy="6858000"/>
   <p:notesSz cx="6858000" cy="9144000"/>
   <p:defaultTextStyle>
     <a:defPPr>
@@ -107,7 +107,4488 @@
       </a:defRPr>
     </a:lvl9pPr>
   </p:defaultTextStyle>
+  <p:extLst>
+    <p:ext uri="{EFAFB233-063F-42B5-8137-9DF3F51BA10A}">
+      <p15:sldGuideLst xmlns:p15="http://schemas.microsoft.com/office/powerpoint/2012/main">
+        <p15:guide id="1" orient="horz" pos="2160">
+          <p15:clr>
+            <a:srgbClr val="A4A3A4"/>
+          </p15:clr>
+        </p15:guide>
+        <p15:guide id="2" pos="2880">
+          <p15:clr>
+            <a:srgbClr val="A4A3A4"/>
+          </p15:clr>
+        </p15:guide>
+      </p15:sldGuideLst>
+    </p:ext>
+  </p:extLst>
 </p:presentation>
+</file>
+
+<file path=ppt/revisionInfo.xml><?xml version="1.0" encoding="utf-8"?>
+<p1510:revInfo xmlns:a="http://schemas.openxmlformats.org/drawingml/2006/main" xmlns:r="http://schemas.openxmlformats.org/officeDocument/2006/relationships" xmlns:p1510="http://schemas.microsoft.com/office/powerpoint/2015/10/main">
+  <p1510:revLst>
+    <p1510:client id="{FB2AB8D7-C83B-429C-BBB3-88322E3328BD}" v="432" dt="2026-05-21T22:18:38.900"/>
+  </p1510:revLst>
+</p1510:revInfo>
+</file>
+
+<file path=ppt/changesInfos/changesInfo1.xml><?xml version="1.0" encoding="utf-8"?>
+<pc:chgInfo xmlns:a="http://schemas.openxmlformats.org/drawingml/2006/main" xmlns:r="http://schemas.openxmlformats.org/officeDocument/2006/relationships" xmlns:ac="http://schemas.microsoft.com/office/drawing/2013/main/command" xmlns:pc="http://schemas.microsoft.com/office/powerpoint/2013/main/command">
+  <pc:docChgLst>
+    <pc:chgData name="Taran Schlichtmann" userId="fa341e061f349481" providerId="LiveId" clId="{E98D3F9C-6EE3-414F-B938-06362BDADCD8}"/>
+    <pc:docChg chg="undo custSel modSld sldOrd">
+      <pc:chgData name="Taran Schlichtmann" userId="fa341e061f349481" providerId="LiveId" clId="{E98D3F9C-6EE3-414F-B938-06362BDADCD8}" dt="2026-05-21T22:23:10.057" v="1018" actId="207"/>
+      <pc:docMkLst>
+        <pc:docMk/>
+      </pc:docMkLst>
+      <pc:sldChg chg="addSp delSp modSp mod">
+        <pc:chgData name="Taran Schlichtmann" userId="fa341e061f349481" providerId="LiveId" clId="{E98D3F9C-6EE3-414F-B938-06362BDADCD8}" dt="2026-05-21T22:23:10.057" v="1018" actId="207"/>
+        <pc:sldMkLst>
+          <pc:docMk/>
+          <pc:sldMk cId="0" sldId="256"/>
+        </pc:sldMkLst>
+        <pc:spChg chg="mod">
+          <ac:chgData name="Taran Schlichtmann" userId="fa341e061f349481" providerId="LiveId" clId="{E98D3F9C-6EE3-414F-B938-06362BDADCD8}" dt="2026-05-20T01:34:40.551" v="44" actId="1076"/>
+          <ac:spMkLst>
+            <pc:docMk/>
+            <pc:sldMk cId="0" sldId="256"/>
+            <ac:spMk id="4" creationId="{00000000-0000-0000-0000-000000000000}"/>
+          </ac:spMkLst>
+        </pc:spChg>
+        <pc:spChg chg="mod">
+          <ac:chgData name="Taran Schlichtmann" userId="fa341e061f349481" providerId="LiveId" clId="{E98D3F9C-6EE3-414F-B938-06362BDADCD8}" dt="2026-05-21T22:23:06.991" v="1017" actId="207"/>
+          <ac:spMkLst>
+            <pc:docMk/>
+            <pc:sldMk cId="0" sldId="256"/>
+            <ac:spMk id="5" creationId="{00000000-0000-0000-0000-000000000000}"/>
+          </ac:spMkLst>
+        </pc:spChg>
+        <pc:spChg chg="mod">
+          <ac:chgData name="Taran Schlichtmann" userId="fa341e061f349481" providerId="LiveId" clId="{E98D3F9C-6EE3-414F-B938-06362BDADCD8}" dt="2026-05-20T01:34:29.396" v="42" actId="1076"/>
+          <ac:spMkLst>
+            <pc:docMk/>
+            <pc:sldMk cId="0" sldId="256"/>
+            <ac:spMk id="6" creationId="{00000000-0000-0000-0000-000000000000}"/>
+          </ac:spMkLst>
+        </pc:spChg>
+        <pc:spChg chg="mod">
+          <ac:chgData name="Taran Schlichtmann" userId="fa341e061f349481" providerId="LiveId" clId="{E98D3F9C-6EE3-414F-B938-06362BDADCD8}" dt="2026-05-20T01:34:25.171" v="41" actId="1076"/>
+          <ac:spMkLst>
+            <pc:docMk/>
+            <pc:sldMk cId="0" sldId="256"/>
+            <ac:spMk id="7" creationId="{00000000-0000-0000-0000-000000000000}"/>
+          </ac:spMkLst>
+        </pc:spChg>
+        <pc:spChg chg="mod">
+          <ac:chgData name="Taran Schlichtmann" userId="fa341e061f349481" providerId="LiveId" clId="{E98D3F9C-6EE3-414F-B938-06362BDADCD8}" dt="2026-05-21T22:23:10.057" v="1018" actId="207"/>
+          <ac:spMkLst>
+            <pc:docMk/>
+            <pc:sldMk cId="0" sldId="256"/>
+            <ac:spMk id="8" creationId="{00000000-0000-0000-0000-000000000000}"/>
+          </ac:spMkLst>
+        </pc:spChg>
+        <pc:spChg chg="del mod">
+          <ac:chgData name="Taran Schlichtmann" userId="fa341e061f349481" providerId="LiveId" clId="{E98D3F9C-6EE3-414F-B938-06362BDADCD8}" dt="2026-05-21T22:19:15.452" v="1015" actId="478"/>
+          <ac:spMkLst>
+            <pc:docMk/>
+            <pc:sldMk cId="0" sldId="256"/>
+            <ac:spMk id="9" creationId="{00000000-0000-0000-0000-000000000000}"/>
+          </ac:spMkLst>
+        </pc:spChg>
+        <pc:spChg chg="mod">
+          <ac:chgData name="Taran Schlichtmann" userId="fa341e061f349481" providerId="LiveId" clId="{E98D3F9C-6EE3-414F-B938-06362BDADCD8}" dt="2026-05-20T01:33:48.247" v="33" actId="20577"/>
+          <ac:spMkLst>
+            <pc:docMk/>
+            <pc:sldMk cId="0" sldId="256"/>
+            <ac:spMk id="10" creationId="{00000000-0000-0000-0000-000000000000}"/>
+          </ac:spMkLst>
+        </pc:spChg>
+        <pc:picChg chg="add mod">
+          <ac:chgData name="Taran Schlichtmann" userId="fa341e061f349481" providerId="LiveId" clId="{E98D3F9C-6EE3-414F-B938-06362BDADCD8}" dt="2026-05-21T22:19:24.619" v="1016" actId="1076"/>
+          <ac:picMkLst>
+            <pc:docMk/>
+            <pc:sldMk cId="0" sldId="256"/>
+            <ac:picMk id="12" creationId="{86573F06-2EA7-B363-13B2-11D7EDCFD428}"/>
+          </ac:picMkLst>
+        </pc:picChg>
+      </pc:sldChg>
+      <pc:sldChg chg="addSp delSp modSp mod">
+        <pc:chgData name="Taran Schlichtmann" userId="fa341e061f349481" providerId="LiveId" clId="{E98D3F9C-6EE3-414F-B938-06362BDADCD8}" dt="2026-05-21T22:18:41.943" v="1011" actId="1076"/>
+        <pc:sldMkLst>
+          <pc:docMk/>
+          <pc:sldMk cId="0" sldId="257"/>
+        </pc:sldMkLst>
+        <pc:spChg chg="del mod">
+          <ac:chgData name="Taran Schlichtmann" userId="fa341e061f349481" providerId="LiveId" clId="{E98D3F9C-6EE3-414F-B938-06362BDADCD8}" dt="2026-05-20T01:52:46.154" v="177" actId="478"/>
+          <ac:spMkLst>
+            <pc:docMk/>
+            <pc:sldMk cId="0" sldId="257"/>
+            <ac:spMk id="5" creationId="{00000000-0000-0000-0000-000000000000}"/>
+          </ac:spMkLst>
+        </pc:spChg>
+        <pc:spChg chg="del">
+          <ac:chgData name="Taran Schlichtmann" userId="fa341e061f349481" providerId="LiveId" clId="{E98D3F9C-6EE3-414F-B938-06362BDADCD8}" dt="2026-05-20T01:52:44.059" v="175" actId="478"/>
+          <ac:spMkLst>
+            <pc:docMk/>
+            <pc:sldMk cId="0" sldId="257"/>
+            <ac:spMk id="6" creationId="{00000000-0000-0000-0000-000000000000}"/>
+          </ac:spMkLst>
+        </pc:spChg>
+        <pc:spChg chg="del mod">
+          <ac:chgData name="Taran Schlichtmann" userId="fa341e061f349481" providerId="LiveId" clId="{E98D3F9C-6EE3-414F-B938-06362BDADCD8}" dt="2026-05-20T01:52:41.268" v="172" actId="478"/>
+          <ac:spMkLst>
+            <pc:docMk/>
+            <pc:sldMk cId="0" sldId="257"/>
+            <ac:spMk id="7" creationId="{00000000-0000-0000-0000-000000000000}"/>
+          </ac:spMkLst>
+        </pc:spChg>
+        <pc:spChg chg="del mod">
+          <ac:chgData name="Taran Schlichtmann" userId="fa341e061f349481" providerId="LiveId" clId="{E98D3F9C-6EE3-414F-B938-06362BDADCD8}" dt="2026-05-20T01:52:42.909" v="174" actId="478"/>
+          <ac:spMkLst>
+            <pc:docMk/>
+            <pc:sldMk cId="0" sldId="257"/>
+            <ac:spMk id="8" creationId="{00000000-0000-0000-0000-000000000000}"/>
+          </ac:spMkLst>
+        </pc:spChg>
+        <pc:spChg chg="del">
+          <ac:chgData name="Taran Schlichtmann" userId="fa341e061f349481" providerId="LiveId" clId="{E98D3F9C-6EE3-414F-B938-06362BDADCD8}" dt="2026-05-20T01:52:49.080" v="178" actId="478"/>
+          <ac:spMkLst>
+            <pc:docMk/>
+            <pc:sldMk cId="0" sldId="257"/>
+            <ac:spMk id="9" creationId="{00000000-0000-0000-0000-000000000000}"/>
+          </ac:spMkLst>
+        </pc:spChg>
+        <pc:spChg chg="del">
+          <ac:chgData name="Taran Schlichtmann" userId="fa341e061f349481" providerId="LiveId" clId="{E98D3F9C-6EE3-414F-B938-06362BDADCD8}" dt="2026-05-20T01:52:31.944" v="165" actId="478"/>
+          <ac:spMkLst>
+            <pc:docMk/>
+            <pc:sldMk cId="0" sldId="257"/>
+            <ac:spMk id="10" creationId="{00000000-0000-0000-0000-000000000000}"/>
+          </ac:spMkLst>
+        </pc:spChg>
+        <pc:spChg chg="del mod">
+          <ac:chgData name="Taran Schlichtmann" userId="fa341e061f349481" providerId="LiveId" clId="{E98D3F9C-6EE3-414F-B938-06362BDADCD8}" dt="2026-05-20T01:52:40.379" v="171" actId="478"/>
+          <ac:spMkLst>
+            <pc:docMk/>
+            <pc:sldMk cId="0" sldId="257"/>
+            <ac:spMk id="11" creationId="{00000000-0000-0000-0000-000000000000}"/>
+          </ac:spMkLst>
+        </pc:spChg>
+        <pc:spChg chg="mod">
+          <ac:chgData name="Taran Schlichtmann" userId="fa341e061f349481" providerId="LiveId" clId="{E98D3F9C-6EE3-414F-B938-06362BDADCD8}" dt="2026-05-20T01:38:51.700" v="99" actId="207"/>
+          <ac:spMkLst>
+            <pc:docMk/>
+            <pc:sldMk cId="0" sldId="257"/>
+            <ac:spMk id="12" creationId="{00000000-0000-0000-0000-000000000000}"/>
+          </ac:spMkLst>
+        </pc:spChg>
+        <pc:spChg chg="mod">
+          <ac:chgData name="Taran Schlichtmann" userId="fa341e061f349481" providerId="LiveId" clId="{E98D3F9C-6EE3-414F-B938-06362BDADCD8}" dt="2026-05-20T02:19:19.588" v="805" actId="1076"/>
+          <ac:spMkLst>
+            <pc:docMk/>
+            <pc:sldMk cId="0" sldId="257"/>
+            <ac:spMk id="13" creationId="{00000000-0000-0000-0000-000000000000}"/>
+          </ac:spMkLst>
+        </pc:spChg>
+        <pc:spChg chg="del mod">
+          <ac:chgData name="Taran Schlichtmann" userId="fa341e061f349481" providerId="LiveId" clId="{E98D3F9C-6EE3-414F-B938-06362BDADCD8}" dt="2026-05-20T01:57:02.164" v="234" actId="478"/>
+          <ac:spMkLst>
+            <pc:docMk/>
+            <pc:sldMk cId="0" sldId="257"/>
+            <ac:spMk id="14" creationId="{00000000-0000-0000-0000-000000000000}"/>
+          </ac:spMkLst>
+        </pc:spChg>
+        <pc:spChg chg="del mod">
+          <ac:chgData name="Taran Schlichtmann" userId="fa341e061f349481" providerId="LiveId" clId="{E98D3F9C-6EE3-414F-B938-06362BDADCD8}" dt="2026-05-20T01:57:00.224" v="233" actId="478"/>
+          <ac:spMkLst>
+            <pc:docMk/>
+            <pc:sldMk cId="0" sldId="257"/>
+            <ac:spMk id="15" creationId="{00000000-0000-0000-0000-000000000000}"/>
+          </ac:spMkLst>
+        </pc:spChg>
+        <pc:spChg chg="del mod">
+          <ac:chgData name="Taran Schlichtmann" userId="fa341e061f349481" providerId="LiveId" clId="{E98D3F9C-6EE3-414F-B938-06362BDADCD8}" dt="2026-05-20T01:56:58.614" v="232" actId="478"/>
+          <ac:spMkLst>
+            <pc:docMk/>
+            <pc:sldMk cId="0" sldId="257"/>
+            <ac:spMk id="16" creationId="{00000000-0000-0000-0000-000000000000}"/>
+          </ac:spMkLst>
+        </pc:spChg>
+        <pc:spChg chg="mod">
+          <ac:chgData name="Taran Schlichtmann" userId="fa341e061f349481" providerId="LiveId" clId="{E98D3F9C-6EE3-414F-B938-06362BDADCD8}" dt="2026-05-20T01:57:09.453" v="235" actId="1076"/>
+          <ac:spMkLst>
+            <pc:docMk/>
+            <pc:sldMk cId="0" sldId="257"/>
+            <ac:spMk id="17" creationId="{00000000-0000-0000-0000-000000000000}"/>
+          </ac:spMkLst>
+        </pc:spChg>
+        <pc:spChg chg="mod">
+          <ac:chgData name="Taran Schlichtmann" userId="fa341e061f349481" providerId="LiveId" clId="{E98D3F9C-6EE3-414F-B938-06362BDADCD8}" dt="2026-05-20T01:38:22.283" v="96" actId="207"/>
+          <ac:spMkLst>
+            <pc:docMk/>
+            <pc:sldMk cId="0" sldId="257"/>
+            <ac:spMk id="20" creationId="{00000000-0000-0000-0000-000000000000}"/>
+          </ac:spMkLst>
+        </pc:spChg>
+        <pc:spChg chg="mod">
+          <ac:chgData name="Taran Schlichtmann" userId="fa341e061f349481" providerId="LiveId" clId="{E98D3F9C-6EE3-414F-B938-06362BDADCD8}" dt="2026-05-20T02:20:32.354" v="816" actId="255"/>
+          <ac:spMkLst>
+            <pc:docMk/>
+            <pc:sldMk cId="0" sldId="257"/>
+            <ac:spMk id="21" creationId="{00000000-0000-0000-0000-000000000000}"/>
+          </ac:spMkLst>
+        </pc:spChg>
+        <pc:spChg chg="add mod">
+          <ac:chgData name="Taran Schlichtmann" userId="fa341e061f349481" providerId="LiveId" clId="{E98D3F9C-6EE3-414F-B938-06362BDADCD8}" dt="2026-05-21T22:18:41.943" v="1011" actId="1076"/>
+          <ac:spMkLst>
+            <pc:docMk/>
+            <pc:sldMk cId="0" sldId="257"/>
+            <ac:spMk id="28" creationId="{7E9DB464-3701-4929-1344-3361CE01A2C0}"/>
+          </ac:spMkLst>
+        </pc:spChg>
+        <pc:spChg chg="add mod">
+          <ac:chgData name="Taran Schlichtmann" userId="fa341e061f349481" providerId="LiveId" clId="{E98D3F9C-6EE3-414F-B938-06362BDADCD8}" dt="2026-05-21T21:57:21.497" v="821" actId="1076"/>
+          <ac:spMkLst>
+            <pc:docMk/>
+            <pc:sldMk cId="0" sldId="257"/>
+            <ac:spMk id="29" creationId="{7E9DB464-3701-4929-1344-3361CE01A2C0}"/>
+          </ac:spMkLst>
+        </pc:spChg>
+        <pc:spChg chg="add mod">
+          <ac:chgData name="Taran Schlichtmann" userId="fa341e061f349481" providerId="LiveId" clId="{E98D3F9C-6EE3-414F-B938-06362BDADCD8}" dt="2026-05-21T22:18:34.804" v="1010" actId="1076"/>
+          <ac:spMkLst>
+            <pc:docMk/>
+            <pc:sldMk cId="0" sldId="257"/>
+            <ac:spMk id="30" creationId="{7E9DB464-3701-4929-1344-3361CE01A2C0}"/>
+          </ac:spMkLst>
+        </pc:spChg>
+        <pc:spChg chg="add mod">
+          <ac:chgData name="Taran Schlichtmann" userId="fa341e061f349481" providerId="LiveId" clId="{E98D3F9C-6EE3-414F-B938-06362BDADCD8}" dt="2026-05-21T22:18:31.823" v="1009" actId="1076"/>
+          <ac:spMkLst>
+            <pc:docMk/>
+            <pc:sldMk cId="0" sldId="257"/>
+            <ac:spMk id="31" creationId="{7E9DB464-3701-4929-1344-3361CE01A2C0}"/>
+          </ac:spMkLst>
+        </pc:spChg>
+        <pc:spChg chg="add mod">
+          <ac:chgData name="Taran Schlichtmann" userId="fa341e061f349481" providerId="LiveId" clId="{E98D3F9C-6EE3-414F-B938-06362BDADCD8}" dt="2026-05-21T22:18:24.791" v="1008" actId="1076"/>
+          <ac:spMkLst>
+            <pc:docMk/>
+            <pc:sldMk cId="0" sldId="257"/>
+            <ac:spMk id="32" creationId="{7E9DB464-3701-4929-1344-3361CE01A2C0}"/>
+          </ac:spMkLst>
+        </pc:spChg>
+        <pc:graphicFrameChg chg="add del mod">
+          <ac:chgData name="Taran Schlichtmann" userId="fa341e061f349481" providerId="LiveId" clId="{E98D3F9C-6EE3-414F-B938-06362BDADCD8}" dt="2026-05-20T01:47:13.617" v="159" actId="478"/>
+          <ac:graphicFrameMkLst>
+            <pc:docMk/>
+            <pc:sldMk cId="0" sldId="257"/>
+            <ac:graphicFrameMk id="24" creationId="{A5108A2B-CE4A-7691-3DFF-E844A1A17F3E}"/>
+          </ac:graphicFrameMkLst>
+        </pc:graphicFrameChg>
+        <pc:graphicFrameChg chg="add mod">
+          <ac:chgData name="Taran Schlichtmann" userId="fa341e061f349481" providerId="LiveId" clId="{E98D3F9C-6EE3-414F-B938-06362BDADCD8}" dt="2026-05-21T22:17:37.276" v="994" actId="404"/>
+          <ac:graphicFrameMkLst>
+            <pc:docMk/>
+            <pc:sldMk cId="0" sldId="257"/>
+            <ac:graphicFrameMk id="25" creationId="{6A38D077-875C-4360-049B-446F9D10F04B}"/>
+          </ac:graphicFrameMkLst>
+        </pc:graphicFrameChg>
+        <pc:graphicFrameChg chg="add del mod">
+          <ac:chgData name="Taran Schlichtmann" userId="fa341e061f349481" providerId="LiveId" clId="{E98D3F9C-6EE3-414F-B938-06362BDADCD8}" dt="2026-05-20T01:56:07.895" v="209" actId="478"/>
+          <ac:graphicFrameMkLst>
+            <pc:docMk/>
+            <pc:sldMk cId="0" sldId="257"/>
+            <ac:graphicFrameMk id="26" creationId="{6D6060F4-9069-7CD6-DD05-9108633862EB}"/>
+          </ac:graphicFrameMkLst>
+        </pc:graphicFrameChg>
+        <pc:graphicFrameChg chg="add mod">
+          <ac:chgData name="Taran Schlichtmann" userId="fa341e061f349481" providerId="LiveId" clId="{E98D3F9C-6EE3-414F-B938-06362BDADCD8}" dt="2026-05-21T22:18:06.884" v="1007" actId="207"/>
+          <ac:graphicFrameMkLst>
+            <pc:docMk/>
+            <pc:sldMk cId="0" sldId="257"/>
+            <ac:graphicFrameMk id="27" creationId="{6D6060F4-9069-7CD6-DD05-9108633862EB}"/>
+          </ac:graphicFrameMkLst>
+        </pc:graphicFrameChg>
+      </pc:sldChg>
+      <pc:sldChg chg="addSp delSp modSp mod">
+        <pc:chgData name="Taran Schlichtmann" userId="fa341e061f349481" providerId="LiveId" clId="{E98D3F9C-6EE3-414F-B938-06362BDADCD8}" dt="2026-05-21T22:16:26.959" v="952"/>
+        <pc:sldMkLst>
+          <pc:docMk/>
+          <pc:sldMk cId="0" sldId="258"/>
+        </pc:sldMkLst>
+        <pc:spChg chg="del mod">
+          <ac:chgData name="Taran Schlichtmann" userId="fa341e061f349481" providerId="LiveId" clId="{E98D3F9C-6EE3-414F-B938-06362BDADCD8}" dt="2026-05-20T02:13:15.402" v="688" actId="478"/>
+          <ac:spMkLst>
+            <pc:docMk/>
+            <pc:sldMk cId="0" sldId="258"/>
+            <ac:spMk id="5" creationId="{00000000-0000-0000-0000-000000000000}"/>
+          </ac:spMkLst>
+        </pc:spChg>
+        <pc:spChg chg="del">
+          <ac:chgData name="Taran Schlichtmann" userId="fa341e061f349481" providerId="LiveId" clId="{E98D3F9C-6EE3-414F-B938-06362BDADCD8}" dt="2026-05-20T02:13:16.257" v="689" actId="478"/>
+          <ac:spMkLst>
+            <pc:docMk/>
+            <pc:sldMk cId="0" sldId="258"/>
+            <ac:spMk id="6" creationId="{00000000-0000-0000-0000-000000000000}"/>
+          </ac:spMkLst>
+        </pc:spChg>
+        <pc:spChg chg="del">
+          <ac:chgData name="Taran Schlichtmann" userId="fa341e061f349481" providerId="LiveId" clId="{E98D3F9C-6EE3-414F-B938-06362BDADCD8}" dt="2026-05-20T02:13:16.791" v="690" actId="478"/>
+          <ac:spMkLst>
+            <pc:docMk/>
+            <pc:sldMk cId="0" sldId="258"/>
+            <ac:spMk id="7" creationId="{00000000-0000-0000-0000-000000000000}"/>
+          </ac:spMkLst>
+        </pc:spChg>
+        <pc:spChg chg="del mod">
+          <ac:chgData name="Taran Schlichtmann" userId="fa341e061f349481" providerId="LiveId" clId="{E98D3F9C-6EE3-414F-B938-06362BDADCD8}" dt="2026-05-20T02:13:18.696" v="692" actId="478"/>
+          <ac:spMkLst>
+            <pc:docMk/>
+            <pc:sldMk cId="0" sldId="258"/>
+            <ac:spMk id="8" creationId="{00000000-0000-0000-0000-000000000000}"/>
+          </ac:spMkLst>
+        </pc:spChg>
+        <pc:spChg chg="del">
+          <ac:chgData name="Taran Schlichtmann" userId="fa341e061f349481" providerId="LiveId" clId="{E98D3F9C-6EE3-414F-B938-06362BDADCD8}" dt="2026-05-20T02:13:19.581" v="693" actId="478"/>
+          <ac:spMkLst>
+            <pc:docMk/>
+            <pc:sldMk cId="0" sldId="258"/>
+            <ac:spMk id="9" creationId="{00000000-0000-0000-0000-000000000000}"/>
+          </ac:spMkLst>
+        </pc:spChg>
+        <pc:spChg chg="del">
+          <ac:chgData name="Taran Schlichtmann" userId="fa341e061f349481" providerId="LiveId" clId="{E98D3F9C-6EE3-414F-B938-06362BDADCD8}" dt="2026-05-20T02:13:20.196" v="694" actId="478"/>
+          <ac:spMkLst>
+            <pc:docMk/>
+            <pc:sldMk cId="0" sldId="258"/>
+            <ac:spMk id="10" creationId="{00000000-0000-0000-0000-000000000000}"/>
+          </ac:spMkLst>
+        </pc:spChg>
+        <pc:spChg chg="del mod">
+          <ac:chgData name="Taran Schlichtmann" userId="fa341e061f349481" providerId="LiveId" clId="{E98D3F9C-6EE3-414F-B938-06362BDADCD8}" dt="2026-05-20T02:13:30.506" v="701" actId="478"/>
+          <ac:spMkLst>
+            <pc:docMk/>
+            <pc:sldMk cId="0" sldId="258"/>
+            <ac:spMk id="11" creationId="{00000000-0000-0000-0000-000000000000}"/>
+          </ac:spMkLst>
+        </pc:spChg>
+        <pc:spChg chg="del">
+          <ac:chgData name="Taran Schlichtmann" userId="fa341e061f349481" providerId="LiveId" clId="{E98D3F9C-6EE3-414F-B938-06362BDADCD8}" dt="2026-05-20T02:13:27.552" v="699" actId="478"/>
+          <ac:spMkLst>
+            <pc:docMk/>
+            <pc:sldMk cId="0" sldId="258"/>
+            <ac:spMk id="12" creationId="{00000000-0000-0000-0000-000000000000}"/>
+          </ac:spMkLst>
+        </pc:spChg>
+        <pc:spChg chg="del">
+          <ac:chgData name="Taran Schlichtmann" userId="fa341e061f349481" providerId="LiveId" clId="{E98D3F9C-6EE3-414F-B938-06362BDADCD8}" dt="2026-05-20T02:13:26.137" v="698" actId="478"/>
+          <ac:spMkLst>
+            <pc:docMk/>
+            <pc:sldMk cId="0" sldId="258"/>
+            <ac:spMk id="13" creationId="{00000000-0000-0000-0000-000000000000}"/>
+          </ac:spMkLst>
+        </pc:spChg>
+        <pc:spChg chg="del mod">
+          <ac:chgData name="Taran Schlichtmann" userId="fa341e061f349481" providerId="LiveId" clId="{E98D3F9C-6EE3-414F-B938-06362BDADCD8}" dt="2026-05-20T02:13:28.991" v="700" actId="478"/>
+          <ac:spMkLst>
+            <pc:docMk/>
+            <pc:sldMk cId="0" sldId="258"/>
+            <ac:spMk id="14" creationId="{00000000-0000-0000-0000-000000000000}"/>
+          </ac:spMkLst>
+        </pc:spChg>
+        <pc:spChg chg="mod">
+          <ac:chgData name="Taran Schlichtmann" userId="fa341e061f349481" providerId="LiveId" clId="{E98D3F9C-6EE3-414F-B938-06362BDADCD8}" dt="2026-05-20T02:18:17.858" v="801" actId="20577"/>
+          <ac:spMkLst>
+            <pc:docMk/>
+            <pc:sldMk cId="0" sldId="258"/>
+            <ac:spMk id="16" creationId="{00000000-0000-0000-0000-000000000000}"/>
+          </ac:spMkLst>
+        </pc:spChg>
+        <pc:spChg chg="mod">
+          <ac:chgData name="Taran Schlichtmann" userId="fa341e061f349481" providerId="LiveId" clId="{E98D3F9C-6EE3-414F-B938-06362BDADCD8}" dt="2026-05-21T22:15:22.271" v="932" actId="403"/>
+          <ac:spMkLst>
+            <pc:docMk/>
+            <pc:sldMk cId="0" sldId="258"/>
+            <ac:spMk id="19" creationId="{00000000-0000-0000-0000-000000000000}"/>
+          </ac:spMkLst>
+        </pc:spChg>
+        <pc:spChg chg="mod">
+          <ac:chgData name="Taran Schlichtmann" userId="fa341e061f349481" providerId="LiveId" clId="{E98D3F9C-6EE3-414F-B938-06362BDADCD8}" dt="2026-05-20T01:32:19.949" v="23" actId="207"/>
+          <ac:spMkLst>
+            <pc:docMk/>
+            <pc:sldMk cId="0" sldId="258"/>
+            <ac:spMk id="20" creationId="{00000000-0000-0000-0000-000000000000}"/>
+          </ac:spMkLst>
+        </pc:spChg>
+        <pc:spChg chg="mod">
+          <ac:chgData name="Taran Schlichtmann" userId="fa341e061f349481" providerId="LiveId" clId="{E98D3F9C-6EE3-414F-B938-06362BDADCD8}" dt="2026-05-21T22:15:19.332" v="931" actId="403"/>
+          <ac:spMkLst>
+            <pc:docMk/>
+            <pc:sldMk cId="0" sldId="258"/>
+            <ac:spMk id="21" creationId="{00000000-0000-0000-0000-000000000000}"/>
+          </ac:spMkLst>
+        </pc:spChg>
+        <pc:spChg chg="mod">
+          <ac:chgData name="Taran Schlichtmann" userId="fa341e061f349481" providerId="LiveId" clId="{E98D3F9C-6EE3-414F-B938-06362BDADCD8}" dt="2026-05-21T22:15:15.676" v="930" actId="403"/>
+          <ac:spMkLst>
+            <pc:docMk/>
+            <pc:sldMk cId="0" sldId="258"/>
+            <ac:spMk id="22" creationId="{00000000-0000-0000-0000-000000000000}"/>
+          </ac:spMkLst>
+        </pc:spChg>
+        <pc:spChg chg="mod">
+          <ac:chgData name="Taran Schlichtmann" userId="fa341e061f349481" providerId="LiveId" clId="{E98D3F9C-6EE3-414F-B938-06362BDADCD8}" dt="2026-05-21T22:14:53.608" v="925" actId="403"/>
+          <ac:spMkLst>
+            <pc:docMk/>
+            <pc:sldMk cId="0" sldId="258"/>
+            <ac:spMk id="25" creationId="{00000000-0000-0000-0000-000000000000}"/>
+          </ac:spMkLst>
+        </pc:spChg>
+        <pc:spChg chg="mod">
+          <ac:chgData name="Taran Schlichtmann" userId="fa341e061f349481" providerId="LiveId" clId="{E98D3F9C-6EE3-414F-B938-06362BDADCD8}" dt="2026-05-21T22:15:08.837" v="929" actId="403"/>
+          <ac:spMkLst>
+            <pc:docMk/>
+            <pc:sldMk cId="0" sldId="258"/>
+            <ac:spMk id="26" creationId="{00000000-0000-0000-0000-000000000000}"/>
+          </ac:spMkLst>
+        </pc:spChg>
+        <pc:graphicFrameChg chg="add mod">
+          <ac:chgData name="Taran Schlichtmann" userId="fa341e061f349481" providerId="LiveId" clId="{E98D3F9C-6EE3-414F-B938-06362BDADCD8}" dt="2026-05-21T22:16:26.959" v="952"/>
+          <ac:graphicFrameMkLst>
+            <pc:docMk/>
+            <pc:sldMk cId="0" sldId="258"/>
+            <ac:graphicFrameMk id="27" creationId="{6B4E14DE-4731-EFAF-0557-C6B8360762D0}"/>
+          </ac:graphicFrameMkLst>
+        </pc:graphicFrameChg>
+      </pc:sldChg>
+      <pc:sldChg chg="modSp mod ord">
+        <pc:chgData name="Taran Schlichtmann" userId="fa341e061f349481" providerId="LiveId" clId="{E98D3F9C-6EE3-414F-B938-06362BDADCD8}" dt="2026-05-21T22:14:43.547" v="924" actId="403"/>
+        <pc:sldMkLst>
+          <pc:docMk/>
+          <pc:sldMk cId="0" sldId="259"/>
+        </pc:sldMkLst>
+        <pc:spChg chg="mod">
+          <ac:chgData name="Taran Schlichtmann" userId="fa341e061f349481" providerId="LiveId" clId="{E98D3F9C-6EE3-414F-B938-06362BDADCD8}" dt="2026-05-21T22:14:43.547" v="924" actId="403"/>
+          <ac:spMkLst>
+            <pc:docMk/>
+            <pc:sldMk cId="0" sldId="259"/>
+            <ac:spMk id="5" creationId="{00000000-0000-0000-0000-000000000000}"/>
+          </ac:spMkLst>
+        </pc:spChg>
+        <pc:spChg chg="mod">
+          <ac:chgData name="Taran Schlichtmann" userId="fa341e061f349481" providerId="LiveId" clId="{E98D3F9C-6EE3-414F-B938-06362BDADCD8}" dt="2026-05-21T21:58:41.094" v="828" actId="1076"/>
+          <ac:spMkLst>
+            <pc:docMk/>
+            <pc:sldMk cId="0" sldId="259"/>
+            <ac:spMk id="6" creationId="{00000000-0000-0000-0000-000000000000}"/>
+          </ac:spMkLst>
+        </pc:spChg>
+        <pc:spChg chg="mod">
+          <ac:chgData name="Taran Schlichtmann" userId="fa341e061f349481" providerId="LiveId" clId="{E98D3F9C-6EE3-414F-B938-06362BDADCD8}" dt="2026-05-21T22:13:33.143" v="911" actId="1076"/>
+          <ac:spMkLst>
+            <pc:docMk/>
+            <pc:sldMk cId="0" sldId="259"/>
+            <ac:spMk id="7" creationId="{00000000-0000-0000-0000-000000000000}"/>
+          </ac:spMkLst>
+        </pc:spChg>
+        <pc:spChg chg="mod">
+          <ac:chgData name="Taran Schlichtmann" userId="fa341e061f349481" providerId="LiveId" clId="{E98D3F9C-6EE3-414F-B938-06362BDADCD8}" dt="2026-05-21T22:13:37.750" v="912" actId="1076"/>
+          <ac:spMkLst>
+            <pc:docMk/>
+            <pc:sldMk cId="0" sldId="259"/>
+            <ac:spMk id="8" creationId="{00000000-0000-0000-0000-000000000000}"/>
+          </ac:spMkLst>
+        </pc:spChg>
+        <pc:spChg chg="mod">
+          <ac:chgData name="Taran Schlichtmann" userId="fa341e061f349481" providerId="LiveId" clId="{E98D3F9C-6EE3-414F-B938-06362BDADCD8}" dt="2026-05-21T21:58:14.379" v="823" actId="1076"/>
+          <ac:spMkLst>
+            <pc:docMk/>
+            <pc:sldMk cId="0" sldId="259"/>
+            <ac:spMk id="9" creationId="{00000000-0000-0000-0000-000000000000}"/>
+          </ac:spMkLst>
+        </pc:spChg>
+        <pc:spChg chg="mod">
+          <ac:chgData name="Taran Schlichtmann" userId="fa341e061f349481" providerId="LiveId" clId="{E98D3F9C-6EE3-414F-B938-06362BDADCD8}" dt="2026-05-21T22:13:20.344" v="909" actId="1076"/>
+          <ac:spMkLst>
+            <pc:docMk/>
+            <pc:sldMk cId="0" sldId="259"/>
+            <ac:spMk id="10" creationId="{00000000-0000-0000-0000-000000000000}"/>
+          </ac:spMkLst>
+        </pc:spChg>
+        <pc:spChg chg="mod">
+          <ac:chgData name="Taran Schlichtmann" userId="fa341e061f349481" providerId="LiveId" clId="{E98D3F9C-6EE3-414F-B938-06362BDADCD8}" dt="2026-05-21T22:13:24.619" v="910" actId="1076"/>
+          <ac:spMkLst>
+            <pc:docMk/>
+            <pc:sldMk cId="0" sldId="259"/>
+            <ac:spMk id="11" creationId="{00000000-0000-0000-0000-000000000000}"/>
+          </ac:spMkLst>
+        </pc:spChg>
+        <pc:spChg chg="mod">
+          <ac:chgData name="Taran Schlichtmann" userId="fa341e061f349481" providerId="LiveId" clId="{E98D3F9C-6EE3-414F-B938-06362BDADCD8}" dt="2026-05-21T21:58:07.200" v="822" actId="1076"/>
+          <ac:spMkLst>
+            <pc:docMk/>
+            <pc:sldMk cId="0" sldId="259"/>
+            <ac:spMk id="12" creationId="{00000000-0000-0000-0000-000000000000}"/>
+          </ac:spMkLst>
+        </pc:spChg>
+        <pc:spChg chg="mod">
+          <ac:chgData name="Taran Schlichtmann" userId="fa341e061f349481" providerId="LiveId" clId="{E98D3F9C-6EE3-414F-B938-06362BDADCD8}" dt="2026-05-21T22:13:53.906" v="914" actId="1076"/>
+          <ac:spMkLst>
+            <pc:docMk/>
+            <pc:sldMk cId="0" sldId="259"/>
+            <ac:spMk id="13" creationId="{00000000-0000-0000-0000-000000000000}"/>
+          </ac:spMkLst>
+        </pc:spChg>
+        <pc:spChg chg="mod">
+          <ac:chgData name="Taran Schlichtmann" userId="fa341e061f349481" providerId="LiveId" clId="{E98D3F9C-6EE3-414F-B938-06362BDADCD8}" dt="2026-05-21T22:14:03.440" v="916" actId="1076"/>
+          <ac:spMkLst>
+            <pc:docMk/>
+            <pc:sldMk cId="0" sldId="259"/>
+            <ac:spMk id="14" creationId="{00000000-0000-0000-0000-000000000000}"/>
+          </ac:spMkLst>
+        </pc:spChg>
+        <pc:spChg chg="mod">
+          <ac:chgData name="Taran Schlichtmann" userId="fa341e061f349481" providerId="LiveId" clId="{E98D3F9C-6EE3-414F-B938-06362BDADCD8}" dt="2026-05-20T01:31:26.452" v="13" actId="207"/>
+          <ac:spMkLst>
+            <pc:docMk/>
+            <pc:sldMk cId="0" sldId="259"/>
+            <ac:spMk id="15" creationId="{00000000-0000-0000-0000-000000000000}"/>
+          </ac:spMkLst>
+        </pc:spChg>
+        <pc:spChg chg="mod">
+          <ac:chgData name="Taran Schlichtmann" userId="fa341e061f349481" providerId="LiveId" clId="{E98D3F9C-6EE3-414F-B938-06362BDADCD8}" dt="2026-05-21T22:14:13.362" v="917" actId="403"/>
+          <ac:spMkLst>
+            <pc:docMk/>
+            <pc:sldMk cId="0" sldId="259"/>
+            <ac:spMk id="17" creationId="{00000000-0000-0000-0000-000000000000}"/>
+          </ac:spMkLst>
+        </pc:spChg>
+        <pc:spChg chg="mod">
+          <ac:chgData name="Taran Schlichtmann" userId="fa341e061f349481" providerId="LiveId" clId="{E98D3F9C-6EE3-414F-B938-06362BDADCD8}" dt="2026-05-21T22:14:19.759" v="918" actId="403"/>
+          <ac:spMkLst>
+            <pc:docMk/>
+            <pc:sldMk cId="0" sldId="259"/>
+            <ac:spMk id="19" creationId="{00000000-0000-0000-0000-000000000000}"/>
+          </ac:spMkLst>
+        </pc:spChg>
+        <pc:spChg chg="mod">
+          <ac:chgData name="Taran Schlichtmann" userId="fa341e061f349481" providerId="LiveId" clId="{E98D3F9C-6EE3-414F-B938-06362BDADCD8}" dt="2026-05-21T22:14:23.205" v="919" actId="403"/>
+          <ac:spMkLst>
+            <pc:docMk/>
+            <pc:sldMk cId="0" sldId="259"/>
+            <ac:spMk id="20" creationId="{00000000-0000-0000-0000-000000000000}"/>
+          </ac:spMkLst>
+        </pc:spChg>
+        <pc:spChg chg="mod">
+          <ac:chgData name="Taran Schlichtmann" userId="fa341e061f349481" providerId="LiveId" clId="{E98D3F9C-6EE3-414F-B938-06362BDADCD8}" dt="2026-05-21T22:14:27.061" v="920" actId="403"/>
+          <ac:spMkLst>
+            <pc:docMk/>
+            <pc:sldMk cId="0" sldId="259"/>
+            <ac:spMk id="22" creationId="{00000000-0000-0000-0000-000000000000}"/>
+          </ac:spMkLst>
+        </pc:spChg>
+        <pc:spChg chg="mod">
+          <ac:chgData name="Taran Schlichtmann" userId="fa341e061f349481" providerId="LiveId" clId="{E98D3F9C-6EE3-414F-B938-06362BDADCD8}" dt="2026-05-21T22:14:29.520" v="921" actId="403"/>
+          <ac:spMkLst>
+            <pc:docMk/>
+            <pc:sldMk cId="0" sldId="259"/>
+            <ac:spMk id="23" creationId="{00000000-0000-0000-0000-000000000000}"/>
+          </ac:spMkLst>
+        </pc:spChg>
+        <pc:spChg chg="mod">
+          <ac:chgData name="Taran Schlichtmann" userId="fa341e061f349481" providerId="LiveId" clId="{E98D3F9C-6EE3-414F-B938-06362BDADCD8}" dt="2026-05-21T22:14:35.929" v="923" actId="403"/>
+          <ac:spMkLst>
+            <pc:docMk/>
+            <pc:sldMk cId="0" sldId="259"/>
+            <ac:spMk id="25" creationId="{00000000-0000-0000-0000-000000000000}"/>
+          </ac:spMkLst>
+        </pc:spChg>
+        <pc:spChg chg="mod">
+          <ac:chgData name="Taran Schlichtmann" userId="fa341e061f349481" providerId="LiveId" clId="{E98D3F9C-6EE3-414F-B938-06362BDADCD8}" dt="2026-05-21T22:14:33.021" v="922" actId="403"/>
+          <ac:spMkLst>
+            <pc:docMk/>
+            <pc:sldMk cId="0" sldId="259"/>
+            <ac:spMk id="26" creationId="{00000000-0000-0000-0000-000000000000}"/>
+          </ac:spMkLst>
+        </pc:spChg>
+        <pc:spChg chg="mod">
+          <ac:chgData name="Taran Schlichtmann" userId="fa341e061f349481" providerId="LiveId" clId="{E98D3F9C-6EE3-414F-B938-06362BDADCD8}" dt="2026-05-20T01:31:30.640" v="14" actId="207"/>
+          <ac:spMkLst>
+            <pc:docMk/>
+            <pc:sldMk cId="0" sldId="259"/>
+            <ac:spMk id="27" creationId="{00000000-0000-0000-0000-000000000000}"/>
+          </ac:spMkLst>
+        </pc:spChg>
+      </pc:sldChg>
+    </pc:docChg>
+  </pc:docChgLst>
+</pc:chgInfo>
+</file>
+
+<file path=ppt/charts/chart1.xml><?xml version="1.0" encoding="utf-8"?>
+<c:chartSpace xmlns:c="http://schemas.openxmlformats.org/drawingml/2006/chart" xmlns:a="http://schemas.openxmlformats.org/drawingml/2006/main" xmlns:r="http://schemas.openxmlformats.org/officeDocument/2006/relationships" xmlns:c16r2="http://schemas.microsoft.com/office/drawing/2015/06/chart">
+  <c:date1904 val="0"/>
+  <c:lang val="en-US"/>
+  <c:roundedCorners val="0"/>
+  <mc:AlternateContent xmlns:mc="http://schemas.openxmlformats.org/markup-compatibility/2006">
+    <mc:Choice xmlns:c14="http://schemas.microsoft.com/office/drawing/2007/8/2/chart" Requires="c14">
+      <c14:style val="102"/>
+    </mc:Choice>
+    <mc:Fallback>
+      <c:style val="2"/>
+    </mc:Fallback>
+  </mc:AlternateContent>
+  <c:chart>
+    <c:title>
+      <c:tx>
+        <c:rich>
+          <a:bodyPr rot="0" spcFirstLastPara="1" vertOverflow="ellipsis" vert="horz" wrap="square" anchor="ctr" anchorCtr="1"/>
+          <a:lstStyle/>
+          <a:p>
+            <a:pPr>
+              <a:defRPr sz="1862" b="0" i="0" u="none" strike="noStrike" kern="1200" spc="0" baseline="0">
+                <a:solidFill>
+                  <a:schemeClr val="tx1">
+                    <a:lumMod val="65000"/>
+                    <a:lumOff val="35000"/>
+                  </a:schemeClr>
+                </a:solidFill>
+                <a:latin typeface="+mn-lt"/>
+                <a:ea typeface="+mn-ea"/>
+                <a:cs typeface="+mn-cs"/>
+              </a:defRPr>
+            </a:pPr>
+            <a:r>
+              <a:rPr lang="en-US" dirty="0">
+                <a:solidFill>
+                  <a:schemeClr val="tx1"/>
+                </a:solidFill>
+              </a:rPr>
+              <a:t>Return Rate by Comparison</a:t>
+            </a:r>
+          </a:p>
+        </c:rich>
+      </c:tx>
+      <c:layout>
+        <c:manualLayout>
+          <c:xMode val="edge"/>
+          <c:yMode val="edge"/>
+          <c:x val="0.32752800904870832"/>
+          <c:y val="7.2449919706092922E-2"/>
+        </c:manualLayout>
+      </c:layout>
+      <c:overlay val="0"/>
+      <c:spPr>
+        <a:noFill/>
+        <a:ln>
+          <a:noFill/>
+        </a:ln>
+        <a:effectLst/>
+      </c:spPr>
+      <c:txPr>
+        <a:bodyPr rot="0" spcFirstLastPara="1" vertOverflow="ellipsis" vert="horz" wrap="square" anchor="ctr" anchorCtr="1"/>
+        <a:lstStyle/>
+        <a:p>
+          <a:pPr>
+            <a:defRPr sz="1862" b="0" i="0" u="none" strike="noStrike" kern="1200" spc="0" baseline="0">
+              <a:solidFill>
+                <a:schemeClr val="tx1">
+                  <a:lumMod val="65000"/>
+                  <a:lumOff val="35000"/>
+                </a:schemeClr>
+              </a:solidFill>
+              <a:latin typeface="+mn-lt"/>
+              <a:ea typeface="+mn-ea"/>
+              <a:cs typeface="+mn-cs"/>
+            </a:defRPr>
+          </a:pPr>
+          <a:endParaRPr lang="en-US"/>
+        </a:p>
+      </c:txPr>
+    </c:title>
+    <c:autoTitleDeleted val="0"/>
+    <c:plotArea>
+      <c:layout/>
+      <c:barChart>
+        <c:barDir val="bar"/>
+        <c:grouping val="clustered"/>
+        <c:varyColors val="0"/>
+        <c:ser>
+          <c:idx val="0"/>
+          <c:order val="0"/>
+          <c:spPr>
+            <a:solidFill>
+              <a:schemeClr val="accent2"/>
+            </a:solidFill>
+            <a:ln>
+              <a:noFill/>
+            </a:ln>
+            <a:effectLst/>
+          </c:spPr>
+          <c:invertIfNegative val="0"/>
+          <c:dLbls>
+            <c:dLbl>
+              <c:idx val="0"/>
+              <c:tx>
+                <c:rich>
+                  <a:bodyPr/>
+                  <a:lstStyle/>
+                  <a:p>
+                    <a:r>
+                      <a:rPr lang="en-US"/>
+                      <a:t>10.0%</a:t>
+                    </a:r>
+                  </a:p>
+                </c:rich>
+              </c:tx>
+              <c:dLblPos val="outEnd"/>
+              <c:showLegendKey val="0"/>
+              <c:showVal val="1"/>
+              <c:showCatName val="0"/>
+              <c:showSerName val="0"/>
+              <c:showPercent val="0"/>
+              <c:showBubbleSize val="0"/>
+              <c:extLst>
+                <c:ext xmlns:c15="http://schemas.microsoft.com/office/drawing/2012/chart" uri="{CE6537A1-D6FC-4f65-9D91-7224C49458BB}">
+                  <c15:showDataLabelsRange val="0"/>
+                </c:ext>
+                <c:ext xmlns:c16="http://schemas.microsoft.com/office/drawing/2014/chart" uri="{C3380CC4-5D6E-409C-BE32-E72D297353CC}">
+                  <c16:uniqueId val="{00000000-0067-42A0-9DAA-0459921F0C24}"/>
+                </c:ext>
+              </c:extLst>
+            </c:dLbl>
+            <c:dLbl>
+              <c:idx val="1"/>
+              <c:tx>
+                <c:rich>
+                  <a:bodyPr/>
+                  <a:lstStyle/>
+                  <a:p>
+                    <a:r>
+                      <a:rPr lang="en-US"/>
+                      <a:t>19.3%</a:t>
+                    </a:r>
+                  </a:p>
+                </c:rich>
+              </c:tx>
+              <c:dLblPos val="outEnd"/>
+              <c:showLegendKey val="0"/>
+              <c:showVal val="1"/>
+              <c:showCatName val="0"/>
+              <c:showSerName val="0"/>
+              <c:showPercent val="0"/>
+              <c:showBubbleSize val="0"/>
+              <c:extLst>
+                <c:ext xmlns:c15="http://schemas.microsoft.com/office/drawing/2012/chart" uri="{CE6537A1-D6FC-4f65-9D91-7224C49458BB}">
+                  <c15:showDataLabelsRange val="0"/>
+                </c:ext>
+                <c:ext xmlns:c16="http://schemas.microsoft.com/office/drawing/2014/chart" uri="{C3380CC4-5D6E-409C-BE32-E72D297353CC}">
+                  <c16:uniqueId val="{00000001-0067-42A0-9DAA-0459921F0C24}"/>
+                </c:ext>
+              </c:extLst>
+            </c:dLbl>
+            <c:spPr>
+              <a:noFill/>
+              <a:ln>
+                <a:noFill/>
+              </a:ln>
+              <a:effectLst/>
+            </c:spPr>
+            <c:txPr>
+              <a:bodyPr rot="0" spcFirstLastPara="1" vertOverflow="ellipsis" vert="horz" wrap="square" lIns="38100" tIns="19050" rIns="38100" bIns="19050" anchor="ctr" anchorCtr="1">
+                <a:spAutoFit/>
+              </a:bodyPr>
+              <a:lstStyle/>
+              <a:p>
+                <a:pPr>
+                  <a:defRPr sz="1197" b="0" i="0" u="none" strike="noStrike" kern="1200" baseline="0">
+                    <a:solidFill>
+                      <a:schemeClr val="tx1"/>
+                    </a:solidFill>
+                    <a:latin typeface="+mn-lt"/>
+                    <a:ea typeface="+mn-ea"/>
+                    <a:cs typeface="+mn-cs"/>
+                  </a:defRPr>
+                </a:pPr>
+                <a:endParaRPr lang="en-US"/>
+              </a:p>
+            </c:txPr>
+            <c:dLblPos val="outEnd"/>
+            <c:showLegendKey val="0"/>
+            <c:showVal val="1"/>
+            <c:showCatName val="0"/>
+            <c:showSerName val="0"/>
+            <c:showPercent val="0"/>
+            <c:showBubbleSize val="0"/>
+            <c:showLeaderLines val="0"/>
+            <c:extLst>
+              <c:ext xmlns:c15="http://schemas.microsoft.com/office/drawing/2012/chart" uri="{CE6537A1-D6FC-4f65-9D91-7224C49458BB}">
+                <c15:showLeaderLines val="1"/>
+                <c15:leaderLines>
+                  <c:spPr>
+                    <a:ln w="9525" cap="flat" cmpd="sng" algn="ctr">
+                      <a:solidFill>
+                        <a:schemeClr val="tx1">
+                          <a:lumMod val="35000"/>
+                          <a:lumOff val="65000"/>
+                        </a:schemeClr>
+                      </a:solidFill>
+                      <a:round/>
+                    </a:ln>
+                    <a:effectLst/>
+                  </c:spPr>
+                </c15:leaderLines>
+              </c:ext>
+            </c:extLst>
+          </c:dLbls>
+          <c:cat>
+            <c:strRef>
+              <c:f>'[GB884 Business Questions Case ^N1_2026-05-19-1948.xlsx]GB884 Business Questions Case #'!$A$1:$B$1</c:f>
+              <c:strCache>
+                <c:ptCount val="2"/>
+                <c:pt idx="0">
+                  <c:v>Urban Hamster</c:v>
+                </c:pt>
+                <c:pt idx="1">
+                  <c:v>Industry Average (Online Retail)</c:v>
+                </c:pt>
+              </c:strCache>
+            </c:strRef>
+          </c:cat>
+          <c:val>
+            <c:numRef>
+              <c:f>'[GB884 Business Questions Case ^N1_2026-05-19-1948.xlsx]GB884 Business Questions Case #'!$A$2:$B$2</c:f>
+              <c:numCache>
+                <c:formatCode>General</c:formatCode>
+                <c:ptCount val="2"/>
+                <c:pt idx="0">
+                  <c:v>10</c:v>
+                </c:pt>
+                <c:pt idx="1">
+                  <c:v>19.3</c:v>
+                </c:pt>
+              </c:numCache>
+            </c:numRef>
+          </c:val>
+          <c:extLst>
+            <c:ext xmlns:c16="http://schemas.microsoft.com/office/drawing/2014/chart" uri="{C3380CC4-5D6E-409C-BE32-E72D297353CC}">
+              <c16:uniqueId val="{00000002-0067-42A0-9DAA-0459921F0C24}"/>
+            </c:ext>
+          </c:extLst>
+        </c:ser>
+        <c:dLbls>
+          <c:dLblPos val="outEnd"/>
+          <c:showLegendKey val="0"/>
+          <c:showVal val="1"/>
+          <c:showCatName val="0"/>
+          <c:showSerName val="0"/>
+          <c:showPercent val="0"/>
+          <c:showBubbleSize val="0"/>
+        </c:dLbls>
+        <c:gapWidth val="182"/>
+        <c:axId val="1631700175"/>
+        <c:axId val="1631698735"/>
+      </c:barChart>
+      <c:catAx>
+        <c:axId val="1631700175"/>
+        <c:scaling>
+          <c:orientation val="minMax"/>
+        </c:scaling>
+        <c:delete val="0"/>
+        <c:axPos val="l"/>
+        <c:numFmt formatCode="General" sourceLinked="1"/>
+        <c:majorTickMark val="none"/>
+        <c:minorTickMark val="none"/>
+        <c:tickLblPos val="nextTo"/>
+        <c:spPr>
+          <a:noFill/>
+          <a:ln w="9525" cap="flat" cmpd="sng" algn="ctr">
+            <a:solidFill>
+              <a:schemeClr val="tx1">
+                <a:lumMod val="15000"/>
+                <a:lumOff val="85000"/>
+              </a:schemeClr>
+            </a:solidFill>
+            <a:round/>
+          </a:ln>
+          <a:effectLst/>
+        </c:spPr>
+        <c:txPr>
+          <a:bodyPr rot="-60000000" spcFirstLastPara="1" vertOverflow="ellipsis" vert="horz" wrap="square" anchor="ctr" anchorCtr="1"/>
+          <a:lstStyle/>
+          <a:p>
+            <a:pPr>
+              <a:defRPr sz="1000" b="0" i="0" u="none" strike="noStrike" kern="1200" baseline="0">
+                <a:solidFill>
+                  <a:schemeClr val="tx1"/>
+                </a:solidFill>
+                <a:latin typeface="+mn-lt"/>
+                <a:ea typeface="+mn-ea"/>
+                <a:cs typeface="+mn-cs"/>
+              </a:defRPr>
+            </a:pPr>
+            <a:endParaRPr lang="en-US"/>
+          </a:p>
+        </c:txPr>
+        <c:crossAx val="1631698735"/>
+        <c:crosses val="autoZero"/>
+        <c:auto val="1"/>
+        <c:lblAlgn val="ctr"/>
+        <c:lblOffset val="100"/>
+        <c:noMultiLvlLbl val="0"/>
+      </c:catAx>
+      <c:valAx>
+        <c:axId val="1631698735"/>
+        <c:scaling>
+          <c:orientation val="minMax"/>
+        </c:scaling>
+        <c:delete val="0"/>
+        <c:axPos val="b"/>
+        <c:majorGridlines>
+          <c:spPr>
+            <a:ln w="9525" cap="flat" cmpd="sng" algn="ctr">
+              <a:solidFill>
+                <a:schemeClr val="tx1">
+                  <a:lumMod val="15000"/>
+                  <a:lumOff val="85000"/>
+                </a:schemeClr>
+              </a:solidFill>
+              <a:round/>
+            </a:ln>
+            <a:effectLst/>
+          </c:spPr>
+        </c:majorGridlines>
+        <c:title>
+          <c:tx>
+            <c:rich>
+              <a:bodyPr rot="0" spcFirstLastPara="1" vertOverflow="ellipsis" vert="horz" wrap="square" anchor="ctr" anchorCtr="1"/>
+              <a:lstStyle/>
+              <a:p>
+                <a:pPr>
+                  <a:defRPr sz="1330" b="0" i="0" u="none" strike="noStrike" kern="1200" baseline="0">
+                    <a:solidFill>
+                      <a:schemeClr val="tx1">
+                        <a:lumMod val="65000"/>
+                        <a:lumOff val="35000"/>
+                      </a:schemeClr>
+                    </a:solidFill>
+                    <a:latin typeface="+mn-lt"/>
+                    <a:ea typeface="+mn-ea"/>
+                    <a:cs typeface="+mn-cs"/>
+                  </a:defRPr>
+                </a:pPr>
+                <a:r>
+                  <a:rPr lang="en-US" dirty="0">
+                    <a:solidFill>
+                      <a:schemeClr val="tx1"/>
+                    </a:solidFill>
+                  </a:rPr>
+                  <a:t>Return</a:t>
+                </a:r>
+                <a:r>
+                  <a:rPr lang="en-US" baseline="0" dirty="0">
+                    <a:solidFill>
+                      <a:schemeClr val="tx1"/>
+                    </a:solidFill>
+                  </a:rPr>
+                  <a:t> Rate (%)</a:t>
+                </a:r>
+                <a:endParaRPr lang="en-US" dirty="0">
+                  <a:solidFill>
+                    <a:schemeClr val="tx1"/>
+                  </a:solidFill>
+                </a:endParaRPr>
+              </a:p>
+            </c:rich>
+          </c:tx>
+          <c:layout>
+            <c:manualLayout>
+              <c:xMode val="edge"/>
+              <c:yMode val="edge"/>
+              <c:x val="0.48403107048765875"/>
+              <c:y val="0.86940881598983577"/>
+            </c:manualLayout>
+          </c:layout>
+          <c:overlay val="0"/>
+          <c:spPr>
+            <a:noFill/>
+            <a:ln>
+              <a:noFill/>
+            </a:ln>
+            <a:effectLst/>
+          </c:spPr>
+          <c:txPr>
+            <a:bodyPr rot="0" spcFirstLastPara="1" vertOverflow="ellipsis" vert="horz" wrap="square" anchor="ctr" anchorCtr="1"/>
+            <a:lstStyle/>
+            <a:p>
+              <a:pPr>
+                <a:defRPr sz="1330" b="0" i="0" u="none" strike="noStrike" kern="1200" baseline="0">
+                  <a:solidFill>
+                    <a:schemeClr val="tx1">
+                      <a:lumMod val="65000"/>
+                      <a:lumOff val="35000"/>
+                    </a:schemeClr>
+                  </a:solidFill>
+                  <a:latin typeface="+mn-lt"/>
+                  <a:ea typeface="+mn-ea"/>
+                  <a:cs typeface="+mn-cs"/>
+                </a:defRPr>
+              </a:pPr>
+              <a:endParaRPr lang="en-US"/>
+            </a:p>
+          </c:txPr>
+        </c:title>
+        <c:numFmt formatCode="General" sourceLinked="1"/>
+        <c:majorTickMark val="none"/>
+        <c:minorTickMark val="none"/>
+        <c:tickLblPos val="nextTo"/>
+        <c:spPr>
+          <a:noFill/>
+          <a:ln>
+            <a:noFill/>
+          </a:ln>
+          <a:effectLst/>
+        </c:spPr>
+        <c:txPr>
+          <a:bodyPr rot="-60000000" spcFirstLastPara="1" vertOverflow="ellipsis" vert="horz" wrap="square" anchor="ctr" anchorCtr="1"/>
+          <a:lstStyle/>
+          <a:p>
+            <a:pPr>
+              <a:defRPr sz="1197" b="0" i="0" u="none" strike="noStrike" kern="1200" baseline="0">
+                <a:solidFill>
+                  <a:schemeClr val="tx1">
+                    <a:lumMod val="65000"/>
+                    <a:lumOff val="35000"/>
+                  </a:schemeClr>
+                </a:solidFill>
+                <a:latin typeface="+mn-lt"/>
+                <a:ea typeface="+mn-ea"/>
+                <a:cs typeface="+mn-cs"/>
+              </a:defRPr>
+            </a:pPr>
+            <a:endParaRPr lang="en-US"/>
+          </a:p>
+        </c:txPr>
+        <c:crossAx val="1631700175"/>
+        <c:crosses val="autoZero"/>
+        <c:crossBetween val="between"/>
+      </c:valAx>
+      <c:spPr>
+        <a:noFill/>
+        <a:ln>
+          <a:noFill/>
+        </a:ln>
+        <a:effectLst/>
+      </c:spPr>
+    </c:plotArea>
+    <c:plotVisOnly val="1"/>
+    <c:dispBlanksAs val="gap"/>
+    <c:showDLblsOverMax val="0"/>
+  </c:chart>
+  <c:spPr>
+    <a:noFill/>
+    <a:ln>
+      <a:noFill/>
+    </a:ln>
+    <a:effectLst/>
+  </c:spPr>
+  <c:txPr>
+    <a:bodyPr/>
+    <a:lstStyle/>
+    <a:p>
+      <a:pPr>
+        <a:defRPr/>
+      </a:pPr>
+      <a:endParaRPr lang="en-US"/>
+    </a:p>
+  </c:txPr>
+  <c:externalData r:id="rId3">
+    <c:autoUpdate val="0"/>
+  </c:externalData>
+</c:chartSpace>
+</file>
+
+<file path=ppt/charts/chart2.xml><?xml version="1.0" encoding="utf-8"?>
+<c:chartSpace xmlns:c="http://schemas.openxmlformats.org/drawingml/2006/chart" xmlns:a="http://schemas.openxmlformats.org/drawingml/2006/main" xmlns:r="http://schemas.openxmlformats.org/officeDocument/2006/relationships" xmlns:c16r2="http://schemas.microsoft.com/office/drawing/2015/06/chart">
+  <c:date1904 val="0"/>
+  <c:lang val="en-US"/>
+  <c:roundedCorners val="0"/>
+  <mc:AlternateContent xmlns:mc="http://schemas.openxmlformats.org/markup-compatibility/2006">
+    <mc:Choice xmlns:c14="http://schemas.microsoft.com/office/drawing/2007/8/2/chart" Requires="c14">
+      <c14:style val="102"/>
+    </mc:Choice>
+    <mc:Fallback>
+      <c:style val="2"/>
+    </mc:Fallback>
+  </mc:AlternateContent>
+  <c:chart>
+    <c:title>
+      <c:tx>
+        <c:rich>
+          <a:bodyPr rot="0" spcFirstLastPara="1" vertOverflow="ellipsis" vert="horz" wrap="square" anchor="ctr" anchorCtr="1"/>
+          <a:lstStyle/>
+          <a:p>
+            <a:pPr>
+              <a:defRPr sz="1800" b="0" i="0" u="none" strike="noStrike" kern="1200" spc="0" baseline="0">
+                <a:solidFill>
+                  <a:schemeClr val="tx1"/>
+                </a:solidFill>
+                <a:latin typeface="+mn-lt"/>
+                <a:ea typeface="+mn-ea"/>
+                <a:cs typeface="+mn-cs"/>
+              </a:defRPr>
+            </a:pPr>
+            <a:r>
+              <a:rPr lang="en-US" sz="1800" dirty="0">
+                <a:solidFill>
+                  <a:schemeClr val="tx1"/>
+                </a:solidFill>
+              </a:rPr>
+              <a:t>Return Rate Trend</a:t>
+            </a:r>
+          </a:p>
+        </c:rich>
+      </c:tx>
+      <c:layout>
+        <c:manualLayout>
+          <c:xMode val="edge"/>
+          <c:yMode val="edge"/>
+          <c:x val="0.4103507974964668"/>
+          <c:y val="9.2592592592592587E-3"/>
+        </c:manualLayout>
+      </c:layout>
+      <c:overlay val="0"/>
+      <c:spPr>
+        <a:noFill/>
+        <a:ln>
+          <a:noFill/>
+        </a:ln>
+        <a:effectLst/>
+      </c:spPr>
+      <c:txPr>
+        <a:bodyPr rot="0" spcFirstLastPara="1" vertOverflow="ellipsis" vert="horz" wrap="square" anchor="ctr" anchorCtr="1"/>
+        <a:lstStyle/>
+        <a:p>
+          <a:pPr>
+            <a:defRPr sz="1800" b="0" i="0" u="none" strike="noStrike" kern="1200" spc="0" baseline="0">
+              <a:solidFill>
+                <a:schemeClr val="tx1"/>
+              </a:solidFill>
+              <a:latin typeface="+mn-lt"/>
+              <a:ea typeface="+mn-ea"/>
+              <a:cs typeface="+mn-cs"/>
+            </a:defRPr>
+          </a:pPr>
+          <a:endParaRPr lang="en-US"/>
+        </a:p>
+      </c:txPr>
+    </c:title>
+    <c:autoTitleDeleted val="0"/>
+    <c:plotArea>
+      <c:layout/>
+      <c:lineChart>
+        <c:grouping val="standard"/>
+        <c:varyColors val="0"/>
+        <c:ser>
+          <c:idx val="0"/>
+          <c:order val="0"/>
+          <c:tx>
+            <c:strRef>
+              <c:f>'Return Rates by Year'!$B$1</c:f>
+              <c:strCache>
+                <c:ptCount val="1"/>
+                <c:pt idx="0">
+                  <c:v>Percent of Returned Orders by Year</c:v>
+                </c:pt>
+              </c:strCache>
+            </c:strRef>
+          </c:tx>
+          <c:spPr>
+            <a:ln w="28575" cap="rnd">
+              <a:solidFill>
+                <a:schemeClr val="accent2"/>
+              </a:solidFill>
+              <a:round/>
+            </a:ln>
+            <a:effectLst/>
+          </c:spPr>
+          <c:marker>
+            <c:symbol val="none"/>
+          </c:marker>
+          <c:dLbls>
+            <c:dLbl>
+              <c:idx val="0"/>
+              <c:tx>
+                <c:rich>
+                  <a:bodyPr/>
+                  <a:lstStyle/>
+                  <a:p>
+                    <a:fld id="{E85966BA-238A-4105-A020-C0A5844720D6}" type="VALUE">
+                      <a:rPr lang="en-US" smtClean="0"/>
+                      <a:pPr/>
+                      <a:t>[VALUE]</a:t>
+                    </a:fld>
+                    <a:r>
+                      <a:rPr lang="en-US"/>
+                      <a:t>%</a:t>
+                    </a:r>
+                  </a:p>
+                </c:rich>
+              </c:tx>
+              <c:dLblPos val="t"/>
+              <c:showLegendKey val="0"/>
+              <c:showVal val="1"/>
+              <c:showCatName val="0"/>
+              <c:showSerName val="0"/>
+              <c:showPercent val="0"/>
+              <c:showBubbleSize val="0"/>
+              <c:extLst>
+                <c:ext xmlns:c15="http://schemas.microsoft.com/office/drawing/2012/chart" uri="{CE6537A1-D6FC-4f65-9D91-7224C49458BB}">
+                  <c15:dlblFieldTable/>
+                  <c15:showDataLabelsRange val="0"/>
+                </c:ext>
+                <c:ext xmlns:c16="http://schemas.microsoft.com/office/drawing/2014/chart" uri="{C3380CC4-5D6E-409C-BE32-E72D297353CC}">
+                  <c16:uniqueId val="{00000001-B23C-4961-807D-4D6315C287C5}"/>
+                </c:ext>
+              </c:extLst>
+            </c:dLbl>
+            <c:dLbl>
+              <c:idx val="1"/>
+              <c:tx>
+                <c:rich>
+                  <a:bodyPr/>
+                  <a:lstStyle/>
+                  <a:p>
+                    <a:fld id="{260038A1-CD17-4B65-A8C8-60BB48036940}" type="VALUE">
+                      <a:rPr lang="en-US" smtClean="0"/>
+                      <a:pPr/>
+                      <a:t>[VALUE]</a:t>
+                    </a:fld>
+                    <a:r>
+                      <a:rPr lang="en-US"/>
+                      <a:t>%</a:t>
+                    </a:r>
+                  </a:p>
+                </c:rich>
+              </c:tx>
+              <c:dLblPos val="t"/>
+              <c:showLegendKey val="0"/>
+              <c:showVal val="1"/>
+              <c:showCatName val="0"/>
+              <c:showSerName val="0"/>
+              <c:showPercent val="0"/>
+              <c:showBubbleSize val="0"/>
+              <c:extLst>
+                <c:ext xmlns:c15="http://schemas.microsoft.com/office/drawing/2012/chart" uri="{CE6537A1-D6FC-4f65-9D91-7224C49458BB}">
+                  <c15:dlblFieldTable/>
+                  <c15:showDataLabelsRange val="0"/>
+                </c:ext>
+                <c:ext xmlns:c16="http://schemas.microsoft.com/office/drawing/2014/chart" uri="{C3380CC4-5D6E-409C-BE32-E72D297353CC}">
+                  <c16:uniqueId val="{00000002-B23C-4961-807D-4D6315C287C5}"/>
+                </c:ext>
+              </c:extLst>
+            </c:dLbl>
+            <c:dLbl>
+              <c:idx val="2"/>
+              <c:tx>
+                <c:rich>
+                  <a:bodyPr rot="0" spcFirstLastPara="1" vertOverflow="ellipsis" vert="horz" wrap="square" lIns="38100" tIns="19050" rIns="38100" bIns="19050" anchor="ctr" anchorCtr="1">
+                    <a:noAutofit/>
+                  </a:bodyPr>
+                  <a:lstStyle/>
+                  <a:p>
+                    <a:pPr>
+                      <a:defRPr sz="1100" b="0" i="0" u="none" strike="noStrike" kern="1200" baseline="0">
+                        <a:solidFill>
+                          <a:schemeClr val="tx1"/>
+                        </a:solidFill>
+                        <a:latin typeface="+mn-lt"/>
+                        <a:ea typeface="+mn-ea"/>
+                        <a:cs typeface="+mn-cs"/>
+                      </a:defRPr>
+                    </a:pPr>
+                    <a:fld id="{96C2AEF0-BA9A-42ED-9104-16229ADAD3C6}" type="VALUE">
+                      <a:rPr lang="en-US" smtClean="0"/>
+                      <a:pPr>
+                        <a:defRPr sz="1100">
+                          <a:solidFill>
+                            <a:schemeClr val="tx1"/>
+                          </a:solidFill>
+                        </a:defRPr>
+                      </a:pPr>
+                      <a:t>[VALUE]</a:t>
+                    </a:fld>
+                    <a:r>
+                      <a:rPr lang="en-US" dirty="0"/>
+                      <a:t>%</a:t>
+                    </a:r>
+                  </a:p>
+                </c:rich>
+              </c:tx>
+              <c:spPr>
+                <a:noFill/>
+                <a:ln>
+                  <a:noFill/>
+                </a:ln>
+                <a:effectLst/>
+              </c:spPr>
+              <c:txPr>
+                <a:bodyPr rot="0" spcFirstLastPara="1" vertOverflow="ellipsis" vert="horz" wrap="square" lIns="38100" tIns="19050" rIns="38100" bIns="19050" anchor="ctr" anchorCtr="1">
+                  <a:noAutofit/>
+                </a:bodyPr>
+                <a:lstStyle/>
+                <a:p>
+                  <a:pPr>
+                    <a:defRPr sz="1100" b="0" i="0" u="none" strike="noStrike" kern="1200" baseline="0">
+                      <a:solidFill>
+                        <a:schemeClr val="tx1"/>
+                      </a:solidFill>
+                      <a:latin typeface="+mn-lt"/>
+                      <a:ea typeface="+mn-ea"/>
+                      <a:cs typeface="+mn-cs"/>
+                    </a:defRPr>
+                  </a:pPr>
+                  <a:endParaRPr lang="en-US"/>
+                </a:p>
+              </c:txPr>
+              <c:dLblPos val="t"/>
+              <c:showLegendKey val="0"/>
+              <c:showVal val="1"/>
+              <c:showCatName val="0"/>
+              <c:showSerName val="0"/>
+              <c:showPercent val="0"/>
+              <c:showBubbleSize val="0"/>
+              <c:extLst>
+                <c:ext xmlns:c15="http://schemas.microsoft.com/office/drawing/2012/chart" uri="{CE6537A1-D6FC-4f65-9D91-7224C49458BB}">
+                  <c15:layout>
+                    <c:manualLayout>
+                      <c:w val="7.2489232115216365E-2"/>
+                      <c:h val="8.532407407407408E-2"/>
+                    </c:manualLayout>
+                  </c15:layout>
+                  <c15:dlblFieldTable/>
+                  <c15:showDataLabelsRange val="0"/>
+                </c:ext>
+                <c:ext xmlns:c16="http://schemas.microsoft.com/office/drawing/2014/chart" uri="{C3380CC4-5D6E-409C-BE32-E72D297353CC}">
+                  <c16:uniqueId val="{00000003-B23C-4961-807D-4D6315C287C5}"/>
+                </c:ext>
+              </c:extLst>
+            </c:dLbl>
+            <c:dLbl>
+              <c:idx val="3"/>
+              <c:tx>
+                <c:rich>
+                  <a:bodyPr rot="0" spcFirstLastPara="1" vertOverflow="ellipsis" vert="horz" wrap="square" lIns="38100" tIns="19050" rIns="38100" bIns="19050" anchor="ctr" anchorCtr="1">
+                    <a:noAutofit/>
+                  </a:bodyPr>
+                  <a:lstStyle/>
+                  <a:p>
+                    <a:pPr>
+                      <a:defRPr sz="1100" b="0" i="0" u="none" strike="noStrike" kern="1200" baseline="0">
+                        <a:solidFill>
+                          <a:schemeClr val="tx1"/>
+                        </a:solidFill>
+                        <a:latin typeface="+mn-lt"/>
+                        <a:ea typeface="+mn-ea"/>
+                        <a:cs typeface="+mn-cs"/>
+                      </a:defRPr>
+                    </a:pPr>
+                    <a:fld id="{1C8A8EA3-6C3F-45DE-B7F2-E1D67302FAFF}" type="VALUE">
+                      <a:rPr lang="en-US" smtClean="0"/>
+                      <a:pPr>
+                        <a:defRPr sz="1100">
+                          <a:solidFill>
+                            <a:schemeClr val="tx1"/>
+                          </a:solidFill>
+                        </a:defRPr>
+                      </a:pPr>
+                      <a:t>[VALUE]</a:t>
+                    </a:fld>
+                    <a:r>
+                      <a:rPr lang="en-US" dirty="0"/>
+                      <a:t>%</a:t>
+                    </a:r>
+                  </a:p>
+                </c:rich>
+              </c:tx>
+              <c:spPr>
+                <a:noFill/>
+                <a:ln>
+                  <a:noFill/>
+                </a:ln>
+                <a:effectLst/>
+              </c:spPr>
+              <c:txPr>
+                <a:bodyPr rot="0" spcFirstLastPara="1" vertOverflow="ellipsis" vert="horz" wrap="square" lIns="38100" tIns="19050" rIns="38100" bIns="19050" anchor="ctr" anchorCtr="1">
+                  <a:noAutofit/>
+                </a:bodyPr>
+                <a:lstStyle/>
+                <a:p>
+                  <a:pPr>
+                    <a:defRPr sz="1100" b="0" i="0" u="none" strike="noStrike" kern="1200" baseline="0">
+                      <a:solidFill>
+                        <a:schemeClr val="tx1"/>
+                      </a:solidFill>
+                      <a:latin typeface="+mn-lt"/>
+                      <a:ea typeface="+mn-ea"/>
+                      <a:cs typeface="+mn-cs"/>
+                    </a:defRPr>
+                  </a:pPr>
+                  <a:endParaRPr lang="en-US"/>
+                </a:p>
+              </c:txPr>
+              <c:dLblPos val="t"/>
+              <c:showLegendKey val="0"/>
+              <c:showVal val="1"/>
+              <c:showCatName val="0"/>
+              <c:showSerName val="0"/>
+              <c:showPercent val="0"/>
+              <c:showBubbleSize val="0"/>
+              <c:extLst>
+                <c:ext xmlns:c15="http://schemas.microsoft.com/office/drawing/2012/chart" uri="{CE6537A1-D6FC-4f65-9D91-7224C49458BB}">
+                  <c15:layout>
+                    <c:manualLayout>
+                      <c:w val="6.607897570495995E-2"/>
+                      <c:h val="0.1038425925925926"/>
+                    </c:manualLayout>
+                  </c15:layout>
+                  <c15:dlblFieldTable/>
+                  <c15:showDataLabelsRange val="0"/>
+                </c:ext>
+                <c:ext xmlns:c16="http://schemas.microsoft.com/office/drawing/2014/chart" uri="{C3380CC4-5D6E-409C-BE32-E72D297353CC}">
+                  <c16:uniqueId val="{00000004-B23C-4961-807D-4D6315C287C5}"/>
+                </c:ext>
+              </c:extLst>
+            </c:dLbl>
+            <c:dLbl>
+              <c:idx val="4"/>
+              <c:tx>
+                <c:rich>
+                  <a:bodyPr rot="0" spcFirstLastPara="1" vertOverflow="ellipsis" vert="horz" wrap="square" lIns="38100" tIns="19050" rIns="38100" bIns="19050" anchor="ctr" anchorCtr="1">
+                    <a:noAutofit/>
+                  </a:bodyPr>
+                  <a:lstStyle/>
+                  <a:p>
+                    <a:pPr>
+                      <a:defRPr sz="1100" b="0" i="0" u="none" strike="noStrike" kern="1200" baseline="0">
+                        <a:solidFill>
+                          <a:schemeClr val="tx1"/>
+                        </a:solidFill>
+                        <a:latin typeface="+mn-lt"/>
+                        <a:ea typeface="+mn-ea"/>
+                        <a:cs typeface="+mn-cs"/>
+                      </a:defRPr>
+                    </a:pPr>
+                    <a:fld id="{ABDE61EB-BD8B-4541-8137-9462FA4FEAB7}" type="VALUE">
+                      <a:rPr lang="en-US" smtClean="0"/>
+                      <a:pPr>
+                        <a:defRPr sz="1100">
+                          <a:solidFill>
+                            <a:schemeClr val="tx1"/>
+                          </a:solidFill>
+                        </a:defRPr>
+                      </a:pPr>
+                      <a:t>[VALUE]</a:t>
+                    </a:fld>
+                    <a:r>
+                      <a:rPr lang="en-US" dirty="0"/>
+                      <a:t>%</a:t>
+                    </a:r>
+                  </a:p>
+                </c:rich>
+              </c:tx>
+              <c:spPr>
+                <a:noFill/>
+                <a:ln>
+                  <a:noFill/>
+                </a:ln>
+                <a:effectLst/>
+              </c:spPr>
+              <c:txPr>
+                <a:bodyPr rot="0" spcFirstLastPara="1" vertOverflow="ellipsis" vert="horz" wrap="square" lIns="38100" tIns="19050" rIns="38100" bIns="19050" anchor="ctr" anchorCtr="1">
+                  <a:noAutofit/>
+                </a:bodyPr>
+                <a:lstStyle/>
+                <a:p>
+                  <a:pPr>
+                    <a:defRPr sz="1100" b="0" i="0" u="none" strike="noStrike" kern="1200" baseline="0">
+                      <a:solidFill>
+                        <a:schemeClr val="tx1"/>
+                      </a:solidFill>
+                      <a:latin typeface="+mn-lt"/>
+                      <a:ea typeface="+mn-ea"/>
+                      <a:cs typeface="+mn-cs"/>
+                    </a:defRPr>
+                  </a:pPr>
+                  <a:endParaRPr lang="en-US"/>
+                </a:p>
+              </c:txPr>
+              <c:dLblPos val="t"/>
+              <c:showLegendKey val="0"/>
+              <c:showVal val="1"/>
+              <c:showCatName val="0"/>
+              <c:showSerName val="0"/>
+              <c:showPercent val="0"/>
+              <c:showBubbleSize val="0"/>
+              <c:extLst>
+                <c:ext xmlns:c15="http://schemas.microsoft.com/office/drawing/2012/chart" uri="{CE6537A1-D6FC-4f65-9D91-7224C49458BB}">
+                  <c15:layout>
+                    <c:manualLayout>
+                      <c:w val="8.2264957264957264E-2"/>
+                      <c:h val="9.4583333333333339E-2"/>
+                    </c:manualLayout>
+                  </c15:layout>
+                  <c15:dlblFieldTable/>
+                  <c15:showDataLabelsRange val="0"/>
+                </c:ext>
+                <c:ext xmlns:c16="http://schemas.microsoft.com/office/drawing/2014/chart" uri="{C3380CC4-5D6E-409C-BE32-E72D297353CC}">
+                  <c16:uniqueId val="{00000005-B23C-4961-807D-4D6315C287C5}"/>
+                </c:ext>
+              </c:extLst>
+            </c:dLbl>
+            <c:dLbl>
+              <c:idx val="5"/>
+              <c:tx>
+                <c:rich>
+                  <a:bodyPr rot="0" spcFirstLastPara="1" vertOverflow="ellipsis" vert="horz" wrap="square" lIns="38100" tIns="19050" rIns="38100" bIns="19050" anchor="ctr" anchorCtr="1">
+                    <a:noAutofit/>
+                  </a:bodyPr>
+                  <a:lstStyle/>
+                  <a:p>
+                    <a:pPr>
+                      <a:defRPr sz="1100" b="0" i="0" u="none" strike="noStrike" kern="1200" baseline="0">
+                        <a:solidFill>
+                          <a:schemeClr val="tx1"/>
+                        </a:solidFill>
+                        <a:latin typeface="+mn-lt"/>
+                        <a:ea typeface="+mn-ea"/>
+                        <a:cs typeface="+mn-cs"/>
+                      </a:defRPr>
+                    </a:pPr>
+                    <a:fld id="{80233356-AC0F-4E08-88CE-EB9BBBAC7CA8}" type="VALUE">
+                      <a:rPr lang="en-US" smtClean="0"/>
+                      <a:pPr>
+                        <a:defRPr sz="1100">
+                          <a:solidFill>
+                            <a:schemeClr val="tx1"/>
+                          </a:solidFill>
+                        </a:defRPr>
+                      </a:pPr>
+                      <a:t>[VALUE]</a:t>
+                    </a:fld>
+                    <a:r>
+                      <a:rPr lang="en-US" dirty="0"/>
+                      <a:t>%</a:t>
+                    </a:r>
+                  </a:p>
+                </c:rich>
+              </c:tx>
+              <c:spPr>
+                <a:noFill/>
+                <a:ln>
+                  <a:noFill/>
+                </a:ln>
+                <a:effectLst/>
+              </c:spPr>
+              <c:txPr>
+                <a:bodyPr rot="0" spcFirstLastPara="1" vertOverflow="ellipsis" vert="horz" wrap="square" lIns="38100" tIns="19050" rIns="38100" bIns="19050" anchor="ctr" anchorCtr="1">
+                  <a:noAutofit/>
+                </a:bodyPr>
+                <a:lstStyle/>
+                <a:p>
+                  <a:pPr>
+                    <a:defRPr sz="1100" b="0" i="0" u="none" strike="noStrike" kern="1200" baseline="0">
+                      <a:solidFill>
+                        <a:schemeClr val="tx1"/>
+                      </a:solidFill>
+                      <a:latin typeface="+mn-lt"/>
+                      <a:ea typeface="+mn-ea"/>
+                      <a:cs typeface="+mn-cs"/>
+                    </a:defRPr>
+                  </a:pPr>
+                  <a:endParaRPr lang="en-US"/>
+                </a:p>
+              </c:txPr>
+              <c:dLblPos val="t"/>
+              <c:showLegendKey val="0"/>
+              <c:showVal val="1"/>
+              <c:showCatName val="0"/>
+              <c:showSerName val="0"/>
+              <c:showPercent val="0"/>
+              <c:showBubbleSize val="0"/>
+              <c:extLst>
+                <c:ext xmlns:c15="http://schemas.microsoft.com/office/drawing/2012/chart" uri="{CE6537A1-D6FC-4f65-9D91-7224C49458BB}">
+                  <c15:layout>
+                    <c:manualLayout>
+                      <c:w val="8.0128205128205135E-2"/>
+                      <c:h val="8.532407407407408E-2"/>
+                    </c:manualLayout>
+                  </c15:layout>
+                  <c15:dlblFieldTable/>
+                  <c15:showDataLabelsRange val="0"/>
+                </c:ext>
+                <c:ext xmlns:c16="http://schemas.microsoft.com/office/drawing/2014/chart" uri="{C3380CC4-5D6E-409C-BE32-E72D297353CC}">
+                  <c16:uniqueId val="{00000006-B23C-4961-807D-4D6315C287C5}"/>
+                </c:ext>
+              </c:extLst>
+            </c:dLbl>
+            <c:spPr>
+              <a:noFill/>
+              <a:ln>
+                <a:noFill/>
+              </a:ln>
+              <a:effectLst/>
+            </c:spPr>
+            <c:txPr>
+              <a:bodyPr rot="0" spcFirstLastPara="1" vertOverflow="ellipsis" vert="horz" wrap="square" lIns="38100" tIns="19050" rIns="38100" bIns="19050" anchor="ctr" anchorCtr="1">
+                <a:spAutoFit/>
+              </a:bodyPr>
+              <a:lstStyle/>
+              <a:p>
+                <a:pPr>
+                  <a:defRPr sz="1100" b="0" i="0" u="none" strike="noStrike" kern="1200" baseline="0">
+                    <a:solidFill>
+                      <a:schemeClr val="tx1"/>
+                    </a:solidFill>
+                    <a:latin typeface="+mn-lt"/>
+                    <a:ea typeface="+mn-ea"/>
+                    <a:cs typeface="+mn-cs"/>
+                  </a:defRPr>
+                </a:pPr>
+                <a:endParaRPr lang="en-US"/>
+              </a:p>
+            </c:txPr>
+            <c:dLblPos val="t"/>
+            <c:showLegendKey val="0"/>
+            <c:showVal val="1"/>
+            <c:showCatName val="0"/>
+            <c:showSerName val="0"/>
+            <c:showPercent val="0"/>
+            <c:showBubbleSize val="0"/>
+            <c:showLeaderLines val="0"/>
+            <c:extLst>
+              <c:ext xmlns:c15="http://schemas.microsoft.com/office/drawing/2012/chart" uri="{CE6537A1-D6FC-4f65-9D91-7224C49458BB}">
+                <c15:showLeaderLines val="1"/>
+                <c15:leaderLines>
+                  <c:spPr>
+                    <a:ln w="9525" cap="flat" cmpd="sng" algn="ctr">
+                      <a:solidFill>
+                        <a:schemeClr val="tx1">
+                          <a:lumMod val="35000"/>
+                          <a:lumOff val="65000"/>
+                        </a:schemeClr>
+                      </a:solidFill>
+                      <a:round/>
+                    </a:ln>
+                    <a:effectLst/>
+                  </c:spPr>
+                </c15:leaderLines>
+              </c:ext>
+            </c:extLst>
+          </c:dLbls>
+          <c:cat>
+            <c:numRef>
+              <c:f>'Return Rates by Year'!$A$2:$A$7</c:f>
+              <c:numCache>
+                <c:formatCode>General</c:formatCode>
+                <c:ptCount val="6"/>
+                <c:pt idx="0">
+                  <c:v>2019</c:v>
+                </c:pt>
+                <c:pt idx="1">
+                  <c:v>2020</c:v>
+                </c:pt>
+                <c:pt idx="2">
+                  <c:v>2021</c:v>
+                </c:pt>
+                <c:pt idx="3">
+                  <c:v>2022</c:v>
+                </c:pt>
+                <c:pt idx="4">
+                  <c:v>2023</c:v>
+                </c:pt>
+                <c:pt idx="5">
+                  <c:v>2024</c:v>
+                </c:pt>
+              </c:numCache>
+            </c:numRef>
+          </c:cat>
+          <c:val>
+            <c:numRef>
+              <c:f>'Return Rates by Year'!$B$2:$B$7</c:f>
+              <c:numCache>
+                <c:formatCode>General</c:formatCode>
+                <c:ptCount val="6"/>
+                <c:pt idx="0">
+                  <c:v>9.1999999999999993</c:v>
+                </c:pt>
+                <c:pt idx="1">
+                  <c:v>9.5</c:v>
+                </c:pt>
+                <c:pt idx="2">
+                  <c:v>9.9</c:v>
+                </c:pt>
+                <c:pt idx="3">
+                  <c:v>9.8000000000000007</c:v>
+                </c:pt>
+                <c:pt idx="4">
+                  <c:v>10.3</c:v>
+                </c:pt>
+                <c:pt idx="5">
+                  <c:v>10.199999999999999</c:v>
+                </c:pt>
+              </c:numCache>
+            </c:numRef>
+          </c:val>
+          <c:smooth val="0"/>
+          <c:extLst>
+            <c:ext xmlns:c16="http://schemas.microsoft.com/office/drawing/2014/chart" uri="{C3380CC4-5D6E-409C-BE32-E72D297353CC}">
+              <c16:uniqueId val="{00000000-B23C-4961-807D-4D6315C287C5}"/>
+            </c:ext>
+          </c:extLst>
+        </c:ser>
+        <c:dLbls>
+          <c:dLblPos val="t"/>
+          <c:showLegendKey val="0"/>
+          <c:showVal val="1"/>
+          <c:showCatName val="0"/>
+          <c:showSerName val="0"/>
+          <c:showPercent val="0"/>
+          <c:showBubbleSize val="0"/>
+        </c:dLbls>
+        <c:smooth val="0"/>
+        <c:axId val="767843487"/>
+        <c:axId val="767842047"/>
+      </c:lineChart>
+      <c:catAx>
+        <c:axId val="767843487"/>
+        <c:scaling>
+          <c:orientation val="minMax"/>
+        </c:scaling>
+        <c:delete val="0"/>
+        <c:axPos val="b"/>
+        <c:title>
+          <c:tx>
+            <c:rich>
+              <a:bodyPr rot="0" spcFirstLastPara="1" vertOverflow="ellipsis" vert="horz" wrap="square" anchor="ctr" anchorCtr="1"/>
+              <a:lstStyle/>
+              <a:p>
+                <a:pPr>
+                  <a:defRPr sz="1000" b="0" i="0" u="none" strike="noStrike" kern="1200" baseline="0">
+                    <a:solidFill>
+                      <a:schemeClr val="tx1">
+                        <a:lumMod val="65000"/>
+                        <a:lumOff val="35000"/>
+                      </a:schemeClr>
+                    </a:solidFill>
+                    <a:latin typeface="+mn-lt"/>
+                    <a:ea typeface="+mn-ea"/>
+                    <a:cs typeface="+mn-cs"/>
+                  </a:defRPr>
+                </a:pPr>
+                <a:r>
+                  <a:rPr lang="en-US" sz="1200" dirty="0">
+                    <a:solidFill>
+                      <a:schemeClr val="tx1"/>
+                    </a:solidFill>
+                  </a:rPr>
+                  <a:t>Year</a:t>
+                </a:r>
+                <a:endParaRPr lang="en-US" dirty="0">
+                  <a:solidFill>
+                    <a:schemeClr val="tx1"/>
+                  </a:solidFill>
+                </a:endParaRPr>
+              </a:p>
+            </c:rich>
+          </c:tx>
+          <c:overlay val="0"/>
+          <c:spPr>
+            <a:noFill/>
+            <a:ln>
+              <a:noFill/>
+            </a:ln>
+            <a:effectLst/>
+          </c:spPr>
+          <c:txPr>
+            <a:bodyPr rot="0" spcFirstLastPara="1" vertOverflow="ellipsis" vert="horz" wrap="square" anchor="ctr" anchorCtr="1"/>
+            <a:lstStyle/>
+            <a:p>
+              <a:pPr>
+                <a:defRPr sz="1000" b="0" i="0" u="none" strike="noStrike" kern="1200" baseline="0">
+                  <a:solidFill>
+                    <a:schemeClr val="tx1">
+                      <a:lumMod val="65000"/>
+                      <a:lumOff val="35000"/>
+                    </a:schemeClr>
+                  </a:solidFill>
+                  <a:latin typeface="+mn-lt"/>
+                  <a:ea typeface="+mn-ea"/>
+                  <a:cs typeface="+mn-cs"/>
+                </a:defRPr>
+              </a:pPr>
+              <a:endParaRPr lang="en-US"/>
+            </a:p>
+          </c:txPr>
+        </c:title>
+        <c:numFmt formatCode="General" sourceLinked="1"/>
+        <c:majorTickMark val="none"/>
+        <c:minorTickMark val="none"/>
+        <c:tickLblPos val="nextTo"/>
+        <c:spPr>
+          <a:noFill/>
+          <a:ln w="9525" cap="flat" cmpd="sng" algn="ctr">
+            <a:solidFill>
+              <a:schemeClr val="tx1">
+                <a:lumMod val="15000"/>
+                <a:lumOff val="85000"/>
+              </a:schemeClr>
+            </a:solidFill>
+            <a:round/>
+          </a:ln>
+          <a:effectLst/>
+        </c:spPr>
+        <c:txPr>
+          <a:bodyPr rot="-2940000" spcFirstLastPara="1" vertOverflow="ellipsis" wrap="square" anchor="ctr" anchorCtr="1"/>
+          <a:lstStyle/>
+          <a:p>
+            <a:pPr>
+              <a:defRPr sz="1100" b="0" i="0" u="none" strike="noStrike" kern="1200" baseline="0">
+                <a:solidFill>
+                  <a:schemeClr val="tx1"/>
+                </a:solidFill>
+                <a:latin typeface="+mn-lt"/>
+                <a:ea typeface="+mn-ea"/>
+                <a:cs typeface="+mn-cs"/>
+              </a:defRPr>
+            </a:pPr>
+            <a:endParaRPr lang="en-US"/>
+          </a:p>
+        </c:txPr>
+        <c:crossAx val="767842047"/>
+        <c:crosses val="autoZero"/>
+        <c:auto val="1"/>
+        <c:lblAlgn val="ctr"/>
+        <c:lblOffset val="100"/>
+        <c:noMultiLvlLbl val="0"/>
+      </c:catAx>
+      <c:valAx>
+        <c:axId val="767842047"/>
+        <c:scaling>
+          <c:orientation val="minMax"/>
+        </c:scaling>
+        <c:delete val="0"/>
+        <c:axPos val="l"/>
+        <c:majorGridlines>
+          <c:spPr>
+            <a:ln w="9525" cap="flat" cmpd="sng" algn="ctr">
+              <a:solidFill>
+                <a:schemeClr val="tx1">
+                  <a:lumMod val="15000"/>
+                  <a:lumOff val="85000"/>
+                </a:schemeClr>
+              </a:solidFill>
+              <a:round/>
+            </a:ln>
+            <a:effectLst/>
+          </c:spPr>
+        </c:majorGridlines>
+        <c:title>
+          <c:tx>
+            <c:rich>
+              <a:bodyPr rot="-5400000" spcFirstLastPara="1" vertOverflow="ellipsis" vert="horz" wrap="square" anchor="ctr" anchorCtr="1"/>
+              <a:lstStyle/>
+              <a:p>
+                <a:pPr>
+                  <a:defRPr sz="1200" b="0" i="0" u="none" strike="noStrike" kern="1200" baseline="0">
+                    <a:solidFill>
+                      <a:schemeClr val="tx1">
+                        <a:lumMod val="65000"/>
+                        <a:lumOff val="35000"/>
+                      </a:schemeClr>
+                    </a:solidFill>
+                    <a:latin typeface="+mn-lt"/>
+                    <a:ea typeface="+mn-ea"/>
+                    <a:cs typeface="+mn-cs"/>
+                  </a:defRPr>
+                </a:pPr>
+                <a:r>
+                  <a:rPr lang="en-US" sz="1200" dirty="0">
+                    <a:solidFill>
+                      <a:schemeClr val="tx1"/>
+                    </a:solidFill>
+                  </a:rPr>
+                  <a:t>Return Rate (%)</a:t>
+                </a:r>
+              </a:p>
+            </c:rich>
+          </c:tx>
+          <c:overlay val="0"/>
+          <c:spPr>
+            <a:noFill/>
+            <a:ln>
+              <a:noFill/>
+            </a:ln>
+            <a:effectLst/>
+          </c:spPr>
+          <c:txPr>
+            <a:bodyPr rot="-5400000" spcFirstLastPara="1" vertOverflow="ellipsis" vert="horz" wrap="square" anchor="ctr" anchorCtr="1"/>
+            <a:lstStyle/>
+            <a:p>
+              <a:pPr>
+                <a:defRPr sz="1200" b="0" i="0" u="none" strike="noStrike" kern="1200" baseline="0">
+                  <a:solidFill>
+                    <a:schemeClr val="tx1">
+                      <a:lumMod val="65000"/>
+                      <a:lumOff val="35000"/>
+                    </a:schemeClr>
+                  </a:solidFill>
+                  <a:latin typeface="+mn-lt"/>
+                  <a:ea typeface="+mn-ea"/>
+                  <a:cs typeface="+mn-cs"/>
+                </a:defRPr>
+              </a:pPr>
+              <a:endParaRPr lang="en-US"/>
+            </a:p>
+          </c:txPr>
+        </c:title>
+        <c:numFmt formatCode="General" sourceLinked="1"/>
+        <c:majorTickMark val="none"/>
+        <c:minorTickMark val="none"/>
+        <c:tickLblPos val="nextTo"/>
+        <c:spPr>
+          <a:noFill/>
+          <a:ln>
+            <a:noFill/>
+          </a:ln>
+          <a:effectLst/>
+        </c:spPr>
+        <c:txPr>
+          <a:bodyPr rot="-60000000" spcFirstLastPara="1" vertOverflow="ellipsis" vert="horz" wrap="square" anchor="ctr" anchorCtr="1"/>
+          <a:lstStyle/>
+          <a:p>
+            <a:pPr>
+              <a:defRPr sz="1100" b="0" i="0" u="none" strike="noStrike" kern="1200" baseline="0">
+                <a:solidFill>
+                  <a:schemeClr val="tx1"/>
+                </a:solidFill>
+                <a:latin typeface="+mn-lt"/>
+                <a:ea typeface="+mn-ea"/>
+                <a:cs typeface="+mn-cs"/>
+              </a:defRPr>
+            </a:pPr>
+            <a:endParaRPr lang="en-US"/>
+          </a:p>
+        </c:txPr>
+        <c:crossAx val="767843487"/>
+        <c:crosses val="autoZero"/>
+        <c:crossBetween val="between"/>
+      </c:valAx>
+      <c:spPr>
+        <a:noFill/>
+        <a:ln>
+          <a:noFill/>
+        </a:ln>
+        <a:effectLst/>
+      </c:spPr>
+    </c:plotArea>
+    <c:plotVisOnly val="1"/>
+    <c:dispBlanksAs val="gap"/>
+    <c:showDLblsOverMax val="0"/>
+  </c:chart>
+  <c:spPr>
+    <a:noFill/>
+    <a:ln>
+      <a:noFill/>
+    </a:ln>
+    <a:effectLst/>
+  </c:spPr>
+  <c:txPr>
+    <a:bodyPr/>
+    <a:lstStyle/>
+    <a:p>
+      <a:pPr>
+        <a:defRPr/>
+      </a:pPr>
+      <a:endParaRPr lang="en-US"/>
+    </a:p>
+  </c:txPr>
+  <c:externalData r:id="rId3">
+    <c:autoUpdate val="0"/>
+  </c:externalData>
+  <c:userShapes r:id="rId4"/>
+</c:chartSpace>
+</file>
+
+<file path=ppt/charts/chart3.xml><?xml version="1.0" encoding="utf-8"?>
+<c:chartSpace xmlns:c="http://schemas.openxmlformats.org/drawingml/2006/chart" xmlns:a="http://schemas.openxmlformats.org/drawingml/2006/main" xmlns:r="http://schemas.openxmlformats.org/officeDocument/2006/relationships" xmlns:c16r2="http://schemas.microsoft.com/office/drawing/2015/06/chart">
+  <c:date1904 val="0"/>
+  <c:lang val="en-US"/>
+  <c:roundedCorners val="0"/>
+  <mc:AlternateContent xmlns:mc="http://schemas.openxmlformats.org/markup-compatibility/2006">
+    <mc:Choice xmlns:c14="http://schemas.microsoft.com/office/drawing/2007/8/2/chart" Requires="c14">
+      <c14:style val="102"/>
+    </mc:Choice>
+    <mc:Fallback>
+      <c:style val="2"/>
+    </mc:Fallback>
+  </mc:AlternateContent>
+  <c:chart>
+    <c:title>
+      <c:tx>
+        <c:rich>
+          <a:bodyPr rot="0" spcFirstLastPara="1" vertOverflow="ellipsis" vert="horz" wrap="square" anchor="ctr" anchorCtr="1"/>
+          <a:lstStyle/>
+          <a:p>
+            <a:pPr>
+              <a:defRPr sz="1400" b="0" i="0" u="none" strike="noStrike" kern="1200" spc="0" baseline="0">
+                <a:solidFill>
+                  <a:schemeClr val="tx1"/>
+                </a:solidFill>
+                <a:latin typeface="+mn-lt"/>
+                <a:ea typeface="+mn-ea"/>
+                <a:cs typeface="+mn-cs"/>
+              </a:defRPr>
+            </a:pPr>
+            <a:r>
+              <a:rPr lang="en-US" sz="1400" b="1" i="0" dirty="0">
+                <a:solidFill>
+                  <a:schemeClr val="tx1"/>
+                </a:solidFill>
+                <a:latin typeface="Calibri"/>
+              </a:rPr>
+              <a:t>Top 3 Categories by Return Rate</a:t>
+            </a:r>
+          </a:p>
+        </c:rich>
+      </c:tx>
+      <c:overlay val="0"/>
+      <c:spPr>
+        <a:noFill/>
+        <a:ln>
+          <a:noFill/>
+        </a:ln>
+        <a:effectLst/>
+      </c:spPr>
+      <c:txPr>
+        <a:bodyPr rot="0" spcFirstLastPara="1" vertOverflow="ellipsis" vert="horz" wrap="square" anchor="ctr" anchorCtr="1"/>
+        <a:lstStyle/>
+        <a:p>
+          <a:pPr>
+            <a:defRPr sz="1400" b="0" i="0" u="none" strike="noStrike" kern="1200" spc="0" baseline="0">
+              <a:solidFill>
+                <a:schemeClr val="tx1"/>
+              </a:solidFill>
+              <a:latin typeface="+mn-lt"/>
+              <a:ea typeface="+mn-ea"/>
+              <a:cs typeface="+mn-cs"/>
+            </a:defRPr>
+          </a:pPr>
+          <a:endParaRPr lang="en-US"/>
+        </a:p>
+      </c:txPr>
+    </c:title>
+    <c:autoTitleDeleted val="0"/>
+    <c:plotArea>
+      <c:layout/>
+      <c:barChart>
+        <c:barDir val="col"/>
+        <c:grouping val="clustered"/>
+        <c:varyColors val="0"/>
+        <c:ser>
+          <c:idx val="0"/>
+          <c:order val="0"/>
+          <c:tx>
+            <c:strRef>
+              <c:f>'[GB884 Business Questions Case ^N1_2026-05-19-1948.xlsx]Top 3 Returned Categories'!$B$1</c:f>
+              <c:strCache>
+                <c:ptCount val="1"/>
+                <c:pt idx="0">
+                  <c:v>Percent of Returned Orders</c:v>
+                </c:pt>
+              </c:strCache>
+            </c:strRef>
+          </c:tx>
+          <c:spPr>
+            <a:solidFill>
+              <a:schemeClr val="accent2"/>
+            </a:solidFill>
+            <a:ln>
+              <a:noFill/>
+            </a:ln>
+            <a:effectLst/>
+          </c:spPr>
+          <c:invertIfNegative val="0"/>
+          <c:dLbls>
+            <c:dLbl>
+              <c:idx val="0"/>
+              <c:layout>
+                <c:manualLayout>
+                  <c:x val="0"/>
+                  <c:y val="1.6758840288252013E-2"/>
+                </c:manualLayout>
+              </c:layout>
+              <c:tx>
+                <c:rich>
+                  <a:bodyPr rot="0" spcFirstLastPara="1" vertOverflow="ellipsis" vert="horz" wrap="square" lIns="38100" tIns="19050" rIns="38100" bIns="19050" anchor="ctr" anchorCtr="1">
+                    <a:noAutofit/>
+                  </a:bodyPr>
+                  <a:lstStyle/>
+                  <a:p>
+                    <a:pPr>
+                      <a:defRPr sz="1050" b="0" i="0" u="none" strike="noStrike" kern="1200" baseline="0">
+                        <a:solidFill>
+                          <a:schemeClr val="tx1"/>
+                        </a:solidFill>
+                        <a:latin typeface="+mn-lt"/>
+                        <a:ea typeface="+mn-ea"/>
+                        <a:cs typeface="+mn-cs"/>
+                      </a:defRPr>
+                    </a:pPr>
+                    <a:fld id="{4DB8E15E-66A5-4A03-940F-9515F8514C0C}" type="VALUE">
+                      <a:rPr lang="en-US" smtClean="0"/>
+                      <a:pPr>
+                        <a:defRPr sz="1050">
+                          <a:solidFill>
+                            <a:schemeClr val="tx1"/>
+                          </a:solidFill>
+                        </a:defRPr>
+                      </a:pPr>
+                      <a:t>[VALUE]</a:t>
+                    </a:fld>
+                    <a:r>
+                      <a:rPr lang="en-US" dirty="0"/>
+                      <a:t>%</a:t>
+                    </a:r>
+                  </a:p>
+                </c:rich>
+              </c:tx>
+              <c:spPr>
+                <a:noFill/>
+                <a:ln>
+                  <a:noFill/>
+                </a:ln>
+                <a:effectLst/>
+              </c:spPr>
+              <c:txPr>
+                <a:bodyPr rot="0" spcFirstLastPara="1" vertOverflow="ellipsis" vert="horz" wrap="square" lIns="38100" tIns="19050" rIns="38100" bIns="19050" anchor="ctr" anchorCtr="1">
+                  <a:noAutofit/>
+                </a:bodyPr>
+                <a:lstStyle/>
+                <a:p>
+                  <a:pPr>
+                    <a:defRPr sz="1050" b="0" i="0" u="none" strike="noStrike" kern="1200" baseline="0">
+                      <a:solidFill>
+                        <a:schemeClr val="tx1"/>
+                      </a:solidFill>
+                      <a:latin typeface="+mn-lt"/>
+                      <a:ea typeface="+mn-ea"/>
+                      <a:cs typeface="+mn-cs"/>
+                    </a:defRPr>
+                  </a:pPr>
+                  <a:endParaRPr lang="en-US"/>
+                </a:p>
+              </c:txPr>
+              <c:dLblPos val="outEnd"/>
+              <c:showLegendKey val="0"/>
+              <c:showVal val="1"/>
+              <c:showCatName val="0"/>
+              <c:showSerName val="0"/>
+              <c:showPercent val="0"/>
+              <c:showBubbleSize val="0"/>
+              <c:extLst>
+                <c:ext xmlns:c15="http://schemas.microsoft.com/office/drawing/2012/chart" uri="{CE6537A1-D6FC-4f65-9D91-7224C49458BB}">
+                  <c15:layout>
+                    <c:manualLayout>
+                      <c:w val="7.5071554011134772E-2"/>
+                      <c:h val="8.7229763700351931E-2"/>
+                    </c:manualLayout>
+                  </c15:layout>
+                  <c15:dlblFieldTable/>
+                  <c15:showDataLabelsRange val="0"/>
+                </c:ext>
+                <c:ext xmlns:c16="http://schemas.microsoft.com/office/drawing/2014/chart" uri="{C3380CC4-5D6E-409C-BE32-E72D297353CC}">
+                  <c16:uniqueId val="{00000001-3683-4574-AA85-122F83BC8352}"/>
+                </c:ext>
+              </c:extLst>
+            </c:dLbl>
+            <c:dLbl>
+              <c:idx val="1"/>
+              <c:layout>
+                <c:manualLayout>
+                  <c:x val="9.3412547173336321E-8"/>
+                  <c:y val="2.0948715309530502E-2"/>
+                </c:manualLayout>
+              </c:layout>
+              <c:tx>
+                <c:rich>
+                  <a:bodyPr rot="0" spcFirstLastPara="1" vertOverflow="ellipsis" vert="horz" wrap="square" lIns="38100" tIns="19050" rIns="38100" bIns="19050" anchor="ctr" anchorCtr="1">
+                    <a:noAutofit/>
+                  </a:bodyPr>
+                  <a:lstStyle/>
+                  <a:p>
+                    <a:pPr>
+                      <a:defRPr sz="1050" b="0" i="0" u="none" strike="noStrike" kern="1200" baseline="0">
+                        <a:solidFill>
+                          <a:schemeClr val="tx1"/>
+                        </a:solidFill>
+                        <a:latin typeface="+mn-lt"/>
+                        <a:ea typeface="+mn-ea"/>
+                        <a:cs typeface="+mn-cs"/>
+                      </a:defRPr>
+                    </a:pPr>
+                    <a:fld id="{DA353BBB-4AFF-4C17-8F49-6AD04054F7C1}" type="VALUE">
+                      <a:rPr lang="en-US" sz="1050" smtClean="0"/>
+                      <a:pPr>
+                        <a:defRPr sz="1050">
+                          <a:solidFill>
+                            <a:schemeClr val="tx1"/>
+                          </a:solidFill>
+                        </a:defRPr>
+                      </a:pPr>
+                      <a:t>[VALUE]</a:t>
+                    </a:fld>
+                    <a:r>
+                      <a:rPr lang="en-US" sz="1050" dirty="0"/>
+                      <a:t>%</a:t>
+                    </a:r>
+                  </a:p>
+                </c:rich>
+              </c:tx>
+              <c:spPr>
+                <a:noFill/>
+                <a:ln>
+                  <a:noFill/>
+                </a:ln>
+                <a:effectLst/>
+              </c:spPr>
+              <c:txPr>
+                <a:bodyPr rot="0" spcFirstLastPara="1" vertOverflow="ellipsis" vert="horz" wrap="square" lIns="38100" tIns="19050" rIns="38100" bIns="19050" anchor="ctr" anchorCtr="1">
+                  <a:noAutofit/>
+                </a:bodyPr>
+                <a:lstStyle/>
+                <a:p>
+                  <a:pPr>
+                    <a:defRPr sz="1050" b="0" i="0" u="none" strike="noStrike" kern="1200" baseline="0">
+                      <a:solidFill>
+                        <a:schemeClr val="tx1"/>
+                      </a:solidFill>
+                      <a:latin typeface="+mn-lt"/>
+                      <a:ea typeface="+mn-ea"/>
+                      <a:cs typeface="+mn-cs"/>
+                    </a:defRPr>
+                  </a:pPr>
+                  <a:endParaRPr lang="en-US"/>
+                </a:p>
+              </c:txPr>
+              <c:dLblPos val="outEnd"/>
+              <c:showLegendKey val="0"/>
+              <c:showVal val="1"/>
+              <c:showCatName val="0"/>
+              <c:showSerName val="0"/>
+              <c:showPercent val="0"/>
+              <c:showBubbleSize val="0"/>
+              <c:extLst>
+                <c:ext xmlns:c15="http://schemas.microsoft.com/office/drawing/2012/chart" uri="{CE6537A1-D6FC-4f65-9D91-7224C49458BB}">
+                  <c15:layout>
+                    <c:manualLayout>
+                      <c:w val="8.7670477898591323E-2"/>
+                      <c:h val="7.5352100595268715E-2"/>
+                    </c:manualLayout>
+                  </c15:layout>
+                  <c15:dlblFieldTable/>
+                  <c15:showDataLabelsRange val="0"/>
+                </c:ext>
+                <c:ext xmlns:c16="http://schemas.microsoft.com/office/drawing/2014/chart" uri="{C3380CC4-5D6E-409C-BE32-E72D297353CC}">
+                  <c16:uniqueId val="{00000002-3683-4574-AA85-122F83BC8352}"/>
+                </c:ext>
+              </c:extLst>
+            </c:dLbl>
+            <c:dLbl>
+              <c:idx val="2"/>
+              <c:layout>
+                <c:manualLayout>
+                  <c:x val="-4.7453573964054852E-3"/>
+                  <c:y val="2.0948550360315066E-2"/>
+                </c:manualLayout>
+              </c:layout>
+              <c:tx>
+                <c:rich>
+                  <a:bodyPr rot="0" spcFirstLastPara="1" vertOverflow="ellipsis" vert="horz" wrap="square" lIns="38100" tIns="19050" rIns="38100" bIns="19050" anchor="ctr" anchorCtr="1">
+                    <a:noAutofit/>
+                  </a:bodyPr>
+                  <a:lstStyle/>
+                  <a:p>
+                    <a:pPr>
+                      <a:defRPr sz="1050" b="0" i="0" u="none" strike="noStrike" kern="1200" baseline="0">
+                        <a:solidFill>
+                          <a:schemeClr val="tx1"/>
+                        </a:solidFill>
+                        <a:latin typeface="+mn-lt"/>
+                        <a:ea typeface="+mn-ea"/>
+                        <a:cs typeface="+mn-cs"/>
+                      </a:defRPr>
+                    </a:pPr>
+                    <a:fld id="{EFB1F2A9-A826-4032-BD00-5BCCABFB4D65}" type="VALUE">
+                      <a:rPr lang="en-US" smtClean="0"/>
+                      <a:pPr>
+                        <a:defRPr sz="1050">
+                          <a:solidFill>
+                            <a:schemeClr val="tx1"/>
+                          </a:solidFill>
+                        </a:defRPr>
+                      </a:pPr>
+                      <a:t>[VALUE]</a:t>
+                    </a:fld>
+                    <a:r>
+                      <a:rPr lang="en-US" dirty="0"/>
+                      <a:t>%</a:t>
+                    </a:r>
+                  </a:p>
+                </c:rich>
+              </c:tx>
+              <c:spPr>
+                <a:noFill/>
+                <a:ln>
+                  <a:noFill/>
+                </a:ln>
+                <a:effectLst/>
+              </c:spPr>
+              <c:txPr>
+                <a:bodyPr rot="0" spcFirstLastPara="1" vertOverflow="ellipsis" vert="horz" wrap="square" lIns="38100" tIns="19050" rIns="38100" bIns="19050" anchor="ctr" anchorCtr="1">
+                  <a:noAutofit/>
+                </a:bodyPr>
+                <a:lstStyle/>
+                <a:p>
+                  <a:pPr>
+                    <a:defRPr sz="1050" b="0" i="0" u="none" strike="noStrike" kern="1200" baseline="0">
+                      <a:solidFill>
+                        <a:schemeClr val="tx1"/>
+                      </a:solidFill>
+                      <a:latin typeface="+mn-lt"/>
+                      <a:ea typeface="+mn-ea"/>
+                      <a:cs typeface="+mn-cs"/>
+                    </a:defRPr>
+                  </a:pPr>
+                  <a:endParaRPr lang="en-US"/>
+                </a:p>
+              </c:txPr>
+              <c:dLblPos val="outEnd"/>
+              <c:showLegendKey val="0"/>
+              <c:showVal val="1"/>
+              <c:showCatName val="0"/>
+              <c:showSerName val="0"/>
+              <c:showPercent val="0"/>
+              <c:showBubbleSize val="0"/>
+              <c:extLst>
+                <c:ext xmlns:c15="http://schemas.microsoft.com/office/drawing/2012/chart" uri="{CE6537A1-D6FC-4f65-9D91-7224C49458BB}">
+                  <c15:layout>
+                    <c:manualLayout>
+                      <c:w val="8.2118409744796922E-2"/>
+                      <c:h val="7.4660633484162894E-2"/>
+                    </c:manualLayout>
+                  </c15:layout>
+                  <c15:dlblFieldTable/>
+                  <c15:showDataLabelsRange val="0"/>
+                </c:ext>
+                <c:ext xmlns:c16="http://schemas.microsoft.com/office/drawing/2014/chart" uri="{C3380CC4-5D6E-409C-BE32-E72D297353CC}">
+                  <c16:uniqueId val="{00000003-3683-4574-AA85-122F83BC8352}"/>
+                </c:ext>
+              </c:extLst>
+            </c:dLbl>
+            <c:spPr>
+              <a:noFill/>
+              <a:ln>
+                <a:noFill/>
+              </a:ln>
+              <a:effectLst/>
+            </c:spPr>
+            <c:txPr>
+              <a:bodyPr rot="0" spcFirstLastPara="1" vertOverflow="ellipsis" vert="horz" wrap="square" lIns="38100" tIns="19050" rIns="38100" bIns="19050" anchor="ctr" anchorCtr="1">
+                <a:spAutoFit/>
+              </a:bodyPr>
+              <a:lstStyle/>
+              <a:p>
+                <a:pPr>
+                  <a:defRPr sz="900" b="0" i="0" u="none" strike="noStrike" kern="1200" baseline="0">
+                    <a:solidFill>
+                      <a:schemeClr val="tx1"/>
+                    </a:solidFill>
+                    <a:latin typeface="+mn-lt"/>
+                    <a:ea typeface="+mn-ea"/>
+                    <a:cs typeface="+mn-cs"/>
+                  </a:defRPr>
+                </a:pPr>
+                <a:endParaRPr lang="en-US"/>
+              </a:p>
+            </c:txPr>
+            <c:dLblPos val="outEnd"/>
+            <c:showLegendKey val="0"/>
+            <c:showVal val="1"/>
+            <c:showCatName val="0"/>
+            <c:showSerName val="0"/>
+            <c:showPercent val="0"/>
+            <c:showBubbleSize val="0"/>
+            <c:showLeaderLines val="0"/>
+            <c:extLst>
+              <c:ext xmlns:c15="http://schemas.microsoft.com/office/drawing/2012/chart" uri="{CE6537A1-D6FC-4f65-9D91-7224C49458BB}">
+                <c15:showLeaderLines val="1"/>
+                <c15:leaderLines>
+                  <c:spPr>
+                    <a:ln w="9525" cap="flat" cmpd="sng" algn="ctr">
+                      <a:solidFill>
+                        <a:schemeClr val="tx1">
+                          <a:lumMod val="35000"/>
+                          <a:lumOff val="65000"/>
+                        </a:schemeClr>
+                      </a:solidFill>
+                      <a:round/>
+                    </a:ln>
+                    <a:effectLst/>
+                  </c:spPr>
+                </c15:leaderLines>
+              </c:ext>
+            </c:extLst>
+          </c:dLbls>
+          <c:cat>
+            <c:strRef>
+              <c:f>'[GB884 Business Questions Case ^N1_2026-05-19-1948.xlsx]Top 3 Returned Categories'!$A$2:$A$4</c:f>
+              <c:strCache>
+                <c:ptCount val="3"/>
+                <c:pt idx="0">
+                  <c:v>Pants</c:v>
+                </c:pt>
+                <c:pt idx="1">
+                  <c:v>Leggings</c:v>
+                </c:pt>
+                <c:pt idx="2">
+                  <c:v>Socks &amp; Hosiery</c:v>
+                </c:pt>
+              </c:strCache>
+            </c:strRef>
+          </c:cat>
+          <c:val>
+            <c:numRef>
+              <c:f>'[GB884 Business Questions Case ^N1_2026-05-19-1948.xlsx]Top 3 Returned Categories'!$B$2:$B$4</c:f>
+              <c:numCache>
+                <c:formatCode>General</c:formatCode>
+                <c:ptCount val="3"/>
+                <c:pt idx="0">
+                  <c:v>11</c:v>
+                </c:pt>
+                <c:pt idx="1">
+                  <c:v>10.7</c:v>
+                </c:pt>
+                <c:pt idx="2">
+                  <c:v>10.7</c:v>
+                </c:pt>
+              </c:numCache>
+            </c:numRef>
+          </c:val>
+          <c:extLst>
+            <c:ext xmlns:c16="http://schemas.microsoft.com/office/drawing/2014/chart" uri="{C3380CC4-5D6E-409C-BE32-E72D297353CC}">
+              <c16:uniqueId val="{00000000-3683-4574-AA85-122F83BC8352}"/>
+            </c:ext>
+          </c:extLst>
+        </c:ser>
+        <c:dLbls>
+          <c:showLegendKey val="0"/>
+          <c:showVal val="0"/>
+          <c:showCatName val="0"/>
+          <c:showSerName val="0"/>
+          <c:showPercent val="0"/>
+          <c:showBubbleSize val="0"/>
+        </c:dLbls>
+        <c:gapWidth val="219"/>
+        <c:overlap val="-27"/>
+        <c:axId val="796575535"/>
+        <c:axId val="796571215"/>
+      </c:barChart>
+      <c:catAx>
+        <c:axId val="796575535"/>
+        <c:scaling>
+          <c:orientation val="minMax"/>
+        </c:scaling>
+        <c:delete val="0"/>
+        <c:axPos val="b"/>
+        <c:title>
+          <c:tx>
+            <c:rich>
+              <a:bodyPr rot="0" spcFirstLastPara="1" vertOverflow="ellipsis" vert="horz" wrap="square" anchor="ctr" anchorCtr="1"/>
+              <a:lstStyle/>
+              <a:p>
+                <a:pPr>
+                  <a:defRPr sz="1000" b="0" i="0" u="none" strike="noStrike" kern="1200" baseline="0">
+                    <a:solidFill>
+                      <a:schemeClr val="tx1">
+                        <a:lumMod val="65000"/>
+                        <a:lumOff val="35000"/>
+                      </a:schemeClr>
+                    </a:solidFill>
+                    <a:latin typeface="+mn-lt"/>
+                    <a:ea typeface="+mn-ea"/>
+                    <a:cs typeface="+mn-cs"/>
+                  </a:defRPr>
+                </a:pPr>
+                <a:r>
+                  <a:rPr lang="en-US" sz="1100" dirty="0">
+                    <a:solidFill>
+                      <a:schemeClr val="tx1"/>
+                    </a:solidFill>
+                  </a:rPr>
+                  <a:t>Category</a:t>
+                </a:r>
+                <a:endParaRPr lang="en-US" sz="900" dirty="0">
+                  <a:solidFill>
+                    <a:schemeClr val="tx1"/>
+                  </a:solidFill>
+                </a:endParaRPr>
+              </a:p>
+            </c:rich>
+          </c:tx>
+          <c:layout>
+            <c:manualLayout>
+              <c:xMode val="edge"/>
+              <c:yMode val="edge"/>
+              <c:x val="0.49852202667862355"/>
+              <c:y val="0.89253393665158376"/>
+            </c:manualLayout>
+          </c:layout>
+          <c:overlay val="0"/>
+          <c:spPr>
+            <a:noFill/>
+            <a:ln>
+              <a:noFill/>
+            </a:ln>
+            <a:effectLst/>
+          </c:spPr>
+          <c:txPr>
+            <a:bodyPr rot="0" spcFirstLastPara="1" vertOverflow="ellipsis" vert="horz" wrap="square" anchor="ctr" anchorCtr="1"/>
+            <a:lstStyle/>
+            <a:p>
+              <a:pPr>
+                <a:defRPr sz="1000" b="0" i="0" u="none" strike="noStrike" kern="1200" baseline="0">
+                  <a:solidFill>
+                    <a:schemeClr val="tx1">
+                      <a:lumMod val="65000"/>
+                      <a:lumOff val="35000"/>
+                    </a:schemeClr>
+                  </a:solidFill>
+                  <a:latin typeface="+mn-lt"/>
+                  <a:ea typeface="+mn-ea"/>
+                  <a:cs typeface="+mn-cs"/>
+                </a:defRPr>
+              </a:pPr>
+              <a:endParaRPr lang="en-US"/>
+            </a:p>
+          </c:txPr>
+        </c:title>
+        <c:numFmt formatCode="General" sourceLinked="1"/>
+        <c:majorTickMark val="none"/>
+        <c:minorTickMark val="none"/>
+        <c:tickLblPos val="nextTo"/>
+        <c:spPr>
+          <a:noFill/>
+          <a:ln w="9525" cap="flat" cmpd="sng" algn="ctr">
+            <a:solidFill>
+              <a:schemeClr val="tx1">
+                <a:lumMod val="15000"/>
+                <a:lumOff val="85000"/>
+              </a:schemeClr>
+            </a:solidFill>
+            <a:round/>
+          </a:ln>
+          <a:effectLst/>
+        </c:spPr>
+        <c:txPr>
+          <a:bodyPr rot="-60000000" spcFirstLastPara="1" vertOverflow="ellipsis" vert="horz" wrap="square" anchor="ctr" anchorCtr="1"/>
+          <a:lstStyle/>
+          <a:p>
+            <a:pPr>
+              <a:defRPr sz="1100" b="0" i="0" u="none" strike="noStrike" kern="1200" baseline="0">
+                <a:solidFill>
+                  <a:schemeClr val="tx1"/>
+                </a:solidFill>
+                <a:latin typeface="+mn-lt"/>
+                <a:ea typeface="+mn-ea"/>
+                <a:cs typeface="+mn-cs"/>
+              </a:defRPr>
+            </a:pPr>
+            <a:endParaRPr lang="en-US"/>
+          </a:p>
+        </c:txPr>
+        <c:crossAx val="796571215"/>
+        <c:crosses val="autoZero"/>
+        <c:auto val="1"/>
+        <c:lblAlgn val="ctr"/>
+        <c:lblOffset val="100"/>
+        <c:noMultiLvlLbl val="0"/>
+      </c:catAx>
+      <c:valAx>
+        <c:axId val="796571215"/>
+        <c:scaling>
+          <c:orientation val="minMax"/>
+          <c:min val="10.5"/>
+        </c:scaling>
+        <c:delete val="0"/>
+        <c:axPos val="l"/>
+        <c:majorGridlines>
+          <c:spPr>
+            <a:ln w="9525" cap="flat" cmpd="sng" algn="ctr">
+              <a:solidFill>
+                <a:schemeClr val="tx1">
+                  <a:lumMod val="15000"/>
+                  <a:lumOff val="85000"/>
+                </a:schemeClr>
+              </a:solidFill>
+              <a:round/>
+            </a:ln>
+            <a:effectLst/>
+          </c:spPr>
+        </c:majorGridlines>
+        <c:title>
+          <c:tx>
+            <c:rich>
+              <a:bodyPr rot="-5400000" spcFirstLastPara="1" vertOverflow="ellipsis" vert="horz" wrap="square" anchor="ctr" anchorCtr="1"/>
+              <a:lstStyle/>
+              <a:p>
+                <a:pPr>
+                  <a:defRPr sz="1100" b="0" i="0" u="none" strike="noStrike" kern="1200" baseline="0">
+                    <a:solidFill>
+                      <a:schemeClr val="tx1"/>
+                    </a:solidFill>
+                    <a:latin typeface="+mn-lt"/>
+                    <a:ea typeface="+mn-ea"/>
+                    <a:cs typeface="+mn-cs"/>
+                  </a:defRPr>
+                </a:pPr>
+                <a:r>
+                  <a:rPr lang="en-US" sz="1100" dirty="0">
+                    <a:solidFill>
+                      <a:schemeClr val="tx1"/>
+                    </a:solidFill>
+                  </a:rPr>
+                  <a:t>Return Rate (%)</a:t>
+                </a:r>
+              </a:p>
+            </c:rich>
+          </c:tx>
+          <c:layout>
+            <c:manualLayout>
+              <c:xMode val="edge"/>
+              <c:yMode val="edge"/>
+              <c:x val="1.6608750887419199E-2"/>
+              <c:y val="0.41999039335769295"/>
+            </c:manualLayout>
+          </c:layout>
+          <c:overlay val="0"/>
+          <c:spPr>
+            <a:noFill/>
+            <a:ln>
+              <a:noFill/>
+            </a:ln>
+            <a:effectLst/>
+          </c:spPr>
+          <c:txPr>
+            <a:bodyPr rot="-5400000" spcFirstLastPara="1" vertOverflow="ellipsis" vert="horz" wrap="square" anchor="ctr" anchorCtr="1"/>
+            <a:lstStyle/>
+            <a:p>
+              <a:pPr>
+                <a:defRPr sz="1100" b="0" i="0" u="none" strike="noStrike" kern="1200" baseline="0">
+                  <a:solidFill>
+                    <a:schemeClr val="tx1"/>
+                  </a:solidFill>
+                  <a:latin typeface="+mn-lt"/>
+                  <a:ea typeface="+mn-ea"/>
+                  <a:cs typeface="+mn-cs"/>
+                </a:defRPr>
+              </a:pPr>
+              <a:endParaRPr lang="en-US"/>
+            </a:p>
+          </c:txPr>
+        </c:title>
+        <c:numFmt formatCode="General" sourceLinked="1"/>
+        <c:majorTickMark val="none"/>
+        <c:minorTickMark val="none"/>
+        <c:tickLblPos val="nextTo"/>
+        <c:spPr>
+          <a:noFill/>
+          <a:ln>
+            <a:noFill/>
+          </a:ln>
+          <a:effectLst/>
+        </c:spPr>
+        <c:txPr>
+          <a:bodyPr rot="-60000000" spcFirstLastPara="1" vertOverflow="ellipsis" vert="horz" wrap="square" anchor="ctr" anchorCtr="1"/>
+          <a:lstStyle/>
+          <a:p>
+            <a:pPr>
+              <a:defRPr sz="900" b="0" i="0" u="none" strike="noStrike" kern="1200" baseline="0">
+                <a:solidFill>
+                  <a:schemeClr val="tx1"/>
+                </a:solidFill>
+                <a:latin typeface="+mn-lt"/>
+                <a:ea typeface="+mn-ea"/>
+                <a:cs typeface="+mn-cs"/>
+              </a:defRPr>
+            </a:pPr>
+            <a:endParaRPr lang="en-US"/>
+          </a:p>
+        </c:txPr>
+        <c:crossAx val="796575535"/>
+        <c:crosses val="autoZero"/>
+        <c:crossBetween val="between"/>
+        <c:majorUnit val="0.1"/>
+        <c:minorUnit val="2.0000000000000004E-2"/>
+      </c:valAx>
+      <c:spPr>
+        <a:noFill/>
+        <a:ln>
+          <a:noFill/>
+        </a:ln>
+        <a:effectLst/>
+      </c:spPr>
+    </c:plotArea>
+    <c:plotVisOnly val="1"/>
+    <c:dispBlanksAs val="gap"/>
+    <c:showDLblsOverMax val="0"/>
+  </c:chart>
+  <c:spPr>
+    <a:noFill/>
+    <a:ln>
+      <a:noFill/>
+    </a:ln>
+    <a:effectLst/>
+  </c:spPr>
+  <c:txPr>
+    <a:bodyPr/>
+    <a:lstStyle/>
+    <a:p>
+      <a:pPr>
+        <a:defRPr/>
+      </a:pPr>
+      <a:endParaRPr lang="en-US"/>
+    </a:p>
+  </c:txPr>
+  <c:externalData r:id="rId3">
+    <c:autoUpdate val="0"/>
+  </c:externalData>
+</c:chartSpace>
+</file>
+
+<file path=ppt/charts/colors1.xml><?xml version="1.0" encoding="utf-8"?>
+<cs:colorStyle xmlns:cs="http://schemas.microsoft.com/office/drawing/2012/chartStyle" xmlns:a="http://schemas.openxmlformats.org/drawingml/2006/main" meth="cycle" id="12">
+  <a:schemeClr val="accent2"/>
+  <a:schemeClr val="accent4"/>
+  <a:schemeClr val="accent6"/>
+  <cs:variation/>
+  <cs:variation>
+    <a:lumMod val="60000"/>
+  </cs:variation>
+  <cs:variation>
+    <a:lumMod val="80000"/>
+    <a:lumOff val="20000"/>
+  </cs:variation>
+  <cs:variation>
+    <a:lumMod val="80000"/>
+  </cs:variation>
+  <cs:variation>
+    <a:lumMod val="60000"/>
+    <a:lumOff val="40000"/>
+  </cs:variation>
+  <cs:variation>
+    <a:lumMod val="50000"/>
+  </cs:variation>
+  <cs:variation>
+    <a:lumMod val="70000"/>
+    <a:lumOff val="30000"/>
+  </cs:variation>
+  <cs:variation>
+    <a:lumMod val="70000"/>
+  </cs:variation>
+  <cs:variation>
+    <a:lumMod val="50000"/>
+    <a:lumOff val="50000"/>
+  </cs:variation>
+</cs:colorStyle>
+</file>
+
+<file path=ppt/charts/colors2.xml><?xml version="1.0" encoding="utf-8"?>
+<cs:colorStyle xmlns:cs="http://schemas.microsoft.com/office/drawing/2012/chartStyle" xmlns:a="http://schemas.openxmlformats.org/drawingml/2006/main" meth="cycle" id="10">
+  <a:schemeClr val="accent1"/>
+  <a:schemeClr val="accent2"/>
+  <a:schemeClr val="accent3"/>
+  <a:schemeClr val="accent4"/>
+  <a:schemeClr val="accent5"/>
+  <a:schemeClr val="accent6"/>
+  <cs:variation/>
+  <cs:variation>
+    <a:lumMod val="60000"/>
+  </cs:variation>
+  <cs:variation>
+    <a:lumMod val="80000"/>
+    <a:lumOff val="20000"/>
+  </cs:variation>
+  <cs:variation>
+    <a:lumMod val="80000"/>
+  </cs:variation>
+  <cs:variation>
+    <a:lumMod val="60000"/>
+    <a:lumOff val="40000"/>
+  </cs:variation>
+  <cs:variation>
+    <a:lumMod val="50000"/>
+  </cs:variation>
+  <cs:variation>
+    <a:lumMod val="70000"/>
+    <a:lumOff val="30000"/>
+  </cs:variation>
+  <cs:variation>
+    <a:lumMod val="70000"/>
+  </cs:variation>
+  <cs:variation>
+    <a:lumMod val="50000"/>
+    <a:lumOff val="50000"/>
+  </cs:variation>
+</cs:colorStyle>
+</file>
+
+<file path=ppt/charts/colors3.xml><?xml version="1.0" encoding="utf-8"?>
+<cs:colorStyle xmlns:cs="http://schemas.microsoft.com/office/drawing/2012/chartStyle" xmlns:a="http://schemas.openxmlformats.org/drawingml/2006/main" meth="cycle" id="10">
+  <a:schemeClr val="accent1"/>
+  <a:schemeClr val="accent2"/>
+  <a:schemeClr val="accent3"/>
+  <a:schemeClr val="accent4"/>
+  <a:schemeClr val="accent5"/>
+  <a:schemeClr val="accent6"/>
+  <cs:variation/>
+  <cs:variation>
+    <a:lumMod val="60000"/>
+  </cs:variation>
+  <cs:variation>
+    <a:lumMod val="80000"/>
+    <a:lumOff val="20000"/>
+  </cs:variation>
+  <cs:variation>
+    <a:lumMod val="80000"/>
+  </cs:variation>
+  <cs:variation>
+    <a:lumMod val="60000"/>
+    <a:lumOff val="40000"/>
+  </cs:variation>
+  <cs:variation>
+    <a:lumMod val="50000"/>
+  </cs:variation>
+  <cs:variation>
+    <a:lumMod val="70000"/>
+    <a:lumOff val="30000"/>
+  </cs:variation>
+  <cs:variation>
+    <a:lumMod val="70000"/>
+  </cs:variation>
+  <cs:variation>
+    <a:lumMod val="50000"/>
+    <a:lumOff val="50000"/>
+  </cs:variation>
+</cs:colorStyle>
+</file>
+
+<file path=ppt/charts/style1.xml><?xml version="1.0" encoding="utf-8"?>
+<cs:chartStyle xmlns:cs="http://schemas.microsoft.com/office/drawing/2012/chartStyle" xmlns:a="http://schemas.openxmlformats.org/drawingml/2006/main" id="216">
+  <cs:axisTitle>
+    <cs:lnRef idx="0"/>
+    <cs:fillRef idx="0"/>
+    <cs:effectRef idx="0"/>
+    <cs:fontRef idx="minor">
+      <a:schemeClr val="tx1">
+        <a:lumMod val="65000"/>
+        <a:lumOff val="35000"/>
+      </a:schemeClr>
+    </cs:fontRef>
+    <cs:defRPr sz="1330" kern="1200"/>
+  </cs:axisTitle>
+  <cs:categoryAxis>
+    <cs:lnRef idx="0"/>
+    <cs:fillRef idx="0"/>
+    <cs:effectRef idx="0"/>
+    <cs:fontRef idx="minor">
+      <a:schemeClr val="tx1">
+        <a:lumMod val="65000"/>
+        <a:lumOff val="35000"/>
+      </a:schemeClr>
+    </cs:fontRef>
+    <cs:spPr>
+      <a:ln w="9525" cap="flat" cmpd="sng" algn="ctr">
+        <a:solidFill>
+          <a:schemeClr val="tx1">
+            <a:lumMod val="15000"/>
+            <a:lumOff val="85000"/>
+          </a:schemeClr>
+        </a:solidFill>
+        <a:round/>
+      </a:ln>
+    </cs:spPr>
+    <cs:defRPr sz="1197" kern="1200"/>
+  </cs:categoryAxis>
+  <cs:chartArea mods="allowNoFillOverride allowNoLineOverride">
+    <cs:lnRef idx="0"/>
+    <cs:fillRef idx="0"/>
+    <cs:effectRef idx="0"/>
+    <cs:fontRef idx="minor">
+      <a:schemeClr val="tx1"/>
+    </cs:fontRef>
+    <cs:spPr>
+      <a:solidFill>
+        <a:schemeClr val="bg1"/>
+      </a:solidFill>
+      <a:ln w="9525" cap="flat" cmpd="sng" algn="ctr">
+        <a:solidFill>
+          <a:schemeClr val="tx1">
+            <a:lumMod val="15000"/>
+            <a:lumOff val="85000"/>
+          </a:schemeClr>
+        </a:solidFill>
+        <a:round/>
+      </a:ln>
+    </cs:spPr>
+    <cs:defRPr sz="1330" kern="1200"/>
+  </cs:chartArea>
+  <cs:dataLabel>
+    <cs:lnRef idx="0"/>
+    <cs:fillRef idx="0"/>
+    <cs:effectRef idx="0"/>
+    <cs:fontRef idx="minor">
+      <a:schemeClr val="tx1">
+        <a:lumMod val="75000"/>
+        <a:lumOff val="25000"/>
+      </a:schemeClr>
+    </cs:fontRef>
+    <cs:defRPr sz="1197" kern="1200"/>
+  </cs:dataLabel>
+  <cs:dataLabelCallout>
+    <cs:lnRef idx="0"/>
+    <cs:fillRef idx="0"/>
+    <cs:effectRef idx="0"/>
+    <cs:fontRef idx="minor">
+      <a:schemeClr val="dk1">
+        <a:lumMod val="65000"/>
+        <a:lumOff val="35000"/>
+      </a:schemeClr>
+    </cs:fontRef>
+    <cs:spPr>
+      <a:solidFill>
+        <a:schemeClr val="lt1"/>
+      </a:solidFill>
+      <a:ln>
+        <a:solidFill>
+          <a:schemeClr val="dk1">
+            <a:lumMod val="25000"/>
+            <a:lumOff val="75000"/>
+          </a:schemeClr>
+        </a:solidFill>
+      </a:ln>
+    </cs:spPr>
+    <cs:defRPr sz="1197" kern="1200"/>
+    <cs:bodyPr rot="0" spcFirstLastPara="1" vertOverflow="clip" horzOverflow="clip" vert="horz" wrap="square" lIns="36576" tIns="18288" rIns="36576" bIns="18288" anchor="ctr" anchorCtr="1">
+      <a:spAutoFit/>
+    </cs:bodyPr>
+  </cs:dataLabelCallout>
+  <cs:dataPoint>
+    <cs:lnRef idx="0"/>
+    <cs:fillRef idx="1">
+      <cs:styleClr val="auto"/>
+    </cs:fillRef>
+    <cs:effectRef idx="0"/>
+    <cs:fontRef idx="minor">
+      <a:schemeClr val="tx1"/>
+    </cs:fontRef>
+  </cs:dataPoint>
+  <cs:dataPoint3D>
+    <cs:lnRef idx="0"/>
+    <cs:fillRef idx="1">
+      <cs:styleClr val="auto"/>
+    </cs:fillRef>
+    <cs:effectRef idx="0"/>
+    <cs:fontRef idx="minor">
+      <a:schemeClr val="tx1"/>
+    </cs:fontRef>
+  </cs:dataPoint3D>
+  <cs:dataPointLine>
+    <cs:lnRef idx="0">
+      <cs:styleClr val="auto"/>
+    </cs:lnRef>
+    <cs:fillRef idx="1"/>
+    <cs:effectRef idx="0"/>
+    <cs:fontRef idx="minor">
+      <a:schemeClr val="tx1"/>
+    </cs:fontRef>
+    <cs:spPr>
+      <a:ln w="28575" cap="rnd">
+        <a:solidFill>
+          <a:schemeClr val="phClr"/>
+        </a:solidFill>
+        <a:round/>
+      </a:ln>
+    </cs:spPr>
+  </cs:dataPointLine>
+  <cs:dataPointMarker>
+    <cs:lnRef idx="0">
+      <cs:styleClr val="auto"/>
+    </cs:lnRef>
+    <cs:fillRef idx="1">
+      <cs:styleClr val="auto"/>
+    </cs:fillRef>
+    <cs:effectRef idx="0"/>
+    <cs:fontRef idx="minor">
+      <a:schemeClr val="tx1"/>
+    </cs:fontRef>
+    <cs:spPr>
+      <a:ln w="9525">
+        <a:solidFill>
+          <a:schemeClr val="phClr"/>
+        </a:solidFill>
+      </a:ln>
+    </cs:spPr>
+  </cs:dataPointMarker>
+  <cs:dataPointMarkerLayout symbol="circle" size="5"/>
+  <cs:dataPointWireframe>
+    <cs:lnRef idx="0">
+      <cs:styleClr val="auto"/>
+    </cs:lnRef>
+    <cs:fillRef idx="1"/>
+    <cs:effectRef idx="0"/>
+    <cs:fontRef idx="minor">
+      <a:schemeClr val="tx1"/>
+    </cs:fontRef>
+    <cs:spPr>
+      <a:ln w="9525" cap="rnd">
+        <a:solidFill>
+          <a:schemeClr val="phClr"/>
+        </a:solidFill>
+        <a:round/>
+      </a:ln>
+    </cs:spPr>
+  </cs:dataPointWireframe>
+  <cs:dataTable>
+    <cs:lnRef idx="0"/>
+    <cs:fillRef idx="0"/>
+    <cs:effectRef idx="0"/>
+    <cs:fontRef idx="minor">
+      <a:schemeClr val="tx1">
+        <a:lumMod val="65000"/>
+        <a:lumOff val="35000"/>
+      </a:schemeClr>
+    </cs:fontRef>
+    <cs:spPr>
+      <a:noFill/>
+      <a:ln w="9525" cap="flat" cmpd="sng" algn="ctr">
+        <a:solidFill>
+          <a:schemeClr val="tx1">
+            <a:lumMod val="15000"/>
+            <a:lumOff val="85000"/>
+          </a:schemeClr>
+        </a:solidFill>
+        <a:round/>
+      </a:ln>
+    </cs:spPr>
+    <cs:defRPr sz="1197" kern="1200"/>
+  </cs:dataTable>
+  <cs:downBar>
+    <cs:lnRef idx="0"/>
+    <cs:fillRef idx="0"/>
+    <cs:effectRef idx="0"/>
+    <cs:fontRef idx="minor">
+      <a:schemeClr val="tx1"/>
+    </cs:fontRef>
+    <cs:spPr>
+      <a:solidFill>
+        <a:schemeClr val="dk1">
+          <a:lumMod val="75000"/>
+          <a:lumOff val="25000"/>
+        </a:schemeClr>
+      </a:solidFill>
+      <a:ln w="9525" cap="flat" cmpd="sng" algn="ctr">
+        <a:solidFill>
+          <a:schemeClr val="tx1">
+            <a:lumMod val="65000"/>
+            <a:lumOff val="35000"/>
+          </a:schemeClr>
+        </a:solidFill>
+        <a:round/>
+      </a:ln>
+    </cs:spPr>
+  </cs:downBar>
+  <cs:dropLine>
+    <cs:lnRef idx="0"/>
+    <cs:fillRef idx="0"/>
+    <cs:effectRef idx="0"/>
+    <cs:fontRef idx="minor">
+      <a:schemeClr val="tx1"/>
+    </cs:fontRef>
+    <cs:spPr>
+      <a:ln w="9525" cap="flat" cmpd="sng" algn="ctr">
+        <a:solidFill>
+          <a:schemeClr val="tx1">
+            <a:lumMod val="35000"/>
+            <a:lumOff val="65000"/>
+          </a:schemeClr>
+        </a:solidFill>
+        <a:round/>
+      </a:ln>
+    </cs:spPr>
+  </cs:dropLine>
+  <cs:errorBar>
+    <cs:lnRef idx="0"/>
+    <cs:fillRef idx="0"/>
+    <cs:effectRef idx="0"/>
+    <cs:fontRef idx="minor">
+      <a:schemeClr val="tx1"/>
+    </cs:fontRef>
+    <cs:spPr>
+      <a:ln w="9525" cap="flat" cmpd="sng" algn="ctr">
+        <a:solidFill>
+          <a:schemeClr val="tx1">
+            <a:lumMod val="65000"/>
+            <a:lumOff val="35000"/>
+          </a:schemeClr>
+        </a:solidFill>
+        <a:round/>
+      </a:ln>
+    </cs:spPr>
+  </cs:errorBar>
+  <cs:floor>
+    <cs:lnRef idx="0"/>
+    <cs:fillRef idx="0"/>
+    <cs:effectRef idx="0"/>
+    <cs:fontRef idx="minor">
+      <a:schemeClr val="tx1"/>
+    </cs:fontRef>
+    <cs:spPr>
+      <a:noFill/>
+      <a:ln>
+        <a:noFill/>
+      </a:ln>
+    </cs:spPr>
+  </cs:floor>
+  <cs:gridlineMajor>
+    <cs:lnRef idx="0"/>
+    <cs:fillRef idx="0"/>
+    <cs:effectRef idx="0"/>
+    <cs:fontRef idx="minor">
+      <a:schemeClr val="tx1"/>
+    </cs:fontRef>
+    <cs:spPr>
+      <a:ln w="9525" cap="flat" cmpd="sng" algn="ctr">
+        <a:solidFill>
+          <a:schemeClr val="tx1">
+            <a:lumMod val="15000"/>
+            <a:lumOff val="85000"/>
+          </a:schemeClr>
+        </a:solidFill>
+        <a:round/>
+      </a:ln>
+    </cs:spPr>
+  </cs:gridlineMajor>
+  <cs:gridlineMinor>
+    <cs:lnRef idx="0"/>
+    <cs:fillRef idx="0"/>
+    <cs:effectRef idx="0"/>
+    <cs:fontRef idx="minor">
+      <a:schemeClr val="tx1"/>
+    </cs:fontRef>
+    <cs:spPr>
+      <a:ln w="9525" cap="flat" cmpd="sng" algn="ctr">
+        <a:solidFill>
+          <a:schemeClr val="tx1">
+            <a:lumMod val="5000"/>
+            <a:lumOff val="95000"/>
+          </a:schemeClr>
+        </a:solidFill>
+        <a:round/>
+      </a:ln>
+    </cs:spPr>
+  </cs:gridlineMinor>
+  <cs:hiLoLine>
+    <cs:lnRef idx="0"/>
+    <cs:fillRef idx="0"/>
+    <cs:effectRef idx="0"/>
+    <cs:fontRef idx="minor">
+      <a:schemeClr val="tx1"/>
+    </cs:fontRef>
+    <cs:spPr>
+      <a:ln w="9525" cap="flat" cmpd="sng" algn="ctr">
+        <a:solidFill>
+          <a:schemeClr val="tx1">
+            <a:lumMod val="50000"/>
+            <a:lumOff val="50000"/>
+          </a:schemeClr>
+        </a:solidFill>
+        <a:round/>
+      </a:ln>
+    </cs:spPr>
+  </cs:hiLoLine>
+  <cs:leaderLine>
+    <cs:lnRef idx="0"/>
+    <cs:fillRef idx="0"/>
+    <cs:effectRef idx="0"/>
+    <cs:fontRef idx="minor">
+      <a:schemeClr val="tx1"/>
+    </cs:fontRef>
+    <cs:spPr>
+      <a:ln w="9525" cap="flat" cmpd="sng" algn="ctr">
+        <a:solidFill>
+          <a:schemeClr val="tx1">
+            <a:lumMod val="35000"/>
+            <a:lumOff val="65000"/>
+          </a:schemeClr>
+        </a:solidFill>
+        <a:round/>
+      </a:ln>
+    </cs:spPr>
+  </cs:leaderLine>
+  <cs:legend>
+    <cs:lnRef idx="0"/>
+    <cs:fillRef idx="0"/>
+    <cs:effectRef idx="0"/>
+    <cs:fontRef idx="minor">
+      <a:schemeClr val="tx1">
+        <a:lumMod val="65000"/>
+        <a:lumOff val="35000"/>
+      </a:schemeClr>
+    </cs:fontRef>
+    <cs:defRPr sz="1197" kern="1200"/>
+  </cs:legend>
+  <cs:plotArea mods="allowNoFillOverride allowNoLineOverride">
+    <cs:lnRef idx="0"/>
+    <cs:fillRef idx="0"/>
+    <cs:effectRef idx="0"/>
+    <cs:fontRef idx="minor">
+      <a:schemeClr val="tx1"/>
+    </cs:fontRef>
+  </cs:plotArea>
+  <cs:plotArea3D mods="allowNoFillOverride allowNoLineOverride">
+    <cs:lnRef idx="0"/>
+    <cs:fillRef idx="0"/>
+    <cs:effectRef idx="0"/>
+    <cs:fontRef idx="minor">
+      <a:schemeClr val="tx1"/>
+    </cs:fontRef>
+  </cs:plotArea3D>
+  <cs:seriesAxis>
+    <cs:lnRef idx="0"/>
+    <cs:fillRef idx="0"/>
+    <cs:effectRef idx="0"/>
+    <cs:fontRef idx="minor">
+      <a:schemeClr val="tx1">
+        <a:lumMod val="65000"/>
+        <a:lumOff val="35000"/>
+      </a:schemeClr>
+    </cs:fontRef>
+    <cs:defRPr sz="1197" kern="1200"/>
+  </cs:seriesAxis>
+  <cs:seriesLine>
+    <cs:lnRef idx="0"/>
+    <cs:fillRef idx="0"/>
+    <cs:effectRef idx="0"/>
+    <cs:fontRef idx="minor">
+      <a:schemeClr val="tx1"/>
+    </cs:fontRef>
+    <cs:spPr>
+      <a:ln w="9525" cap="flat" cmpd="sng" algn="ctr">
+        <a:solidFill>
+          <a:schemeClr val="tx1">
+            <a:lumMod val="35000"/>
+            <a:lumOff val="65000"/>
+          </a:schemeClr>
+        </a:solidFill>
+        <a:round/>
+      </a:ln>
+    </cs:spPr>
+  </cs:seriesLine>
+  <cs:title>
+    <cs:lnRef idx="0"/>
+    <cs:fillRef idx="0"/>
+    <cs:effectRef idx="0"/>
+    <cs:fontRef idx="minor">
+      <a:schemeClr val="tx1">
+        <a:lumMod val="65000"/>
+        <a:lumOff val="35000"/>
+      </a:schemeClr>
+    </cs:fontRef>
+    <cs:defRPr sz="1862" b="0" kern="1200" spc="0" baseline="0"/>
+  </cs:title>
+  <cs:trendline>
+    <cs:lnRef idx="0">
+      <cs:styleClr val="auto"/>
+    </cs:lnRef>
+    <cs:fillRef idx="0"/>
+    <cs:effectRef idx="0"/>
+    <cs:fontRef idx="minor">
+      <a:schemeClr val="tx1"/>
+    </cs:fontRef>
+    <cs:spPr>
+      <a:ln w="19050" cap="rnd">
+        <a:solidFill>
+          <a:schemeClr val="phClr"/>
+        </a:solidFill>
+        <a:prstDash val="sysDot"/>
+      </a:ln>
+    </cs:spPr>
+  </cs:trendline>
+  <cs:trendlineLabel>
+    <cs:lnRef idx="0"/>
+    <cs:fillRef idx="0"/>
+    <cs:effectRef idx="0"/>
+    <cs:fontRef idx="minor">
+      <a:schemeClr val="tx1">
+        <a:lumMod val="65000"/>
+        <a:lumOff val="35000"/>
+      </a:schemeClr>
+    </cs:fontRef>
+    <cs:defRPr sz="1197" kern="1200"/>
+  </cs:trendlineLabel>
+  <cs:upBar>
+    <cs:lnRef idx="0"/>
+    <cs:fillRef idx="0"/>
+    <cs:effectRef idx="0"/>
+    <cs:fontRef idx="minor">
+      <a:schemeClr val="tx1"/>
+    </cs:fontRef>
+    <cs:spPr>
+      <a:solidFill>
+        <a:schemeClr val="lt1"/>
+      </a:solidFill>
+      <a:ln w="9525" cap="flat" cmpd="sng" algn="ctr">
+        <a:solidFill>
+          <a:schemeClr val="tx1">
+            <a:lumMod val="65000"/>
+            <a:lumOff val="35000"/>
+          </a:schemeClr>
+        </a:solidFill>
+        <a:round/>
+      </a:ln>
+    </cs:spPr>
+  </cs:upBar>
+  <cs:valueAxis>
+    <cs:lnRef idx="0"/>
+    <cs:fillRef idx="0"/>
+    <cs:effectRef idx="0"/>
+    <cs:fontRef idx="minor">
+      <a:schemeClr val="tx1">
+        <a:lumMod val="65000"/>
+        <a:lumOff val="35000"/>
+      </a:schemeClr>
+    </cs:fontRef>
+    <cs:defRPr sz="1197" kern="1200"/>
+  </cs:valueAxis>
+  <cs:wall>
+    <cs:lnRef idx="0"/>
+    <cs:fillRef idx="0"/>
+    <cs:effectRef idx="0"/>
+    <cs:fontRef idx="minor">
+      <a:schemeClr val="tx1"/>
+    </cs:fontRef>
+    <cs:spPr>
+      <a:noFill/>
+      <a:ln>
+        <a:noFill/>
+      </a:ln>
+    </cs:spPr>
+  </cs:wall>
+</cs:chartStyle>
+</file>
+
+<file path=ppt/charts/style2.xml><?xml version="1.0" encoding="utf-8"?>
+<cs:chartStyle xmlns:cs="http://schemas.microsoft.com/office/drawing/2012/chartStyle" xmlns:a="http://schemas.openxmlformats.org/drawingml/2006/main" id="227">
+  <cs:axisTitle>
+    <cs:lnRef idx="0"/>
+    <cs:fillRef idx="0"/>
+    <cs:effectRef idx="0"/>
+    <cs:fontRef idx="minor">
+      <a:schemeClr val="tx1">
+        <a:lumMod val="65000"/>
+        <a:lumOff val="35000"/>
+      </a:schemeClr>
+    </cs:fontRef>
+    <cs:defRPr sz="1000" kern="1200"/>
+  </cs:axisTitle>
+  <cs:categoryAxis>
+    <cs:lnRef idx="0"/>
+    <cs:fillRef idx="0"/>
+    <cs:effectRef idx="0"/>
+    <cs:fontRef idx="minor">
+      <a:schemeClr val="tx1">
+        <a:lumMod val="65000"/>
+        <a:lumOff val="35000"/>
+      </a:schemeClr>
+    </cs:fontRef>
+    <cs:spPr>
+      <a:ln w="9525" cap="flat" cmpd="sng" algn="ctr">
+        <a:solidFill>
+          <a:schemeClr val="tx1">
+            <a:lumMod val="15000"/>
+            <a:lumOff val="85000"/>
+          </a:schemeClr>
+        </a:solidFill>
+        <a:round/>
+      </a:ln>
+    </cs:spPr>
+    <cs:defRPr sz="900" kern="1200"/>
+  </cs:categoryAxis>
+  <cs:chartArea mods="allowNoFillOverride allowNoLineOverride">
+    <cs:lnRef idx="0"/>
+    <cs:fillRef idx="0"/>
+    <cs:effectRef idx="0"/>
+    <cs:fontRef idx="minor">
+      <a:schemeClr val="tx1"/>
+    </cs:fontRef>
+    <cs:spPr>
+      <a:solidFill>
+        <a:schemeClr val="bg1"/>
+      </a:solidFill>
+      <a:ln w="9525" cap="flat" cmpd="sng" algn="ctr">
+        <a:solidFill>
+          <a:schemeClr val="tx1">
+            <a:lumMod val="15000"/>
+            <a:lumOff val="85000"/>
+          </a:schemeClr>
+        </a:solidFill>
+        <a:round/>
+      </a:ln>
+    </cs:spPr>
+    <cs:defRPr sz="1000" kern="1200"/>
+  </cs:chartArea>
+  <cs:dataLabel>
+    <cs:lnRef idx="0"/>
+    <cs:fillRef idx="0"/>
+    <cs:effectRef idx="0"/>
+    <cs:fontRef idx="minor">
+      <a:schemeClr val="tx1">
+        <a:lumMod val="75000"/>
+        <a:lumOff val="25000"/>
+      </a:schemeClr>
+    </cs:fontRef>
+    <cs:defRPr sz="900" kern="1200"/>
+  </cs:dataLabel>
+  <cs:dataLabelCallout>
+    <cs:lnRef idx="0"/>
+    <cs:fillRef idx="0"/>
+    <cs:effectRef idx="0"/>
+    <cs:fontRef idx="minor">
+      <a:schemeClr val="dk1">
+        <a:lumMod val="65000"/>
+        <a:lumOff val="35000"/>
+      </a:schemeClr>
+    </cs:fontRef>
+    <cs:spPr>
+      <a:solidFill>
+        <a:schemeClr val="lt1"/>
+      </a:solidFill>
+      <a:ln>
+        <a:solidFill>
+          <a:schemeClr val="dk1">
+            <a:lumMod val="25000"/>
+            <a:lumOff val="75000"/>
+          </a:schemeClr>
+        </a:solidFill>
+      </a:ln>
+    </cs:spPr>
+    <cs:defRPr sz="900" kern="1200"/>
+    <cs:bodyPr rot="0" spcFirstLastPara="1" vertOverflow="clip" horzOverflow="clip" vert="horz" wrap="square" lIns="36576" tIns="18288" rIns="36576" bIns="18288" anchor="ctr" anchorCtr="1">
+      <a:spAutoFit/>
+    </cs:bodyPr>
+  </cs:dataLabelCallout>
+  <cs:dataPoint>
+    <cs:lnRef idx="0"/>
+    <cs:fillRef idx="1">
+      <cs:styleClr val="auto"/>
+    </cs:fillRef>
+    <cs:effectRef idx="0"/>
+    <cs:fontRef idx="minor">
+      <a:schemeClr val="tx1"/>
+    </cs:fontRef>
+    <cs:spPr>
+      <a:solidFill>
+        <a:schemeClr val="phClr"/>
+      </a:solidFill>
+    </cs:spPr>
+  </cs:dataPoint>
+  <cs:dataPoint3D>
+    <cs:lnRef idx="0"/>
+    <cs:fillRef idx="1">
+      <cs:styleClr val="auto"/>
+    </cs:fillRef>
+    <cs:effectRef idx="0"/>
+    <cs:fontRef idx="minor">
+      <a:schemeClr val="tx1"/>
+    </cs:fontRef>
+    <cs:spPr>
+      <a:solidFill>
+        <a:schemeClr val="phClr"/>
+      </a:solidFill>
+    </cs:spPr>
+  </cs:dataPoint3D>
+  <cs:dataPointLine>
+    <cs:lnRef idx="0">
+      <cs:styleClr val="auto"/>
+    </cs:lnRef>
+    <cs:fillRef idx="1"/>
+    <cs:effectRef idx="0"/>
+    <cs:fontRef idx="minor">
+      <a:schemeClr val="tx1"/>
+    </cs:fontRef>
+    <cs:spPr>
+      <a:ln w="28575" cap="rnd">
+        <a:solidFill>
+          <a:schemeClr val="phClr"/>
+        </a:solidFill>
+        <a:round/>
+      </a:ln>
+    </cs:spPr>
+  </cs:dataPointLine>
+  <cs:dataPointMarker>
+    <cs:lnRef idx="0">
+      <cs:styleClr val="auto"/>
+    </cs:lnRef>
+    <cs:fillRef idx="1">
+      <cs:styleClr val="auto"/>
+    </cs:fillRef>
+    <cs:effectRef idx="0"/>
+    <cs:fontRef idx="minor">
+      <a:schemeClr val="tx1"/>
+    </cs:fontRef>
+    <cs:spPr>
+      <a:solidFill>
+        <a:schemeClr val="phClr"/>
+      </a:solidFill>
+      <a:ln w="9525">
+        <a:solidFill>
+          <a:schemeClr val="phClr"/>
+        </a:solidFill>
+      </a:ln>
+    </cs:spPr>
+  </cs:dataPointMarker>
+  <cs:dataPointMarkerLayout symbol="circle" size="5"/>
+  <cs:dataPointWireframe>
+    <cs:lnRef idx="0">
+      <cs:styleClr val="auto"/>
+    </cs:lnRef>
+    <cs:fillRef idx="1"/>
+    <cs:effectRef idx="0"/>
+    <cs:fontRef idx="minor">
+      <a:schemeClr val="tx1"/>
+    </cs:fontRef>
+    <cs:spPr>
+      <a:ln w="9525" cap="rnd">
+        <a:solidFill>
+          <a:schemeClr val="phClr"/>
+        </a:solidFill>
+        <a:round/>
+      </a:ln>
+    </cs:spPr>
+  </cs:dataPointWireframe>
+  <cs:dataTable>
+    <cs:lnRef idx="0"/>
+    <cs:fillRef idx="0"/>
+    <cs:effectRef idx="0"/>
+    <cs:fontRef idx="minor">
+      <a:schemeClr val="tx1">
+        <a:lumMod val="65000"/>
+        <a:lumOff val="35000"/>
+      </a:schemeClr>
+    </cs:fontRef>
+    <cs:spPr>
+      <a:noFill/>
+      <a:ln w="9525" cap="flat" cmpd="sng" algn="ctr">
+        <a:solidFill>
+          <a:schemeClr val="tx1">
+            <a:lumMod val="15000"/>
+            <a:lumOff val="85000"/>
+          </a:schemeClr>
+        </a:solidFill>
+        <a:round/>
+      </a:ln>
+    </cs:spPr>
+    <cs:defRPr sz="900" kern="1200"/>
+  </cs:dataTable>
+  <cs:downBar>
+    <cs:lnRef idx="0"/>
+    <cs:fillRef idx="0"/>
+    <cs:effectRef idx="0"/>
+    <cs:fontRef idx="minor">
+      <a:schemeClr val="dk1"/>
+    </cs:fontRef>
+    <cs:spPr>
+      <a:solidFill>
+        <a:schemeClr val="dk1">
+          <a:lumMod val="65000"/>
+          <a:lumOff val="35000"/>
+        </a:schemeClr>
+      </a:solidFill>
+      <a:ln w="9525">
+        <a:solidFill>
+          <a:schemeClr val="tx1">
+            <a:lumMod val="65000"/>
+            <a:lumOff val="35000"/>
+          </a:schemeClr>
+        </a:solidFill>
+      </a:ln>
+    </cs:spPr>
+  </cs:downBar>
+  <cs:dropLine>
+    <cs:lnRef idx="0"/>
+    <cs:fillRef idx="0"/>
+    <cs:effectRef idx="0"/>
+    <cs:fontRef idx="minor">
+      <a:schemeClr val="tx1"/>
+    </cs:fontRef>
+    <cs:spPr>
+      <a:ln w="9525" cap="flat" cmpd="sng" algn="ctr">
+        <a:solidFill>
+          <a:schemeClr val="tx1">
+            <a:lumMod val="35000"/>
+            <a:lumOff val="65000"/>
+          </a:schemeClr>
+        </a:solidFill>
+        <a:round/>
+      </a:ln>
+    </cs:spPr>
+  </cs:dropLine>
+  <cs:errorBar>
+    <cs:lnRef idx="0"/>
+    <cs:fillRef idx="0"/>
+    <cs:effectRef idx="0"/>
+    <cs:fontRef idx="minor">
+      <a:schemeClr val="tx1"/>
+    </cs:fontRef>
+    <cs:spPr>
+      <a:ln w="9525" cap="flat" cmpd="sng" algn="ctr">
+        <a:solidFill>
+          <a:schemeClr val="tx1">
+            <a:lumMod val="65000"/>
+            <a:lumOff val="35000"/>
+          </a:schemeClr>
+        </a:solidFill>
+        <a:round/>
+      </a:ln>
+    </cs:spPr>
+  </cs:errorBar>
+  <cs:floor>
+    <cs:lnRef idx="0"/>
+    <cs:fillRef idx="0"/>
+    <cs:effectRef idx="0"/>
+    <cs:fontRef idx="minor">
+      <a:schemeClr val="tx1"/>
+    </cs:fontRef>
+    <cs:spPr>
+      <a:noFill/>
+      <a:ln>
+        <a:noFill/>
+      </a:ln>
+    </cs:spPr>
+  </cs:floor>
+  <cs:gridlineMajor>
+    <cs:lnRef idx="0"/>
+    <cs:fillRef idx="0"/>
+    <cs:effectRef idx="0"/>
+    <cs:fontRef idx="minor">
+      <a:schemeClr val="tx1"/>
+    </cs:fontRef>
+    <cs:spPr>
+      <a:ln w="9525" cap="flat" cmpd="sng" algn="ctr">
+        <a:solidFill>
+          <a:schemeClr val="tx1">
+            <a:lumMod val="15000"/>
+            <a:lumOff val="85000"/>
+          </a:schemeClr>
+        </a:solidFill>
+        <a:round/>
+      </a:ln>
+    </cs:spPr>
+  </cs:gridlineMajor>
+  <cs:gridlineMinor>
+    <cs:lnRef idx="0"/>
+    <cs:fillRef idx="0"/>
+    <cs:effectRef idx="0"/>
+    <cs:fontRef idx="minor">
+      <a:schemeClr val="tx1"/>
+    </cs:fontRef>
+    <cs:spPr>
+      <a:ln w="9525" cap="flat" cmpd="sng" algn="ctr">
+        <a:solidFill>
+          <a:schemeClr val="tx1">
+            <a:lumMod val="5000"/>
+            <a:lumOff val="95000"/>
+          </a:schemeClr>
+        </a:solidFill>
+        <a:round/>
+      </a:ln>
+    </cs:spPr>
+  </cs:gridlineMinor>
+  <cs:hiLoLine>
+    <cs:lnRef idx="0"/>
+    <cs:fillRef idx="0"/>
+    <cs:effectRef idx="0"/>
+    <cs:fontRef idx="minor">
+      <a:schemeClr val="tx1"/>
+    </cs:fontRef>
+    <cs:spPr>
+      <a:ln w="9525" cap="flat" cmpd="sng" algn="ctr">
+        <a:solidFill>
+          <a:schemeClr val="tx1">
+            <a:lumMod val="75000"/>
+            <a:lumOff val="25000"/>
+          </a:schemeClr>
+        </a:solidFill>
+        <a:round/>
+      </a:ln>
+    </cs:spPr>
+  </cs:hiLoLine>
+  <cs:leaderLine>
+    <cs:lnRef idx="0"/>
+    <cs:fillRef idx="0"/>
+    <cs:effectRef idx="0"/>
+    <cs:fontRef idx="minor">
+      <a:schemeClr val="tx1"/>
+    </cs:fontRef>
+    <cs:spPr>
+      <a:ln w="9525" cap="flat" cmpd="sng" algn="ctr">
+        <a:solidFill>
+          <a:schemeClr val="tx1">
+            <a:lumMod val="35000"/>
+            <a:lumOff val="65000"/>
+          </a:schemeClr>
+        </a:solidFill>
+        <a:round/>
+      </a:ln>
+    </cs:spPr>
+  </cs:leaderLine>
+  <cs:legend>
+    <cs:lnRef idx="0"/>
+    <cs:fillRef idx="0"/>
+    <cs:effectRef idx="0"/>
+    <cs:fontRef idx="minor">
+      <a:schemeClr val="tx1">
+        <a:lumMod val="65000"/>
+        <a:lumOff val="35000"/>
+      </a:schemeClr>
+    </cs:fontRef>
+    <cs:defRPr sz="900" kern="1200"/>
+  </cs:legend>
+  <cs:plotArea mods="allowNoFillOverride allowNoLineOverride">
+    <cs:lnRef idx="0"/>
+    <cs:fillRef idx="0"/>
+    <cs:effectRef idx="0"/>
+    <cs:fontRef idx="minor">
+      <a:schemeClr val="tx1"/>
+    </cs:fontRef>
+  </cs:plotArea>
+  <cs:plotArea3D mods="allowNoFillOverride allowNoLineOverride">
+    <cs:lnRef idx="0"/>
+    <cs:fillRef idx="0"/>
+    <cs:effectRef idx="0"/>
+    <cs:fontRef idx="minor">
+      <a:schemeClr val="tx1"/>
+    </cs:fontRef>
+  </cs:plotArea3D>
+  <cs:seriesAxis>
+    <cs:lnRef idx="0"/>
+    <cs:fillRef idx="0"/>
+    <cs:effectRef idx="0"/>
+    <cs:fontRef idx="minor">
+      <a:schemeClr val="tx1">
+        <a:lumMod val="65000"/>
+        <a:lumOff val="35000"/>
+      </a:schemeClr>
+    </cs:fontRef>
+    <cs:defRPr sz="900" kern="1200"/>
+  </cs:seriesAxis>
+  <cs:seriesLine>
+    <cs:lnRef idx="0"/>
+    <cs:fillRef idx="0"/>
+    <cs:effectRef idx="0"/>
+    <cs:fontRef idx="minor">
+      <a:schemeClr val="tx1"/>
+    </cs:fontRef>
+    <cs:spPr>
+      <a:ln w="9525" cap="flat" cmpd="sng" algn="ctr">
+        <a:solidFill>
+          <a:schemeClr val="tx1">
+            <a:lumMod val="35000"/>
+            <a:lumOff val="65000"/>
+          </a:schemeClr>
+        </a:solidFill>
+        <a:round/>
+      </a:ln>
+    </cs:spPr>
+  </cs:seriesLine>
+  <cs:title>
+    <cs:lnRef idx="0"/>
+    <cs:fillRef idx="0"/>
+    <cs:effectRef idx="0"/>
+    <cs:fontRef idx="minor">
+      <a:schemeClr val="tx1">
+        <a:lumMod val="65000"/>
+        <a:lumOff val="35000"/>
+      </a:schemeClr>
+    </cs:fontRef>
+    <cs:defRPr sz="1400" b="0" kern="1200" spc="0" baseline="0"/>
+  </cs:title>
+  <cs:trendline>
+    <cs:lnRef idx="0">
+      <cs:styleClr val="auto"/>
+    </cs:lnRef>
+    <cs:fillRef idx="0"/>
+    <cs:effectRef idx="0"/>
+    <cs:fontRef idx="minor">
+      <a:schemeClr val="tx1"/>
+    </cs:fontRef>
+    <cs:spPr>
+      <a:ln w="19050" cap="rnd">
+        <a:solidFill>
+          <a:schemeClr val="phClr"/>
+        </a:solidFill>
+        <a:prstDash val="sysDot"/>
+      </a:ln>
+    </cs:spPr>
+  </cs:trendline>
+  <cs:trendlineLabel>
+    <cs:lnRef idx="0"/>
+    <cs:fillRef idx="0"/>
+    <cs:effectRef idx="0"/>
+    <cs:fontRef idx="minor">
+      <a:schemeClr val="tx1">
+        <a:lumMod val="65000"/>
+        <a:lumOff val="35000"/>
+      </a:schemeClr>
+    </cs:fontRef>
+    <cs:defRPr sz="900" kern="1200"/>
+  </cs:trendlineLabel>
+  <cs:upBar>
+    <cs:lnRef idx="0"/>
+    <cs:fillRef idx="0"/>
+    <cs:effectRef idx="0"/>
+    <cs:fontRef idx="minor">
+      <a:schemeClr val="dk1"/>
+    </cs:fontRef>
+    <cs:spPr>
+      <a:solidFill>
+        <a:schemeClr val="lt1"/>
+      </a:solidFill>
+      <a:ln w="9525">
+        <a:solidFill>
+          <a:schemeClr val="tx1">
+            <a:lumMod val="15000"/>
+            <a:lumOff val="85000"/>
+          </a:schemeClr>
+        </a:solidFill>
+      </a:ln>
+    </cs:spPr>
+  </cs:upBar>
+  <cs:valueAxis>
+    <cs:lnRef idx="0"/>
+    <cs:fillRef idx="0"/>
+    <cs:effectRef idx="0"/>
+    <cs:fontRef idx="minor">
+      <a:schemeClr val="tx1">
+        <a:lumMod val="65000"/>
+        <a:lumOff val="35000"/>
+      </a:schemeClr>
+    </cs:fontRef>
+    <cs:defRPr sz="900" kern="1200"/>
+  </cs:valueAxis>
+  <cs:wall>
+    <cs:lnRef idx="0"/>
+    <cs:fillRef idx="0"/>
+    <cs:effectRef idx="0"/>
+    <cs:fontRef idx="minor">
+      <a:schemeClr val="tx1"/>
+    </cs:fontRef>
+    <cs:spPr>
+      <a:noFill/>
+      <a:ln>
+        <a:noFill/>
+      </a:ln>
+    </cs:spPr>
+  </cs:wall>
+</cs:chartStyle>
+</file>
+
+<file path=ppt/charts/style3.xml><?xml version="1.0" encoding="utf-8"?>
+<cs:chartStyle xmlns:cs="http://schemas.microsoft.com/office/drawing/2012/chartStyle" xmlns:a="http://schemas.openxmlformats.org/drawingml/2006/main" id="201">
+  <cs:axisTitle>
+    <cs:lnRef idx="0"/>
+    <cs:fillRef idx="0"/>
+    <cs:effectRef idx="0"/>
+    <cs:fontRef idx="minor">
+      <a:schemeClr val="tx1">
+        <a:lumMod val="65000"/>
+        <a:lumOff val="35000"/>
+      </a:schemeClr>
+    </cs:fontRef>
+    <cs:defRPr sz="1000" kern="1200"/>
+  </cs:axisTitle>
+  <cs:categoryAxis>
+    <cs:lnRef idx="0"/>
+    <cs:fillRef idx="0"/>
+    <cs:effectRef idx="0"/>
+    <cs:fontRef idx="minor">
+      <a:schemeClr val="tx1">
+        <a:lumMod val="65000"/>
+        <a:lumOff val="35000"/>
+      </a:schemeClr>
+    </cs:fontRef>
+    <cs:spPr>
+      <a:ln w="9525" cap="flat" cmpd="sng" algn="ctr">
+        <a:solidFill>
+          <a:schemeClr val="tx1">
+            <a:lumMod val="15000"/>
+            <a:lumOff val="85000"/>
+          </a:schemeClr>
+        </a:solidFill>
+        <a:round/>
+      </a:ln>
+    </cs:spPr>
+    <cs:defRPr sz="900" kern="1200"/>
+  </cs:categoryAxis>
+  <cs:chartArea mods="allowNoFillOverride allowNoLineOverride">
+    <cs:lnRef idx="0"/>
+    <cs:fillRef idx="0"/>
+    <cs:effectRef idx="0"/>
+    <cs:fontRef idx="minor">
+      <a:schemeClr val="tx1"/>
+    </cs:fontRef>
+    <cs:spPr>
+      <a:solidFill>
+        <a:schemeClr val="bg1"/>
+      </a:solidFill>
+      <a:ln w="9525" cap="flat" cmpd="sng" algn="ctr">
+        <a:solidFill>
+          <a:schemeClr val="tx1">
+            <a:lumMod val="15000"/>
+            <a:lumOff val="85000"/>
+          </a:schemeClr>
+        </a:solidFill>
+        <a:round/>
+      </a:ln>
+    </cs:spPr>
+    <cs:defRPr sz="1000" kern="1200"/>
+  </cs:chartArea>
+  <cs:dataLabel>
+    <cs:lnRef idx="0"/>
+    <cs:fillRef idx="0"/>
+    <cs:effectRef idx="0"/>
+    <cs:fontRef idx="minor">
+      <a:schemeClr val="tx1">
+        <a:lumMod val="75000"/>
+        <a:lumOff val="25000"/>
+      </a:schemeClr>
+    </cs:fontRef>
+    <cs:defRPr sz="900" kern="1200"/>
+  </cs:dataLabel>
+  <cs:dataLabelCallout>
+    <cs:lnRef idx="0"/>
+    <cs:fillRef idx="0"/>
+    <cs:effectRef idx="0"/>
+    <cs:fontRef idx="minor">
+      <a:schemeClr val="dk1">
+        <a:lumMod val="65000"/>
+        <a:lumOff val="35000"/>
+      </a:schemeClr>
+    </cs:fontRef>
+    <cs:spPr>
+      <a:solidFill>
+        <a:schemeClr val="lt1"/>
+      </a:solidFill>
+      <a:ln>
+        <a:solidFill>
+          <a:schemeClr val="dk1">
+            <a:lumMod val="25000"/>
+            <a:lumOff val="75000"/>
+          </a:schemeClr>
+        </a:solidFill>
+      </a:ln>
+    </cs:spPr>
+    <cs:defRPr sz="900" kern="1200"/>
+    <cs:bodyPr rot="0" spcFirstLastPara="1" vertOverflow="clip" horzOverflow="clip" vert="horz" wrap="square" lIns="36576" tIns="18288" rIns="36576" bIns="18288" anchor="ctr" anchorCtr="1">
+      <a:spAutoFit/>
+    </cs:bodyPr>
+  </cs:dataLabelCallout>
+  <cs:dataPoint>
+    <cs:lnRef idx="0"/>
+    <cs:fillRef idx="1">
+      <cs:styleClr val="auto"/>
+    </cs:fillRef>
+    <cs:effectRef idx="0"/>
+    <cs:fontRef idx="minor">
+      <a:schemeClr val="tx1"/>
+    </cs:fontRef>
+  </cs:dataPoint>
+  <cs:dataPoint3D>
+    <cs:lnRef idx="0"/>
+    <cs:fillRef idx="1">
+      <cs:styleClr val="auto"/>
+    </cs:fillRef>
+    <cs:effectRef idx="0"/>
+    <cs:fontRef idx="minor">
+      <a:schemeClr val="tx1"/>
+    </cs:fontRef>
+  </cs:dataPoint3D>
+  <cs:dataPointLine>
+    <cs:lnRef idx="0">
+      <cs:styleClr val="auto"/>
+    </cs:lnRef>
+    <cs:fillRef idx="1"/>
+    <cs:effectRef idx="0"/>
+    <cs:fontRef idx="minor">
+      <a:schemeClr val="tx1"/>
+    </cs:fontRef>
+    <cs:spPr>
+      <a:ln w="28575" cap="rnd">
+        <a:solidFill>
+          <a:schemeClr val="phClr"/>
+        </a:solidFill>
+        <a:round/>
+      </a:ln>
+    </cs:spPr>
+  </cs:dataPointLine>
+  <cs:dataPointMarker>
+    <cs:lnRef idx="0">
+      <cs:styleClr val="auto"/>
+    </cs:lnRef>
+    <cs:fillRef idx="1">
+      <cs:styleClr val="auto"/>
+    </cs:fillRef>
+    <cs:effectRef idx="0"/>
+    <cs:fontRef idx="minor">
+      <a:schemeClr val="tx1"/>
+    </cs:fontRef>
+    <cs:spPr>
+      <a:ln w="9525">
+        <a:solidFill>
+          <a:schemeClr val="phClr"/>
+        </a:solidFill>
+      </a:ln>
+    </cs:spPr>
+  </cs:dataPointMarker>
+  <cs:dataPointMarkerLayout symbol="circle" size="5"/>
+  <cs:dataPointWireframe>
+    <cs:lnRef idx="0">
+      <cs:styleClr val="auto"/>
+    </cs:lnRef>
+    <cs:fillRef idx="1"/>
+    <cs:effectRef idx="0"/>
+    <cs:fontRef idx="minor">
+      <a:schemeClr val="tx1"/>
+    </cs:fontRef>
+    <cs:spPr>
+      <a:ln w="9525" cap="rnd">
+        <a:solidFill>
+          <a:schemeClr val="phClr"/>
+        </a:solidFill>
+        <a:round/>
+      </a:ln>
+    </cs:spPr>
+  </cs:dataPointWireframe>
+  <cs:dataTable>
+    <cs:lnRef idx="0"/>
+    <cs:fillRef idx="0"/>
+    <cs:effectRef idx="0"/>
+    <cs:fontRef idx="minor">
+      <a:schemeClr val="tx1">
+        <a:lumMod val="65000"/>
+        <a:lumOff val="35000"/>
+      </a:schemeClr>
+    </cs:fontRef>
+    <cs:spPr>
+      <a:noFill/>
+      <a:ln w="9525" cap="flat" cmpd="sng" algn="ctr">
+        <a:solidFill>
+          <a:schemeClr val="tx1">
+            <a:lumMod val="15000"/>
+            <a:lumOff val="85000"/>
+          </a:schemeClr>
+        </a:solidFill>
+        <a:round/>
+      </a:ln>
+    </cs:spPr>
+    <cs:defRPr sz="900" kern="1200"/>
+  </cs:dataTable>
+  <cs:downBar>
+    <cs:lnRef idx="0"/>
+    <cs:fillRef idx="0"/>
+    <cs:effectRef idx="0"/>
+    <cs:fontRef idx="minor">
+      <a:schemeClr val="dk1"/>
+    </cs:fontRef>
+    <cs:spPr>
+      <a:solidFill>
+        <a:schemeClr val="dk1">
+          <a:lumMod val="65000"/>
+          <a:lumOff val="35000"/>
+        </a:schemeClr>
+      </a:solidFill>
+      <a:ln w="9525">
+        <a:solidFill>
+          <a:schemeClr val="tx1">
+            <a:lumMod val="65000"/>
+            <a:lumOff val="35000"/>
+          </a:schemeClr>
+        </a:solidFill>
+      </a:ln>
+    </cs:spPr>
+  </cs:downBar>
+  <cs:dropLine>
+    <cs:lnRef idx="0"/>
+    <cs:fillRef idx="0"/>
+    <cs:effectRef idx="0"/>
+    <cs:fontRef idx="minor">
+      <a:schemeClr val="tx1"/>
+    </cs:fontRef>
+    <cs:spPr>
+      <a:ln w="9525" cap="flat" cmpd="sng" algn="ctr">
+        <a:solidFill>
+          <a:schemeClr val="tx1">
+            <a:lumMod val="35000"/>
+            <a:lumOff val="65000"/>
+          </a:schemeClr>
+        </a:solidFill>
+        <a:round/>
+      </a:ln>
+    </cs:spPr>
+  </cs:dropLine>
+  <cs:errorBar>
+    <cs:lnRef idx="0"/>
+    <cs:fillRef idx="0"/>
+    <cs:effectRef idx="0"/>
+    <cs:fontRef idx="minor">
+      <a:schemeClr val="tx1"/>
+    </cs:fontRef>
+    <cs:spPr>
+      <a:ln w="9525" cap="flat" cmpd="sng" algn="ctr">
+        <a:solidFill>
+          <a:schemeClr val="tx1">
+            <a:lumMod val="65000"/>
+            <a:lumOff val="35000"/>
+          </a:schemeClr>
+        </a:solidFill>
+        <a:round/>
+      </a:ln>
+    </cs:spPr>
+  </cs:errorBar>
+  <cs:floor>
+    <cs:lnRef idx="0"/>
+    <cs:fillRef idx="0"/>
+    <cs:effectRef idx="0"/>
+    <cs:fontRef idx="minor">
+      <a:schemeClr val="tx1"/>
+    </cs:fontRef>
+    <cs:spPr>
+      <a:noFill/>
+      <a:ln>
+        <a:noFill/>
+      </a:ln>
+    </cs:spPr>
+  </cs:floor>
+  <cs:gridlineMajor>
+    <cs:lnRef idx="0"/>
+    <cs:fillRef idx="0"/>
+    <cs:effectRef idx="0"/>
+    <cs:fontRef idx="minor">
+      <a:schemeClr val="tx1"/>
+    </cs:fontRef>
+    <cs:spPr>
+      <a:ln w="9525" cap="flat" cmpd="sng" algn="ctr">
+        <a:solidFill>
+          <a:schemeClr val="tx1">
+            <a:lumMod val="15000"/>
+            <a:lumOff val="85000"/>
+          </a:schemeClr>
+        </a:solidFill>
+        <a:round/>
+      </a:ln>
+    </cs:spPr>
+  </cs:gridlineMajor>
+  <cs:gridlineMinor>
+    <cs:lnRef idx="0"/>
+    <cs:fillRef idx="0"/>
+    <cs:effectRef idx="0"/>
+    <cs:fontRef idx="minor">
+      <a:schemeClr val="tx1"/>
+    </cs:fontRef>
+    <cs:spPr>
+      <a:ln w="9525" cap="flat" cmpd="sng" algn="ctr">
+        <a:solidFill>
+          <a:schemeClr val="tx1">
+            <a:lumMod val="5000"/>
+            <a:lumOff val="95000"/>
+          </a:schemeClr>
+        </a:solidFill>
+        <a:round/>
+      </a:ln>
+    </cs:spPr>
+  </cs:gridlineMinor>
+  <cs:hiLoLine>
+    <cs:lnRef idx="0"/>
+    <cs:fillRef idx="0"/>
+    <cs:effectRef idx="0"/>
+    <cs:fontRef idx="minor">
+      <a:schemeClr val="tx1"/>
+    </cs:fontRef>
+    <cs:spPr>
+      <a:ln w="9525" cap="flat" cmpd="sng" algn="ctr">
+        <a:solidFill>
+          <a:schemeClr val="tx1">
+            <a:lumMod val="75000"/>
+            <a:lumOff val="25000"/>
+          </a:schemeClr>
+        </a:solidFill>
+        <a:round/>
+      </a:ln>
+    </cs:spPr>
+  </cs:hiLoLine>
+  <cs:leaderLine>
+    <cs:lnRef idx="0"/>
+    <cs:fillRef idx="0"/>
+    <cs:effectRef idx="0"/>
+    <cs:fontRef idx="minor">
+      <a:schemeClr val="tx1"/>
+    </cs:fontRef>
+    <cs:spPr>
+      <a:ln w="9525" cap="flat" cmpd="sng" algn="ctr">
+        <a:solidFill>
+          <a:schemeClr val="tx1">
+            <a:lumMod val="35000"/>
+            <a:lumOff val="65000"/>
+          </a:schemeClr>
+        </a:solidFill>
+        <a:round/>
+      </a:ln>
+    </cs:spPr>
+  </cs:leaderLine>
+  <cs:legend>
+    <cs:lnRef idx="0"/>
+    <cs:fillRef idx="0"/>
+    <cs:effectRef idx="0"/>
+    <cs:fontRef idx="minor">
+      <a:schemeClr val="tx1">
+        <a:lumMod val="65000"/>
+        <a:lumOff val="35000"/>
+      </a:schemeClr>
+    </cs:fontRef>
+    <cs:defRPr sz="900" kern="1200"/>
+  </cs:legend>
+  <cs:plotArea mods="allowNoFillOverride allowNoLineOverride">
+    <cs:lnRef idx="0"/>
+    <cs:fillRef idx="0"/>
+    <cs:effectRef idx="0"/>
+    <cs:fontRef idx="minor">
+      <a:schemeClr val="tx1"/>
+    </cs:fontRef>
+  </cs:plotArea>
+  <cs:plotArea3D mods="allowNoFillOverride allowNoLineOverride">
+    <cs:lnRef idx="0"/>
+    <cs:fillRef idx="0"/>
+    <cs:effectRef idx="0"/>
+    <cs:fontRef idx="minor">
+      <a:schemeClr val="tx1"/>
+    </cs:fontRef>
+  </cs:plotArea3D>
+  <cs:seriesAxis>
+    <cs:lnRef idx="0"/>
+    <cs:fillRef idx="0"/>
+    <cs:effectRef idx="0"/>
+    <cs:fontRef idx="minor">
+      <a:schemeClr val="tx1">
+        <a:lumMod val="65000"/>
+        <a:lumOff val="35000"/>
+      </a:schemeClr>
+    </cs:fontRef>
+    <cs:defRPr sz="900" kern="1200"/>
+  </cs:seriesAxis>
+  <cs:seriesLine>
+    <cs:lnRef idx="0"/>
+    <cs:fillRef idx="0"/>
+    <cs:effectRef idx="0"/>
+    <cs:fontRef idx="minor">
+      <a:schemeClr val="tx1"/>
+    </cs:fontRef>
+    <cs:spPr>
+      <a:ln w="9525" cap="flat" cmpd="sng" algn="ctr">
+        <a:solidFill>
+          <a:schemeClr val="tx1">
+            <a:lumMod val="35000"/>
+            <a:lumOff val="65000"/>
+          </a:schemeClr>
+        </a:solidFill>
+        <a:round/>
+      </a:ln>
+    </cs:spPr>
+  </cs:seriesLine>
+  <cs:title>
+    <cs:lnRef idx="0"/>
+    <cs:fillRef idx="0"/>
+    <cs:effectRef idx="0"/>
+    <cs:fontRef idx="minor">
+      <a:schemeClr val="tx1">
+        <a:lumMod val="65000"/>
+        <a:lumOff val="35000"/>
+      </a:schemeClr>
+    </cs:fontRef>
+    <cs:defRPr sz="1400" b="0" kern="1200" spc="0" baseline="0"/>
+  </cs:title>
+  <cs:trendline>
+    <cs:lnRef idx="0">
+      <cs:styleClr val="auto"/>
+    </cs:lnRef>
+    <cs:fillRef idx="0"/>
+    <cs:effectRef idx="0"/>
+    <cs:fontRef idx="minor">
+      <a:schemeClr val="tx1"/>
+    </cs:fontRef>
+    <cs:spPr>
+      <a:ln w="19050" cap="rnd">
+        <a:solidFill>
+          <a:schemeClr val="phClr"/>
+        </a:solidFill>
+        <a:prstDash val="sysDot"/>
+      </a:ln>
+    </cs:spPr>
+  </cs:trendline>
+  <cs:trendlineLabel>
+    <cs:lnRef idx="0"/>
+    <cs:fillRef idx="0"/>
+    <cs:effectRef idx="0"/>
+    <cs:fontRef idx="minor">
+      <a:schemeClr val="tx1">
+        <a:lumMod val="65000"/>
+        <a:lumOff val="35000"/>
+      </a:schemeClr>
+    </cs:fontRef>
+    <cs:defRPr sz="900" kern="1200"/>
+  </cs:trendlineLabel>
+  <cs:upBar>
+    <cs:lnRef idx="0"/>
+    <cs:fillRef idx="0"/>
+    <cs:effectRef idx="0"/>
+    <cs:fontRef idx="minor">
+      <a:schemeClr val="dk1"/>
+    </cs:fontRef>
+    <cs:spPr>
+      <a:solidFill>
+        <a:schemeClr val="lt1"/>
+      </a:solidFill>
+      <a:ln w="9525">
+        <a:solidFill>
+          <a:schemeClr val="tx1">
+            <a:lumMod val="15000"/>
+            <a:lumOff val="85000"/>
+          </a:schemeClr>
+        </a:solidFill>
+      </a:ln>
+    </cs:spPr>
+  </cs:upBar>
+  <cs:valueAxis>
+    <cs:lnRef idx="0"/>
+    <cs:fillRef idx="0"/>
+    <cs:effectRef idx="0"/>
+    <cs:fontRef idx="minor">
+      <a:schemeClr val="tx1">
+        <a:lumMod val="65000"/>
+        <a:lumOff val="35000"/>
+      </a:schemeClr>
+    </cs:fontRef>
+    <cs:defRPr sz="900" kern="1200"/>
+  </cs:valueAxis>
+  <cs:wall>
+    <cs:lnRef idx="0"/>
+    <cs:fillRef idx="0"/>
+    <cs:effectRef idx="0"/>
+    <cs:fontRef idx="minor">
+      <a:schemeClr val="tx1"/>
+    </cs:fontRef>
+    <cs:spPr>
+      <a:noFill/>
+      <a:ln>
+        <a:noFill/>
+      </a:ln>
+    </cs:spPr>
+  </cs:wall>
+</cs:chartStyle>
+</file>
+
+<file path=ppt/drawings/drawing1.xml><?xml version="1.0" encoding="utf-8"?>
+<c:userShapes xmlns:c="http://schemas.openxmlformats.org/drawingml/2006/chart">
+  <cdr:relSizeAnchor xmlns:cdr="http://schemas.openxmlformats.org/drawingml/2006/chartDrawing">
+    <cdr:from>
+      <cdr:x>0.6022</cdr:x>
+      <cdr:y>0.33838</cdr:y>
+    </cdr:from>
+    <cdr:to>
+      <cdr:x>0.63534</cdr:x>
+      <cdr:y>0.39383</cdr:y>
+    </cdr:to>
+    <cdr:sp macro="" textlink="">
+      <cdr:nvSpPr>
+        <cdr:cNvPr id="2" name="Oval 1">
+          <a:extLst xmlns:a="http://schemas.openxmlformats.org/drawingml/2006/main">
+            <a:ext uri="{FF2B5EF4-FFF2-40B4-BE49-F238E27FC236}">
+              <a16:creationId xmlns:a16="http://schemas.microsoft.com/office/drawing/2014/main" id="{5B55574D-703C-DD5F-5CA4-4A92291BA94F}"/>
+            </a:ext>
+          </a:extLst>
+        </cdr:cNvPr>
+        <cdr:cNvSpPr/>
+      </cdr:nvSpPr>
+      <cdr:spPr>
+        <a:xfrm xmlns:a="http://schemas.openxmlformats.org/drawingml/2006/main">
+          <a:off x="3579260" y="928239"/>
+          <a:ext cx="196971" cy="152110"/>
+        </a:xfrm>
+        <a:prstGeom xmlns:a="http://schemas.openxmlformats.org/drawingml/2006/main" prst="ellipse">
+          <a:avLst/>
+        </a:prstGeom>
+        <a:gradFill xmlns:a="http://schemas.openxmlformats.org/drawingml/2006/main">
+          <a:gsLst>
+            <a:gs pos="100000">
+              <a:schemeClr val="bg1"/>
+            </a:gs>
+            <a:gs pos="100000">
+              <a:schemeClr val="accent1">
+                <a:tint val="50000"/>
+                <a:shade val="100000"/>
+                <a:satMod val="350000"/>
+              </a:schemeClr>
+            </a:gs>
+          </a:gsLst>
+        </a:gradFill>
+      </cdr:spPr>
+      <cdr:style>
+        <a:lnRef xmlns:a="http://schemas.openxmlformats.org/drawingml/2006/main" idx="1">
+          <a:schemeClr val="accent1"/>
+        </a:lnRef>
+        <a:fillRef xmlns:a="http://schemas.openxmlformats.org/drawingml/2006/main" idx="3">
+          <a:schemeClr val="accent1"/>
+        </a:fillRef>
+        <a:effectRef xmlns:a="http://schemas.openxmlformats.org/drawingml/2006/main" idx="2">
+          <a:schemeClr val="accent1"/>
+        </a:effectRef>
+        <a:fontRef xmlns:a="http://schemas.openxmlformats.org/drawingml/2006/main" idx="minor">
+          <a:schemeClr val="lt1"/>
+        </a:fontRef>
+      </cdr:style>
+      <cdr:txBody>
+        <a:bodyPr xmlns:a="http://schemas.openxmlformats.org/drawingml/2006/main" vertOverflow="clip"/>
+        <a:lstStyle xmlns:a="http://schemas.openxmlformats.org/drawingml/2006/main"/>
+        <a:p xmlns:a="http://schemas.openxmlformats.org/drawingml/2006/main">
+          <a:endParaRPr lang="en-US" kern="1200"/>
+        </a:p>
+      </cdr:txBody>
+    </cdr:sp>
+  </cdr:relSizeAnchor>
+</c:userShapes>
 </file>
 
 <file path=ppt/slideLayouts/slideLayout1.xml><?xml version="1.0" encoding="utf-8"?>
@@ -148,10 +4629,9 @@
           <a:lstStyle/>
           <a:p>
             <a:r>
-              <a:rPr lang="en-US" smtClean="0"/>
+              <a:rPr lang="en-US"/>
               <a:t>Click to edit Master title style</a:t>
             </a:r>
-            <a:endParaRPr lang="en-US"/>
           </a:p>
         </p:txBody>
       </p:sp>
@@ -267,10 +4747,9 @@
           </a:lstStyle>
           <a:p>
             <a:r>
-              <a:rPr lang="en-US" smtClean="0"/>
+              <a:rPr lang="en-US"/>
               <a:t>Click to edit Master subtitle style</a:t>
             </a:r>
-            <a:endParaRPr lang="en-US"/>
           </a:p>
         </p:txBody>
       </p:sp>
@@ -291,7 +4770,7 @@
           <a:p>
             <a:fld id="{5BCAD085-E8A6-8845-BD4E-CB4CCA059FC4}" type="datetimeFigureOut">
               <a:rPr lang="en-US" smtClean="0"/>
-              <a:t>1/27/13</a:t>
+              <a:t>5/21/2026</a:t>
             </a:fld>
             <a:endParaRPr lang="en-US"/>
           </a:p>
@@ -385,10 +4864,9 @@
           <a:lstStyle/>
           <a:p>
             <a:r>
-              <a:rPr lang="en-US" smtClean="0"/>
+              <a:rPr lang="en-US"/>
               <a:t>Click to edit Master title style</a:t>
             </a:r>
-            <a:endParaRPr lang="en-US"/>
           </a:p>
         </p:txBody>
       </p:sp>
@@ -409,38 +4887,37 @@
           <a:p>
             <a:pPr lvl="0"/>
             <a:r>
-              <a:rPr lang="en-US" smtClean="0"/>
+              <a:rPr lang="en-US"/>
               <a:t>Click to edit Master text styles</a:t>
             </a:r>
           </a:p>
           <a:p>
             <a:pPr lvl="1"/>
             <a:r>
-              <a:rPr lang="en-US" smtClean="0"/>
+              <a:rPr lang="en-US"/>
               <a:t>Second level</a:t>
             </a:r>
           </a:p>
           <a:p>
             <a:pPr lvl="2"/>
             <a:r>
-              <a:rPr lang="en-US" smtClean="0"/>
+              <a:rPr lang="en-US"/>
               <a:t>Third level</a:t>
             </a:r>
           </a:p>
           <a:p>
             <a:pPr lvl="3"/>
             <a:r>
-              <a:rPr lang="en-US" smtClean="0"/>
+              <a:rPr lang="en-US"/>
               <a:t>Fourth level</a:t>
             </a:r>
           </a:p>
           <a:p>
             <a:pPr lvl="4"/>
             <a:r>
-              <a:rPr lang="en-US" smtClean="0"/>
+              <a:rPr lang="en-US"/>
               <a:t>Fifth level</a:t>
             </a:r>
-            <a:endParaRPr lang="en-US"/>
           </a:p>
         </p:txBody>
       </p:sp>
@@ -461,7 +4938,7 @@
           <a:p>
             <a:fld id="{5BCAD085-E8A6-8845-BD4E-CB4CCA059FC4}" type="datetimeFigureOut">
               <a:rPr lang="en-US" smtClean="0"/>
-              <a:t>1/27/13</a:t>
+              <a:t>5/21/2026</a:t>
             </a:fld>
             <a:endParaRPr lang="en-US"/>
           </a:p>
@@ -560,10 +5037,9 @@
           <a:lstStyle/>
           <a:p>
             <a:r>
-              <a:rPr lang="en-US" smtClean="0"/>
+              <a:rPr lang="en-US"/>
               <a:t>Click to edit Master title style</a:t>
             </a:r>
-            <a:endParaRPr lang="en-US"/>
           </a:p>
         </p:txBody>
       </p:sp>
@@ -589,38 +5065,37 @@
           <a:p>
             <a:pPr lvl="0"/>
             <a:r>
-              <a:rPr lang="en-US" smtClean="0"/>
+              <a:rPr lang="en-US"/>
               <a:t>Click to edit Master text styles</a:t>
             </a:r>
           </a:p>
           <a:p>
             <a:pPr lvl="1"/>
             <a:r>
-              <a:rPr lang="en-US" smtClean="0"/>
+              <a:rPr lang="en-US"/>
               <a:t>Second level</a:t>
             </a:r>
           </a:p>
           <a:p>
             <a:pPr lvl="2"/>
             <a:r>
-              <a:rPr lang="en-US" smtClean="0"/>
+              <a:rPr lang="en-US"/>
               <a:t>Third level</a:t>
             </a:r>
           </a:p>
           <a:p>
             <a:pPr lvl="3"/>
             <a:r>
-              <a:rPr lang="en-US" smtClean="0"/>
+              <a:rPr lang="en-US"/>
               <a:t>Fourth level</a:t>
             </a:r>
           </a:p>
           <a:p>
             <a:pPr lvl="4"/>
             <a:r>
-              <a:rPr lang="en-US" smtClean="0"/>
+              <a:rPr lang="en-US"/>
               <a:t>Fifth level</a:t>
             </a:r>
-            <a:endParaRPr lang="en-US"/>
           </a:p>
         </p:txBody>
       </p:sp>
@@ -641,7 +5116,7 @@
           <a:p>
             <a:fld id="{5BCAD085-E8A6-8845-BD4E-CB4CCA059FC4}" type="datetimeFigureOut">
               <a:rPr lang="en-US" smtClean="0"/>
-              <a:t>1/27/13</a:t>
+              <a:t>5/21/2026</a:t>
             </a:fld>
             <a:endParaRPr lang="en-US"/>
           </a:p>
@@ -735,10 +5210,9 @@
           <a:lstStyle/>
           <a:p>
             <a:r>
-              <a:rPr lang="en-US" smtClean="0"/>
+              <a:rPr lang="en-US"/>
               <a:t>Click to edit Master title style</a:t>
             </a:r>
-            <a:endParaRPr lang="en-US"/>
           </a:p>
         </p:txBody>
       </p:sp>
@@ -759,38 +5233,37 @@
           <a:p>
             <a:pPr lvl="0"/>
             <a:r>
-              <a:rPr lang="en-US" smtClean="0"/>
+              <a:rPr lang="en-US"/>
               <a:t>Click to edit Master text styles</a:t>
             </a:r>
           </a:p>
           <a:p>
             <a:pPr lvl="1"/>
             <a:r>
-              <a:rPr lang="en-US" smtClean="0"/>
+              <a:rPr lang="en-US"/>
               <a:t>Second level</a:t>
             </a:r>
           </a:p>
           <a:p>
             <a:pPr lvl="2"/>
             <a:r>
-              <a:rPr lang="en-US" smtClean="0"/>
+              <a:rPr lang="en-US"/>
               <a:t>Third level</a:t>
             </a:r>
           </a:p>
           <a:p>
             <a:pPr lvl="3"/>
             <a:r>
-              <a:rPr lang="en-US" smtClean="0"/>
+              <a:rPr lang="en-US"/>
               <a:t>Fourth level</a:t>
             </a:r>
           </a:p>
           <a:p>
             <a:pPr lvl="4"/>
             <a:r>
-              <a:rPr lang="en-US" smtClean="0"/>
+              <a:rPr lang="en-US"/>
               <a:t>Fifth level</a:t>
             </a:r>
-            <a:endParaRPr lang="en-US"/>
           </a:p>
         </p:txBody>
       </p:sp>
@@ -811,7 +5284,7 @@
           <a:p>
             <a:fld id="{5BCAD085-E8A6-8845-BD4E-CB4CCA059FC4}" type="datetimeFigureOut">
               <a:rPr lang="en-US" smtClean="0"/>
-              <a:t>1/27/13</a:t>
+              <a:t>5/21/2026</a:t>
             </a:fld>
             <a:endParaRPr lang="en-US"/>
           </a:p>
@@ -914,10 +5387,9 @@
           </a:lstStyle>
           <a:p>
             <a:r>
-              <a:rPr lang="en-US" smtClean="0"/>
+              <a:rPr lang="en-US"/>
               <a:t>Click to edit Master title style</a:t>
             </a:r>
-            <a:endParaRPr lang="en-US"/>
           </a:p>
         </p:txBody>
       </p:sp>
@@ -1034,7 +5506,7 @@
           <a:p>
             <a:pPr lvl="0"/>
             <a:r>
-              <a:rPr lang="en-US" smtClean="0"/>
+              <a:rPr lang="en-US"/>
               <a:t>Click to edit Master text styles</a:t>
             </a:r>
           </a:p>
@@ -1057,7 +5529,7 @@
           <a:p>
             <a:fld id="{5BCAD085-E8A6-8845-BD4E-CB4CCA059FC4}" type="datetimeFigureOut">
               <a:rPr lang="en-US" smtClean="0"/>
-              <a:t>1/27/13</a:t>
+              <a:t>5/21/2026</a:t>
             </a:fld>
             <a:endParaRPr lang="en-US"/>
           </a:p>
@@ -1151,10 +5623,9 @@
           <a:lstStyle/>
           <a:p>
             <a:r>
-              <a:rPr lang="en-US" smtClean="0"/>
+              <a:rPr lang="en-US"/>
               <a:t>Click to edit Master title style</a:t>
             </a:r>
-            <a:endParaRPr lang="en-US"/>
           </a:p>
         </p:txBody>
       </p:sp>
@@ -1208,38 +5679,37 @@
           <a:p>
             <a:pPr lvl="0"/>
             <a:r>
-              <a:rPr lang="en-US" smtClean="0"/>
+              <a:rPr lang="en-US"/>
               <a:t>Click to edit Master text styles</a:t>
             </a:r>
           </a:p>
           <a:p>
             <a:pPr lvl="1"/>
             <a:r>
-              <a:rPr lang="en-US" smtClean="0"/>
+              <a:rPr lang="en-US"/>
               <a:t>Second level</a:t>
             </a:r>
           </a:p>
           <a:p>
             <a:pPr lvl="2"/>
             <a:r>
-              <a:rPr lang="en-US" smtClean="0"/>
+              <a:rPr lang="en-US"/>
               <a:t>Third level</a:t>
             </a:r>
           </a:p>
           <a:p>
             <a:pPr lvl="3"/>
             <a:r>
-              <a:rPr lang="en-US" smtClean="0"/>
+              <a:rPr lang="en-US"/>
               <a:t>Fourth level</a:t>
             </a:r>
           </a:p>
           <a:p>
             <a:pPr lvl="4"/>
             <a:r>
-              <a:rPr lang="en-US" smtClean="0"/>
+              <a:rPr lang="en-US"/>
               <a:t>Fifth level</a:t>
             </a:r>
-            <a:endParaRPr lang="en-US"/>
           </a:p>
         </p:txBody>
       </p:sp>
@@ -1293,38 +5763,37 @@
           <a:p>
             <a:pPr lvl="0"/>
             <a:r>
-              <a:rPr lang="en-US" smtClean="0"/>
+              <a:rPr lang="en-US"/>
               <a:t>Click to edit Master text styles</a:t>
             </a:r>
           </a:p>
           <a:p>
             <a:pPr lvl="1"/>
             <a:r>
-              <a:rPr lang="en-US" smtClean="0"/>
+              <a:rPr lang="en-US"/>
               <a:t>Second level</a:t>
             </a:r>
           </a:p>
           <a:p>
             <a:pPr lvl="2"/>
             <a:r>
-              <a:rPr lang="en-US" smtClean="0"/>
+              <a:rPr lang="en-US"/>
               <a:t>Third level</a:t>
             </a:r>
           </a:p>
           <a:p>
             <a:pPr lvl="3"/>
             <a:r>
-              <a:rPr lang="en-US" smtClean="0"/>
+              <a:rPr lang="en-US"/>
               <a:t>Fourth level</a:t>
             </a:r>
           </a:p>
           <a:p>
             <a:pPr lvl="4"/>
             <a:r>
-              <a:rPr lang="en-US" smtClean="0"/>
+              <a:rPr lang="en-US"/>
               <a:t>Fifth level</a:t>
             </a:r>
-            <a:endParaRPr lang="en-US"/>
           </a:p>
         </p:txBody>
       </p:sp>
@@ -1345,7 +5814,7 @@
           <a:p>
             <a:fld id="{5BCAD085-E8A6-8845-BD4E-CB4CCA059FC4}" type="datetimeFigureOut">
               <a:rPr lang="en-US" smtClean="0"/>
-              <a:t>1/27/13</a:t>
+              <a:t>5/21/2026</a:t>
             </a:fld>
             <a:endParaRPr lang="en-US"/>
           </a:p>
@@ -1443,10 +5912,9 @@
           </a:lstStyle>
           <a:p>
             <a:r>
-              <a:rPr lang="en-US" smtClean="0"/>
+              <a:rPr lang="en-US"/>
               <a:t>Click to edit Master title style</a:t>
             </a:r>
-            <a:endParaRPr lang="en-US"/>
           </a:p>
         </p:txBody>
       </p:sp>
@@ -1509,7 +5977,7 @@
           <a:p>
             <a:pPr lvl="0"/>
             <a:r>
-              <a:rPr lang="en-US" smtClean="0"/>
+              <a:rPr lang="en-US"/>
               <a:t>Click to edit Master text styles</a:t>
             </a:r>
           </a:p>
@@ -1565,38 +6033,37 @@
           <a:p>
             <a:pPr lvl="0"/>
             <a:r>
-              <a:rPr lang="en-US" smtClean="0"/>
+              <a:rPr lang="en-US"/>
               <a:t>Click to edit Master text styles</a:t>
             </a:r>
           </a:p>
           <a:p>
             <a:pPr lvl="1"/>
             <a:r>
-              <a:rPr lang="en-US" smtClean="0"/>
+              <a:rPr lang="en-US"/>
               <a:t>Second level</a:t>
             </a:r>
           </a:p>
           <a:p>
             <a:pPr lvl="2"/>
             <a:r>
-              <a:rPr lang="en-US" smtClean="0"/>
+              <a:rPr lang="en-US"/>
               <a:t>Third level</a:t>
             </a:r>
           </a:p>
           <a:p>
             <a:pPr lvl="3"/>
             <a:r>
-              <a:rPr lang="en-US" smtClean="0"/>
+              <a:rPr lang="en-US"/>
               <a:t>Fourth level</a:t>
             </a:r>
           </a:p>
           <a:p>
             <a:pPr lvl="4"/>
             <a:r>
-              <a:rPr lang="en-US" smtClean="0"/>
+              <a:rPr lang="en-US"/>
               <a:t>Fifth level</a:t>
             </a:r>
-            <a:endParaRPr lang="en-US"/>
           </a:p>
         </p:txBody>
       </p:sp>
@@ -1659,7 +6126,7 @@
           <a:p>
             <a:pPr lvl="0"/>
             <a:r>
-              <a:rPr lang="en-US" smtClean="0"/>
+              <a:rPr lang="en-US"/>
               <a:t>Click to edit Master text styles</a:t>
             </a:r>
           </a:p>
@@ -1715,38 +6182,37 @@
           <a:p>
             <a:pPr lvl="0"/>
             <a:r>
-              <a:rPr lang="en-US" smtClean="0"/>
+              <a:rPr lang="en-US"/>
               <a:t>Click to edit Master text styles</a:t>
             </a:r>
           </a:p>
           <a:p>
             <a:pPr lvl="1"/>
             <a:r>
-              <a:rPr lang="en-US" smtClean="0"/>
+              <a:rPr lang="en-US"/>
               <a:t>Second level</a:t>
             </a:r>
           </a:p>
           <a:p>
             <a:pPr lvl="2"/>
             <a:r>
-              <a:rPr lang="en-US" smtClean="0"/>
+              <a:rPr lang="en-US"/>
               <a:t>Third level</a:t>
             </a:r>
           </a:p>
           <a:p>
             <a:pPr lvl="3"/>
             <a:r>
-              <a:rPr lang="en-US" smtClean="0"/>
+              <a:rPr lang="en-US"/>
               <a:t>Fourth level</a:t>
             </a:r>
           </a:p>
           <a:p>
             <a:pPr lvl="4"/>
             <a:r>
-              <a:rPr lang="en-US" smtClean="0"/>
+              <a:rPr lang="en-US"/>
               <a:t>Fifth level</a:t>
             </a:r>
-            <a:endParaRPr lang="en-US"/>
           </a:p>
         </p:txBody>
       </p:sp>
@@ -1767,7 +6233,7 @@
           <a:p>
             <a:fld id="{5BCAD085-E8A6-8845-BD4E-CB4CCA059FC4}" type="datetimeFigureOut">
               <a:rPr lang="en-US" smtClean="0"/>
-              <a:t>1/27/13</a:t>
+              <a:t>5/21/2026</a:t>
             </a:fld>
             <a:endParaRPr lang="en-US"/>
           </a:p>
@@ -1861,10 +6327,9 @@
           <a:lstStyle/>
           <a:p>
             <a:r>
-              <a:rPr lang="en-US" smtClean="0"/>
+              <a:rPr lang="en-US"/>
               <a:t>Click to edit Master title style</a:t>
             </a:r>
-            <a:endParaRPr lang="en-US"/>
           </a:p>
         </p:txBody>
       </p:sp>
@@ -1885,7 +6350,7 @@
           <a:p>
             <a:fld id="{5BCAD085-E8A6-8845-BD4E-CB4CCA059FC4}" type="datetimeFigureOut">
               <a:rPr lang="en-US" smtClean="0"/>
-              <a:t>1/27/13</a:t>
+              <a:t>5/21/2026</a:t>
             </a:fld>
             <a:endParaRPr lang="en-US"/>
           </a:p>
@@ -1980,7 +6445,7 @@
           <a:p>
             <a:fld id="{5BCAD085-E8A6-8845-BD4E-CB4CCA059FC4}" type="datetimeFigureOut">
               <a:rPr lang="en-US" smtClean="0"/>
-              <a:t>1/27/13</a:t>
+              <a:t>5/21/2026</a:t>
             </a:fld>
             <a:endParaRPr lang="en-US"/>
           </a:p>
@@ -2083,10 +6548,9 @@
           </a:lstStyle>
           <a:p>
             <a:r>
-              <a:rPr lang="en-US" smtClean="0"/>
+              <a:rPr lang="en-US"/>
               <a:t>Click to edit Master title style</a:t>
             </a:r>
-            <a:endParaRPr lang="en-US"/>
           </a:p>
         </p:txBody>
       </p:sp>
@@ -2140,38 +6604,37 @@
           <a:p>
             <a:pPr lvl="0"/>
             <a:r>
-              <a:rPr lang="en-US" smtClean="0"/>
+              <a:rPr lang="en-US"/>
               <a:t>Click to edit Master text styles</a:t>
             </a:r>
           </a:p>
           <a:p>
             <a:pPr lvl="1"/>
             <a:r>
-              <a:rPr lang="en-US" smtClean="0"/>
+              <a:rPr lang="en-US"/>
               <a:t>Second level</a:t>
             </a:r>
           </a:p>
           <a:p>
             <a:pPr lvl="2"/>
             <a:r>
-              <a:rPr lang="en-US" smtClean="0"/>
+              <a:rPr lang="en-US"/>
               <a:t>Third level</a:t>
             </a:r>
           </a:p>
           <a:p>
             <a:pPr lvl="3"/>
             <a:r>
-              <a:rPr lang="en-US" smtClean="0"/>
+              <a:rPr lang="en-US"/>
               <a:t>Fourth level</a:t>
             </a:r>
           </a:p>
           <a:p>
             <a:pPr lvl="4"/>
             <a:r>
-              <a:rPr lang="en-US" smtClean="0"/>
+              <a:rPr lang="en-US"/>
               <a:t>Fifth level</a:t>
             </a:r>
-            <a:endParaRPr lang="en-US"/>
           </a:p>
         </p:txBody>
       </p:sp>
@@ -2234,7 +6697,7 @@
           <a:p>
             <a:pPr lvl="0"/>
             <a:r>
-              <a:rPr lang="en-US" smtClean="0"/>
+              <a:rPr lang="en-US"/>
               <a:t>Click to edit Master text styles</a:t>
             </a:r>
           </a:p>
@@ -2257,7 +6720,7 @@
           <a:p>
             <a:fld id="{5BCAD085-E8A6-8845-BD4E-CB4CCA059FC4}" type="datetimeFigureOut">
               <a:rPr lang="en-US" smtClean="0"/>
-              <a:t>1/27/13</a:t>
+              <a:t>5/21/2026</a:t>
             </a:fld>
             <a:endParaRPr lang="en-US"/>
           </a:p>
@@ -2360,10 +6823,9 @@
           </a:lstStyle>
           <a:p>
             <a:r>
-              <a:rPr lang="en-US" smtClean="0"/>
+              <a:rPr lang="en-US"/>
               <a:t>Click to edit Master title style</a:t>
             </a:r>
-            <a:endParaRPr lang="en-US"/>
           </a:p>
         </p:txBody>
       </p:sp>
@@ -2487,7 +6949,7 @@
           <a:p>
             <a:pPr lvl="0"/>
             <a:r>
-              <a:rPr lang="en-US" smtClean="0"/>
+              <a:rPr lang="en-US"/>
               <a:t>Click to edit Master text styles</a:t>
             </a:r>
           </a:p>
@@ -2510,7 +6972,7 @@
           <a:p>
             <a:fld id="{5BCAD085-E8A6-8845-BD4E-CB4CCA059FC4}" type="datetimeFigureOut">
               <a:rPr lang="en-US" smtClean="0"/>
-              <a:t>1/27/13</a:t>
+              <a:t>5/21/2026</a:t>
             </a:fld>
             <a:endParaRPr lang="en-US"/>
           </a:p>
@@ -2619,10 +7081,9 @@
           <a:lstStyle/>
           <a:p>
             <a:r>
-              <a:rPr lang="en-US" smtClean="0"/>
+              <a:rPr lang="en-US"/>
               <a:t>Click to edit Master title style</a:t>
             </a:r>
-            <a:endParaRPr lang="en-US"/>
           </a:p>
         </p:txBody>
       </p:sp>
@@ -2653,38 +7114,37 @@
           <a:p>
             <a:pPr lvl="0"/>
             <a:r>
-              <a:rPr lang="en-US" smtClean="0"/>
+              <a:rPr lang="en-US"/>
               <a:t>Click to edit Master text styles</a:t>
             </a:r>
           </a:p>
           <a:p>
             <a:pPr lvl="1"/>
             <a:r>
-              <a:rPr lang="en-US" smtClean="0"/>
+              <a:rPr lang="en-US"/>
               <a:t>Second level</a:t>
             </a:r>
           </a:p>
           <a:p>
             <a:pPr lvl="2"/>
             <a:r>
-              <a:rPr lang="en-US" smtClean="0"/>
+              <a:rPr lang="en-US"/>
               <a:t>Third level</a:t>
             </a:r>
           </a:p>
           <a:p>
             <a:pPr lvl="3"/>
             <a:r>
-              <a:rPr lang="en-US" smtClean="0"/>
+              <a:rPr lang="en-US"/>
               <a:t>Fourth level</a:t>
             </a:r>
           </a:p>
           <a:p>
             <a:pPr lvl="4"/>
             <a:r>
-              <a:rPr lang="en-US" smtClean="0"/>
+              <a:rPr lang="en-US"/>
               <a:t>Fifth level</a:t>
             </a:r>
-            <a:endParaRPr lang="en-US"/>
           </a:p>
         </p:txBody>
       </p:sp>
@@ -2723,7 +7183,7 @@
           <a:p>
             <a:fld id="{5BCAD085-E8A6-8845-BD4E-CB4CCA059FC4}" type="datetimeFigureOut">
               <a:rPr lang="en-US" smtClean="0"/>
-              <a:t>1/27/13</a:t>
+              <a:t>5/21/2026</a:t>
             </a:fld>
             <a:endParaRPr lang="en-US"/>
           </a:p>
@@ -3082,7 +7542,7 @@
 </file>
 
 <file path=ppt/slides/slide1.xml><?xml version="1.0" encoding="utf-8"?>
-<p:sld xmlns:a="http://schemas.openxmlformats.org/drawingml/2006/main" xmlns:p="http://schemas.openxmlformats.org/presentationml/2006/main" xmlns:r="http://schemas.openxmlformats.org/officeDocument/2006/relationships">
+<p:sld xmlns:a="http://schemas.openxmlformats.org/drawingml/2006/main" xmlns:r="http://schemas.openxmlformats.org/officeDocument/2006/relationships" xmlns:p="http://schemas.openxmlformats.org/presentationml/2006/main">
   <p:cSld>
     <p:bg>
       <p:bgPr>
@@ -3098,7 +7558,14 @@
         <p:cNvGrpSpPr/>
         <p:nvPr/>
       </p:nvGrpSpPr>
-      <p:grpSpPr/>
+      <p:grpSpPr>
+        <a:xfrm>
+          <a:off x="0" y="0"/>
+          <a:ext cx="0" cy="0"/>
+          <a:chOff x="0" y="0"/>
+          <a:chExt cx="0" cy="0"/>
+        </a:xfrm>
+      </p:grpSpPr>
       <p:sp>
         <p:nvSpPr>
           <p:cNvPr id="2" name="Rectangle 1"/>
@@ -3139,6 +7606,7 @@
           <a:lstStyle/>
           <a:p>
             <a:pPr algn="ctr"/>
+            <a:endParaRPr/>
           </a:p>
         </p:txBody>
       </p:sp>
@@ -3182,6 +7650,7 @@
           <a:lstStyle/>
           <a:p>
             <a:pPr algn="ctr"/>
+            <a:endParaRPr/>
           </a:p>
         </p:txBody>
       </p:sp>
@@ -3193,7 +7662,7 @@
         </p:nvSpPr>
         <p:spPr>
           <a:xfrm>
-            <a:off x="457200" y="1005840"/>
+            <a:off x="667512" y="1938528"/>
             <a:ext cx="11274552" cy="960120"/>
           </a:xfrm>
           <a:prstGeom prst="rect">
@@ -3209,7 +7678,7 @@
           <a:p>
             <a:pPr algn="ctr"/>
             <a:r>
-              <a:rPr sz="5400" b="1" i="0">
+              <a:rPr sz="5400" b="1" i="0" dirty="0">
                 <a:solidFill>
                   <a:srgbClr val="1A1A1A"/>
                 </a:solidFill>
@@ -3228,8 +7697,8 @@
         </p:nvSpPr>
         <p:spPr>
           <a:xfrm>
-            <a:off x="457200" y="1965960"/>
-            <a:ext cx="11274552" cy="457200"/>
+            <a:off x="457073" y="2962656"/>
+            <a:ext cx="11274552" cy="292388"/>
           </a:xfrm>
           <a:prstGeom prst="rect">
             <a:avLst/>
@@ -3244,10 +7713,7 @@
           <a:p>
             <a:pPr algn="ctr"/>
             <a:r>
-              <a:rPr sz="1300" b="0" i="0">
-                <a:solidFill>
-                  <a:srgbClr val="555555"/>
-                </a:solidFill>
+              <a:rPr sz="1300" b="0" i="0" dirty="0">
                 <a:latin typeface="Calibri"/>
               </a:rPr>
               <a:t>C L O T H I N G</a:t>
@@ -3263,7 +7729,7 @@
         </p:nvSpPr>
         <p:spPr>
           <a:xfrm>
-            <a:off x="4041648" y="2560320"/>
+            <a:off x="4041648" y="3499866"/>
             <a:ext cx="4114800" cy="50292"/>
           </a:xfrm>
           <a:prstGeom prst="rect">
@@ -3295,6 +7761,7 @@
           <a:lstStyle/>
           <a:p>
             <a:pPr algn="ctr"/>
+            <a:endParaRPr/>
           </a:p>
         </p:txBody>
       </p:sp>
@@ -3306,7 +7773,7 @@
         </p:nvSpPr>
         <p:spPr>
           <a:xfrm>
-            <a:off x="457200" y="2697480"/>
+            <a:off x="557784" y="3698748"/>
             <a:ext cx="11274552" cy="777240"/>
           </a:xfrm>
           <a:prstGeom prst="rect">
@@ -3322,7 +7789,7 @@
           <a:p>
             <a:pPr algn="ctr"/>
             <a:r>
-              <a:rPr sz="3600" b="0" i="0">
+              <a:rPr sz="3600" b="0" i="0" dirty="0">
                 <a:solidFill>
                   <a:srgbClr val="1A1A1A"/>
                 </a:solidFill>
@@ -3341,8 +7808,8 @@
         </p:nvSpPr>
         <p:spPr>
           <a:xfrm>
-            <a:off x="457200" y="3520440"/>
-            <a:ext cx="11274552" cy="502920"/>
+            <a:off x="557784" y="4599432"/>
+            <a:ext cx="11274552" cy="384721"/>
           </a:xfrm>
           <a:prstGeom prst="rect">
             <a:avLst/>
@@ -3357,10 +7824,7 @@
           <a:p>
             <a:pPr algn="ctr"/>
             <a:r>
-              <a:rPr sz="1900" b="0" i="0">
-                <a:solidFill>
-                  <a:srgbClr val="555555"/>
-                </a:solidFill>
+              <a:rPr sz="1900" b="0" i="0" dirty="0">
                 <a:latin typeface="Calibri"/>
               </a:rPr>
               <a:t>Customer Service Team  ·  Case Study 1</a:t>
@@ -3370,14 +7834,14 @@
       </p:sp>
       <p:sp>
         <p:nvSpPr>
-          <p:cNvPr id="9" name="TextBox 8"/>
+          <p:cNvPr id="10" name="TextBox 9"/>
           <p:cNvSpPr txBox="1"/>
           <p:nvPr/>
         </p:nvSpPr>
         <p:spPr>
           <a:xfrm>
-            <a:off x="457200" y="182880"/>
-            <a:ext cx="11274552" cy="640080"/>
+            <a:off x="457136" y="6126480"/>
+            <a:ext cx="11274552" cy="276999"/>
           </a:xfrm>
           <a:prstGeom prst="rect">
             <a:avLst/>
@@ -3392,52 +7856,53 @@
           <a:p>
             <a:pPr algn="ctr"/>
             <a:r>
-              <a:rPr sz="1100" b="0" i="1">
-                <a:solidFill>
-                  <a:srgbClr val="BDBDBD"/>
-                </a:solidFill>
+              <a:rPr sz="1200" b="0" i="0" dirty="0">
                 <a:latin typeface="Calibri"/>
               </a:rPr>
-              <a:t>[ Add logo above title ]</a:t>
+              <a:t>T. Schlichtmann  |  GB884  |  May 202</a:t>
             </a:r>
-          </a:p>
-        </p:txBody>
-      </p:sp>
-      <p:sp>
-        <p:nvSpPr>
-          <p:cNvPr id="10" name="TextBox 9"/>
-          <p:cNvSpPr txBox="1"/>
+            <a:r>
+              <a:rPr lang="en-US" sz="1200" b="0" i="0" dirty="0">
+                <a:latin typeface="Calibri"/>
+              </a:rPr>
+              <a:t>6</a:t>
+            </a:r>
+            <a:endParaRPr sz="1200" b="0" i="0" dirty="0">
+              <a:latin typeface="Calibri"/>
+            </a:endParaRPr>
+          </a:p>
+        </p:txBody>
+      </p:sp>
+      <p:pic>
+        <p:nvPicPr>
+          <p:cNvPr id="12" name="Picture 11">
+            <a:extLst>
+              <a:ext uri="{FF2B5EF4-FFF2-40B4-BE49-F238E27FC236}">
+                <a16:creationId xmlns:a16="http://schemas.microsoft.com/office/drawing/2014/main" id="{86573F06-2EA7-B363-13B2-11D7EDCFD428}"/>
+              </a:ext>
+            </a:extLst>
+          </p:cNvPr>
+          <p:cNvPicPr>
+            <a:picLocks noChangeAspect="1"/>
+          </p:cNvPicPr>
           <p:nvPr/>
-        </p:nvSpPr>
+        </p:nvPicPr>
+        <p:blipFill>
+          <a:blip r:embed="rId2"/>
+          <a:stretch>
+            <a:fillRect/>
+          </a:stretch>
+        </p:blipFill>
         <p:spPr>
           <a:xfrm>
-            <a:off x="457200" y="6126480"/>
-            <a:ext cx="11274552" cy="411480"/>
+            <a:off x="4590288" y="198222"/>
+            <a:ext cx="3428999" cy="1584857"/>
           </a:xfrm>
           <a:prstGeom prst="rect">
             <a:avLst/>
           </a:prstGeom>
-          <a:noFill/>
         </p:spPr>
-        <p:txBody>
-          <a:bodyPr wrap="square">
-            <a:spAutoFit/>
-          </a:bodyPr>
-          <a:lstStyle/>
-          <a:p>
-            <a:pPr algn="ctr"/>
-            <a:r>
-              <a:rPr sz="1200" b="0" i="0">
-                <a:solidFill>
-                  <a:srgbClr val="BDBDBD"/>
-                </a:solidFill>
-                <a:latin typeface="Calibri"/>
-              </a:rPr>
-              <a:t>T. Schlichtmann  |  GB884  |  May 2025</a:t>
-            </a:r>
-          </a:p>
-        </p:txBody>
-      </p:sp>
+      </p:pic>
     </p:spTree>
   </p:cSld>
   <p:clrMapOvr>
@@ -3447,7 +7912,7 @@
 </file>
 
 <file path=ppt/slides/slide2.xml><?xml version="1.0" encoding="utf-8"?>
-<p:sld xmlns:a="http://schemas.openxmlformats.org/drawingml/2006/main" xmlns:p="http://schemas.openxmlformats.org/presentationml/2006/main" xmlns:r="http://schemas.openxmlformats.org/officeDocument/2006/relationships">
+<p:sld xmlns:a="http://schemas.openxmlformats.org/drawingml/2006/main" xmlns:r="http://schemas.openxmlformats.org/officeDocument/2006/relationships" xmlns:p="http://schemas.openxmlformats.org/presentationml/2006/main">
   <p:cSld>
     <p:bg>
       <p:bgPr>
@@ -3463,7 +7928,14 @@
         <p:cNvGrpSpPr/>
         <p:nvPr/>
       </p:nvGrpSpPr>
-      <p:grpSpPr/>
+      <p:grpSpPr>
+        <a:xfrm>
+          <a:off x="0" y="0"/>
+          <a:ext cx="0" cy="0"/>
+          <a:chOff x="0" y="0"/>
+          <a:chExt cx="0" cy="0"/>
+        </a:xfrm>
+      </p:grpSpPr>
       <p:sp>
         <p:nvSpPr>
           <p:cNvPr id="2" name="Rectangle 1"/>
@@ -3504,6 +7976,7 @@
           <a:lstStyle/>
           <a:p>
             <a:pPr algn="ctr"/>
+            <a:endParaRPr/>
           </a:p>
         </p:txBody>
       </p:sp>
@@ -3531,7 +8004,7 @@
           <a:p>
             <a:pPr algn="l"/>
             <a:r>
-              <a:rPr sz="2500" b="1" i="0">
+              <a:rPr sz="2500" b="1" i="0" dirty="0">
                 <a:solidFill>
                   <a:srgbClr val="1A1A1A"/>
                 </a:solidFill>
@@ -3582,19 +8055,20 @@
           <a:lstStyle/>
           <a:p>
             <a:pPr algn="ctr"/>
-          </a:p>
-        </p:txBody>
-      </p:sp>
-      <p:sp>
-        <p:nvSpPr>
-          <p:cNvPr id="5" name="TextBox 4"/>
+            <a:endParaRPr/>
+          </a:p>
+        </p:txBody>
+      </p:sp>
+      <p:sp>
+        <p:nvSpPr>
+          <p:cNvPr id="12" name="TextBox 11"/>
           <p:cNvSpPr txBox="1"/>
           <p:nvPr/>
         </p:nvSpPr>
         <p:spPr>
           <a:xfrm>
-            <a:off x="457200" y="987552"/>
-            <a:ext cx="5943600" cy="347472"/>
+            <a:off x="457200" y="3291840"/>
+            <a:ext cx="5943600" cy="230832"/>
           </a:xfrm>
           <a:prstGeom prst="rect">
             <a:avLst/>
@@ -3609,271 +8083,7 @@
           <a:p>
             <a:pPr algn="l"/>
             <a:r>
-              <a:rPr sz="1300" b="1" i="0">
-                <a:solidFill>
-                  <a:srgbClr val="555555"/>
-                </a:solidFill>
-                <a:latin typeface="Calibri"/>
-              </a:rPr>
-              <a:t>Return Rate Comparison</a:t>
-            </a:r>
-          </a:p>
-        </p:txBody>
-      </p:sp>
-      <p:sp>
-        <p:nvSpPr>
-          <p:cNvPr id="6" name="TextBox 5"/>
-          <p:cNvSpPr txBox="1"/>
-          <p:nvPr/>
-        </p:nvSpPr>
-        <p:spPr>
-          <a:xfrm>
-            <a:off x="457200" y="1389888"/>
-            <a:ext cx="2560320" cy="292608"/>
-          </a:xfrm>
-          <a:prstGeom prst="rect">
-            <a:avLst/>
-          </a:prstGeom>
-          <a:noFill/>
-        </p:spPr>
-        <p:txBody>
-          <a:bodyPr wrap="square">
-            <a:spAutoFit/>
-          </a:bodyPr>
-          <a:lstStyle/>
-          <a:p>
-            <a:pPr algn="l"/>
-            <a:r>
-              <a:rPr sz="1200" b="1" i="0">
-                <a:solidFill>
-                  <a:srgbClr val="1A1A1A"/>
-                </a:solidFill>
-                <a:latin typeface="Calibri"/>
-              </a:rPr>
-              <a:t>Urban Hamster</a:t>
-            </a:r>
-          </a:p>
-        </p:txBody>
-      </p:sp>
-      <p:sp>
-        <p:nvSpPr>
-          <p:cNvPr id="7" name="Rectangle 6"/>
-          <p:cNvSpPr/>
-          <p:nvPr/>
-        </p:nvSpPr>
-        <p:spPr>
-          <a:xfrm>
-            <a:off x="457200" y="1691640"/>
-            <a:ext cx="2697479" cy="475488"/>
-          </a:xfrm>
-          <a:prstGeom prst="rect">
-            <a:avLst/>
-          </a:prstGeom>
-          <a:solidFill>
-            <a:srgbClr val="E91E8C"/>
-          </a:solidFill>
-          <a:ln>
-            <a:noFill/>
-          </a:ln>
-        </p:spPr>
-        <p:style>
-          <a:lnRef idx="1">
-            <a:schemeClr val="accent1"/>
-          </a:lnRef>
-          <a:fillRef idx="3">
-            <a:schemeClr val="accent1"/>
-          </a:fillRef>
-          <a:effectRef idx="2">
-            <a:schemeClr val="accent1"/>
-          </a:effectRef>
-          <a:fontRef idx="minor">
-            <a:schemeClr val="lt1"/>
-          </a:fontRef>
-        </p:style>
-        <p:txBody>
-          <a:bodyPr rtlCol="0" anchor="ctr"/>
-          <a:lstStyle/>
-          <a:p>
-            <a:pPr algn="ctr"/>
-          </a:p>
-        </p:txBody>
-      </p:sp>
-      <p:sp>
-        <p:nvSpPr>
-          <p:cNvPr id="8" name="TextBox 7"/>
-          <p:cNvSpPr txBox="1"/>
-          <p:nvPr/>
-        </p:nvSpPr>
-        <p:spPr>
-          <a:xfrm>
-            <a:off x="3264408" y="1691640"/>
-            <a:ext cx="1005840" cy="475488"/>
-          </a:xfrm>
-          <a:prstGeom prst="rect">
-            <a:avLst/>
-          </a:prstGeom>
-          <a:noFill/>
-        </p:spPr>
-        <p:txBody>
-          <a:bodyPr wrap="square">
-            <a:spAutoFit/>
-          </a:bodyPr>
-          <a:lstStyle/>
-          <a:p>
-            <a:pPr algn="l"/>
-            <a:r>
-              <a:rPr sz="2000" b="1" i="0">
-                <a:solidFill>
-                  <a:srgbClr val="E91E8C"/>
-                </a:solidFill>
-                <a:latin typeface="Calibri"/>
-              </a:rPr>
-              <a:t>10.0%</a:t>
-            </a:r>
-          </a:p>
-        </p:txBody>
-      </p:sp>
-      <p:sp>
-        <p:nvSpPr>
-          <p:cNvPr id="9" name="TextBox 8"/>
-          <p:cNvSpPr txBox="1"/>
-          <p:nvPr/>
-        </p:nvSpPr>
-        <p:spPr>
-          <a:xfrm>
-            <a:off x="457200" y="2350008"/>
-            <a:ext cx="3200400" cy="292608"/>
-          </a:xfrm>
-          <a:prstGeom prst="rect">
-            <a:avLst/>
-          </a:prstGeom>
-          <a:noFill/>
-        </p:spPr>
-        <p:txBody>
-          <a:bodyPr wrap="square">
-            <a:spAutoFit/>
-          </a:bodyPr>
-          <a:lstStyle/>
-          <a:p>
-            <a:pPr algn="l"/>
-            <a:r>
-              <a:rPr sz="1200" b="1" i="0">
-                <a:solidFill>
-                  <a:srgbClr val="1A1A1A"/>
-                </a:solidFill>
-                <a:latin typeface="Calibri"/>
-              </a:rPr>
-              <a:t>Industry Average (Online Retail)</a:t>
-            </a:r>
-          </a:p>
-        </p:txBody>
-      </p:sp>
-      <p:sp>
-        <p:nvSpPr>
-          <p:cNvPr id="10" name="Rectangle 9"/>
-          <p:cNvSpPr/>
-          <p:nvPr/>
-        </p:nvSpPr>
-        <p:spPr>
-          <a:xfrm>
-            <a:off x="457200" y="2651760"/>
-            <a:ext cx="5206136" cy="475488"/>
-          </a:xfrm>
-          <a:prstGeom prst="rect">
-            <a:avLst/>
-          </a:prstGeom>
-          <a:solidFill>
-            <a:srgbClr val="BDBDBD"/>
-          </a:solidFill>
-          <a:ln>
-            <a:noFill/>
-          </a:ln>
-        </p:spPr>
-        <p:style>
-          <a:lnRef idx="1">
-            <a:schemeClr val="accent1"/>
-          </a:lnRef>
-          <a:fillRef idx="3">
-            <a:schemeClr val="accent1"/>
-          </a:fillRef>
-          <a:effectRef idx="2">
-            <a:schemeClr val="accent1"/>
-          </a:effectRef>
-          <a:fontRef idx="minor">
-            <a:schemeClr val="lt1"/>
-          </a:fontRef>
-        </p:style>
-        <p:txBody>
-          <a:bodyPr rtlCol="0" anchor="ctr"/>
-          <a:lstStyle/>
-          <a:p>
-            <a:pPr algn="ctr"/>
-          </a:p>
-        </p:txBody>
-      </p:sp>
-      <p:sp>
-        <p:nvSpPr>
-          <p:cNvPr id="11" name="TextBox 10"/>
-          <p:cNvSpPr txBox="1"/>
-          <p:nvPr/>
-        </p:nvSpPr>
-        <p:spPr>
-          <a:xfrm>
-            <a:off x="5773064" y="2651760"/>
-            <a:ext cx="1097280" cy="475488"/>
-          </a:xfrm>
-          <a:prstGeom prst="rect">
-            <a:avLst/>
-          </a:prstGeom>
-          <a:noFill/>
-        </p:spPr>
-        <p:txBody>
-          <a:bodyPr wrap="square">
-            <a:spAutoFit/>
-          </a:bodyPr>
-          <a:lstStyle/>
-          <a:p>
-            <a:pPr algn="l"/>
-            <a:r>
-              <a:rPr sz="2000" b="1" i="0">
-                <a:solidFill>
-                  <a:srgbClr val="555555"/>
-                </a:solidFill>
-                <a:latin typeface="Calibri"/>
-              </a:rPr>
-              <a:t>19.3%</a:t>
-            </a:r>
-          </a:p>
-        </p:txBody>
-      </p:sp>
-      <p:sp>
-        <p:nvSpPr>
-          <p:cNvPr id="12" name="TextBox 11"/>
-          <p:cNvSpPr txBox="1"/>
-          <p:nvPr/>
-        </p:nvSpPr>
-        <p:spPr>
-          <a:xfrm>
-            <a:off x="457200" y="3291840"/>
-            <a:ext cx="5943600" cy="256032"/>
-          </a:xfrm>
-          <a:prstGeom prst="rect">
-            <a:avLst/>
-          </a:prstGeom>
-          <a:noFill/>
-        </p:spPr>
-        <p:txBody>
-          <a:bodyPr wrap="square">
-            <a:spAutoFit/>
-          </a:bodyPr>
-          <a:lstStyle/>
-          <a:p>
-            <a:pPr algn="l"/>
-            <a:r>
-              <a:rPr sz="900" b="0" i="1">
-                <a:solidFill>
-                  <a:srgbClr val="BDBDBD"/>
-                </a:solidFill>
+              <a:rPr sz="900" b="0" i="1" dirty="0">
                 <a:latin typeface="Calibri"/>
               </a:rPr>
               <a:t>Source: National Retail Federation, 2025</a:t>
@@ -3889,7 +8099,7 @@
         </p:nvSpPr>
         <p:spPr>
           <a:xfrm>
-            <a:off x="457200" y="3703320"/>
+            <a:off x="457200" y="3572690"/>
             <a:ext cx="5669280" cy="45720"/>
           </a:xfrm>
           <a:prstGeom prst="rect">
@@ -3921,19 +8131,20 @@
           <a:lstStyle/>
           <a:p>
             <a:pPr algn="ctr"/>
-          </a:p>
-        </p:txBody>
-      </p:sp>
-      <p:sp>
-        <p:nvSpPr>
-          <p:cNvPr id="14" name="TextBox 13"/>
+            <a:endParaRPr/>
+          </a:p>
+        </p:txBody>
+      </p:sp>
+      <p:sp>
+        <p:nvSpPr>
+          <p:cNvPr id="17" name="TextBox 16"/>
           <p:cNvSpPr txBox="1"/>
           <p:nvPr/>
         </p:nvSpPr>
         <p:spPr>
           <a:xfrm>
-            <a:off x="457200" y="3822191"/>
-            <a:ext cx="5669280" cy="347472"/>
+            <a:off x="457200" y="6355080"/>
+            <a:ext cx="5669280" cy="261610"/>
           </a:xfrm>
           <a:prstGeom prst="rect">
             <a:avLst/>
@@ -3948,115 +8159,7 @@
           <a:p>
             <a:pPr algn="l"/>
             <a:r>
-              <a:rPr sz="1200" b="1" i="0">
-                <a:solidFill>
-                  <a:srgbClr val="555555"/>
-                </a:solidFill>
-                <a:latin typeface="Calibri"/>
-              </a:rPr>
-              <a:t>Return Rate Trend</a:t>
-            </a:r>
-          </a:p>
-        </p:txBody>
-      </p:sp>
-      <p:sp>
-        <p:nvSpPr>
-          <p:cNvPr id="15" name="TextBox 14"/>
-          <p:cNvSpPr txBox="1"/>
-          <p:nvPr/>
-        </p:nvSpPr>
-        <p:spPr>
-          <a:xfrm>
-            <a:off x="457200" y="4187952"/>
-            <a:ext cx="5669280" cy="384048"/>
-          </a:xfrm>
-          <a:prstGeom prst="rect">
-            <a:avLst/>
-          </a:prstGeom>
-          <a:noFill/>
-        </p:spPr>
-        <p:txBody>
-          <a:bodyPr wrap="square">
-            <a:spAutoFit/>
-          </a:bodyPr>
-          <a:lstStyle/>
-          <a:p>
-            <a:pPr algn="l"/>
-            <a:r>
-              <a:rPr sz="1400" b="1" i="0">
-                <a:solidFill>
-                  <a:srgbClr val="1A1A1A"/>
-                </a:solidFill>
-                <a:latin typeface="Calibri"/>
-              </a:rPr>
-              <a:t>9.2%  →  9.5%  →  9.9%  →  9.8%  →  10.3%</a:t>
-            </a:r>
-          </a:p>
-        </p:txBody>
-      </p:sp>
-      <p:sp>
-        <p:nvSpPr>
-          <p:cNvPr id="16" name="TextBox 15"/>
-          <p:cNvSpPr txBox="1"/>
-          <p:nvPr/>
-        </p:nvSpPr>
-        <p:spPr>
-          <a:xfrm>
-            <a:off x="457200" y="4572000"/>
-            <a:ext cx="5669280" cy="320040"/>
-          </a:xfrm>
-          <a:prstGeom prst="rect">
-            <a:avLst/>
-          </a:prstGeom>
-          <a:noFill/>
-        </p:spPr>
-        <p:txBody>
-          <a:bodyPr wrap="square">
-            <a:spAutoFit/>
-          </a:bodyPr>
-          <a:lstStyle/>
-          <a:p>
-            <a:pPr algn="l"/>
-            <a:r>
-              <a:rPr sz="1000" b="0" i="0">
-                <a:solidFill>
-                  <a:srgbClr val="BDBDBD"/>
-                </a:solidFill>
-                <a:latin typeface="Calibri"/>
-              </a:rPr>
-              <a:t>2019         2020         2021         2022         2023</a:t>
-            </a:r>
-          </a:p>
-        </p:txBody>
-      </p:sp>
-      <p:sp>
-        <p:nvSpPr>
-          <p:cNvPr id="17" name="TextBox 16"/>
-          <p:cNvSpPr txBox="1"/>
-          <p:nvPr/>
-        </p:nvSpPr>
-        <p:spPr>
-          <a:xfrm>
-            <a:off x="457200" y="4956048"/>
-            <a:ext cx="5669280" cy="347472"/>
-          </a:xfrm>
-          <a:prstGeom prst="rect">
-            <a:avLst/>
-          </a:prstGeom>
-          <a:noFill/>
-        </p:spPr>
-        <p:txBody>
-          <a:bodyPr wrap="square">
-            <a:spAutoFit/>
-          </a:bodyPr>
-          <a:lstStyle/>
-          <a:p>
-            <a:pPr algn="l"/>
-            <a:r>
-              <a:rPr sz="1100" b="0" i="1">
-                <a:solidFill>
-                  <a:srgbClr val="555555"/>
-                </a:solidFill>
+              <a:rPr sz="1100" b="0" i="1" dirty="0">
                 <a:latin typeface="Calibri"/>
               </a:rPr>
               <a:t>↑  Steady climb — confirms Sarah's concern about an uptick</a:t>
@@ -4104,6 +8207,7 @@
           <a:lstStyle/>
           <a:p>
             <a:pPr algn="ctr"/>
+            <a:endParaRPr/>
           </a:p>
         </p:txBody>
       </p:sp>
@@ -4147,6 +8251,7 @@
           <a:lstStyle/>
           <a:p>
             <a:pPr algn="ctr"/>
+            <a:endParaRPr/>
           </a:p>
         </p:txBody>
       </p:sp>
@@ -4158,8 +8263,8 @@
         </p:nvSpPr>
         <p:spPr>
           <a:xfrm>
-            <a:off x="6812280" y="1051560"/>
-            <a:ext cx="4754880" cy="384048"/>
+            <a:off x="6812280" y="1110996"/>
+            <a:ext cx="4754880" cy="307777"/>
           </a:xfrm>
           <a:prstGeom prst="rect">
             <a:avLst/>
@@ -4174,10 +8279,7 @@
           <a:p>
             <a:pPr algn="l"/>
             <a:r>
-              <a:rPr sz="1400" b="1" i="0">
-                <a:solidFill>
-                  <a:srgbClr val="E91E8C"/>
-                </a:solidFill>
+              <a:rPr sz="1400" b="1" i="0" dirty="0">
                 <a:latin typeface="Calibri"/>
               </a:rPr>
               <a:t>What This Means</a:t>
@@ -4194,7 +8296,7 @@
         <p:spPr>
           <a:xfrm>
             <a:off x="6812280" y="1508760"/>
-            <a:ext cx="4754880" cy="4114800"/>
+            <a:ext cx="4754880" cy="2677656"/>
           </a:xfrm>
           <a:prstGeom prst="rect">
             <a:avLst/>
@@ -4209,31 +8311,28 @@
           <a:p>
             <a:pPr algn="l"/>
             <a:r>
-              <a:rPr sz="1200" b="0">
-                <a:solidFill>
-                  <a:srgbClr val="555555"/>
-                </a:solidFill>
+              <a:rPr sz="1400" b="0" dirty="0">
                 <a:latin typeface="Calibri"/>
               </a:rPr>
               <a:t>A below-average return rate sounds positive. Under a strict policy, however, it may also signal:</a:t>
             </a:r>
+            <a:endParaRPr lang="en-US" sz="1400" b="0" dirty="0">
+              <a:latin typeface="Calibri"/>
+            </a:endParaRPr>
+          </a:p>
+          <a:p>
+            <a:pPr algn="l"/>
+            <a:endParaRPr sz="1400" b="0" dirty="0">
+              <a:solidFill>
+                <a:srgbClr val="555555"/>
+              </a:solidFill>
+              <a:latin typeface="Calibri"/>
+            </a:endParaRPr>
           </a:p>
           <a:p>
             <a:pPr algn="l"/>
             <a:r>
-              <a:rPr sz="800" b="0">
-                <a:solidFill>
-                  <a:srgbClr val="1A1A1A"/>
-                </a:solidFill>
-                <a:latin typeface="Calibri"/>
-              </a:rPr>
-              <a:t/>
-            </a:r>
-          </a:p>
-          <a:p>
-            <a:pPr algn="l"/>
-            <a:r>
-              <a:rPr sz="1200" b="0">
+              <a:rPr sz="1400" b="0" dirty="0">
                 <a:solidFill>
                   <a:srgbClr val="1A1A1A"/>
                 </a:solidFill>
@@ -4241,11 +8340,26 @@
               </a:rPr>
               <a:t>  •   Hesitant customers choosing not to buy at all</a:t>
             </a:r>
+            <a:endParaRPr lang="en-US" sz="1400" b="0" dirty="0">
+              <a:solidFill>
+                <a:srgbClr val="1A1A1A"/>
+              </a:solidFill>
+              <a:latin typeface="Calibri"/>
+            </a:endParaRPr>
+          </a:p>
+          <a:p>
+            <a:pPr algn="l"/>
+            <a:endParaRPr sz="1400" b="0" dirty="0">
+              <a:solidFill>
+                <a:srgbClr val="1A1A1A"/>
+              </a:solidFill>
+              <a:latin typeface="Calibri"/>
+            </a:endParaRPr>
           </a:p>
           <a:p>
             <a:pPr algn="l"/>
             <a:r>
-              <a:rPr sz="1200" b="0">
+              <a:rPr sz="1400" b="0" dirty="0">
                 <a:solidFill>
                   <a:srgbClr val="1A1A1A"/>
                 </a:solidFill>
@@ -4253,11 +8367,26 @@
               </a:rPr>
               <a:t>  •   Frustrated returners abandoning the brand quietly</a:t>
             </a:r>
+            <a:endParaRPr lang="en-US" sz="1400" b="0" dirty="0">
+              <a:solidFill>
+                <a:srgbClr val="1A1A1A"/>
+              </a:solidFill>
+              <a:latin typeface="Calibri"/>
+            </a:endParaRPr>
+          </a:p>
+          <a:p>
+            <a:pPr algn="l"/>
+            <a:endParaRPr sz="1400" b="0" dirty="0">
+              <a:solidFill>
+                <a:srgbClr val="1A1A1A"/>
+              </a:solidFill>
+              <a:latin typeface="Calibri"/>
+            </a:endParaRPr>
           </a:p>
           <a:p>
             <a:pPr algn="l"/>
             <a:r>
-              <a:rPr sz="1200" b="0">
+              <a:rPr sz="1400" b="0" dirty="0">
                 <a:solidFill>
                   <a:srgbClr val="1A1A1A"/>
                 </a:solidFill>
@@ -4268,27 +8397,830 @@
           </a:p>
           <a:p>
             <a:pPr algn="l"/>
-            <a:r>
-              <a:rPr sz="800" b="0">
-                <a:solidFill>
-                  <a:srgbClr val="1A1A1A"/>
-                </a:solidFill>
-                <a:latin typeface="Calibri"/>
-              </a:rPr>
-              <a:t/>
-            </a:r>
+            <a:endParaRPr lang="en-US" sz="1400" b="0" dirty="0">
+              <a:solidFill>
+                <a:srgbClr val="1A1A1A"/>
+              </a:solidFill>
+              <a:latin typeface="Calibri"/>
+            </a:endParaRPr>
+          </a:p>
+          <a:p>
+            <a:pPr algn="l"/>
+            <a:endParaRPr sz="1400" b="0" dirty="0">
+              <a:solidFill>
+                <a:srgbClr val="1A1A1A"/>
+              </a:solidFill>
+              <a:latin typeface="Calibri"/>
+            </a:endParaRPr>
           </a:p>
           <a:p>
             <a:pPr algn="l"/>
             <a:r>
-              <a:rPr sz="1200" b="1">
-                <a:solidFill>
-                  <a:srgbClr val="555555"/>
-                </a:solidFill>
+              <a:rPr sz="1400" b="1" dirty="0">
                 <a:latin typeface="Calibri"/>
               </a:rPr>
               <a:t>Urban Hamster's rate is ~9 points below the industry norm. The question isn't just 'are returns low?' — it's 'why?'</a:t>
             </a:r>
+          </a:p>
+        </p:txBody>
+      </p:sp>
+      <p:graphicFrame>
+        <p:nvGraphicFramePr>
+          <p:cNvPr id="25" name="Chart 24">
+            <a:extLst>
+              <a:ext uri="{FF2B5EF4-FFF2-40B4-BE49-F238E27FC236}">
+                <a16:creationId xmlns:a16="http://schemas.microsoft.com/office/drawing/2014/main" id="{6A38D077-875C-4360-049B-446F9D10F04B}"/>
+              </a:ext>
+            </a:extLst>
+          </p:cNvPr>
+          <p:cNvGraphicFramePr>
+            <a:graphicFrameLocks/>
+          </p:cNvGraphicFramePr>
+          <p:nvPr>
+            <p:extLst>
+              <p:ext uri="{D42A27DB-BD31-4B8C-83A1-F6EECF244321}">
+                <p14:modId xmlns:p14="http://schemas.microsoft.com/office/powerpoint/2010/main" val="2118814424"/>
+              </p:ext>
+            </p:extLst>
+          </p:nvPr>
+        </p:nvGraphicFramePr>
+        <p:xfrm>
+          <a:off x="393064" y="846875"/>
+          <a:ext cx="5733415" cy="2454109"/>
+        </p:xfrm>
+        <a:graphic>
+          <a:graphicData uri="http://schemas.openxmlformats.org/drawingml/2006/chart">
+            <c:chart xmlns:c="http://schemas.openxmlformats.org/drawingml/2006/chart" xmlns:r="http://schemas.openxmlformats.org/officeDocument/2006/relationships" r:id="rId2"/>
+          </a:graphicData>
+        </a:graphic>
+      </p:graphicFrame>
+      <p:graphicFrame>
+        <p:nvGraphicFramePr>
+          <p:cNvPr id="27" name="Chart 26">
+            <a:extLst>
+              <a:ext uri="{FF2B5EF4-FFF2-40B4-BE49-F238E27FC236}">
+                <a16:creationId xmlns:a16="http://schemas.microsoft.com/office/drawing/2014/main" id="{6D6060F4-9069-7CD6-DD05-9108633862EB}"/>
+              </a:ext>
+            </a:extLst>
+          </p:cNvPr>
+          <p:cNvGraphicFramePr>
+            <a:graphicFrameLocks/>
+          </p:cNvGraphicFramePr>
+          <p:nvPr>
+            <p:extLst>
+              <p:ext uri="{D42A27DB-BD31-4B8C-83A1-F6EECF244321}">
+                <p14:modId xmlns:p14="http://schemas.microsoft.com/office/powerpoint/2010/main" val="698362039"/>
+              </p:ext>
+            </p:extLst>
+          </p:nvPr>
+        </p:nvGraphicFramePr>
+        <p:xfrm>
+          <a:off x="393064" y="3681484"/>
+          <a:ext cx="5943600" cy="2743200"/>
+        </p:xfrm>
+        <a:graphic>
+          <a:graphicData uri="http://schemas.openxmlformats.org/drawingml/2006/chart">
+            <c:chart xmlns:c="http://schemas.openxmlformats.org/drawingml/2006/chart" xmlns:r="http://schemas.openxmlformats.org/officeDocument/2006/relationships" r:id="rId3"/>
+          </a:graphicData>
+        </a:graphic>
+      </p:graphicFrame>
+      <p:sp>
+        <p:nvSpPr>
+          <p:cNvPr id="28" name="Oval 27">
+            <a:extLst>
+              <a:ext uri="{FF2B5EF4-FFF2-40B4-BE49-F238E27FC236}">
+                <a16:creationId xmlns:a16="http://schemas.microsoft.com/office/drawing/2014/main" id="{7E9DB464-3701-4929-1344-3361CE01A2C0}"/>
+              </a:ext>
+            </a:extLst>
+          </p:cNvPr>
+          <p:cNvSpPr/>
+          <p:nvPr/>
+        </p:nvSpPr>
+        <p:spPr>
+          <a:xfrm>
+            <a:off x="4818062" y="4292289"/>
+            <a:ext cx="196948" cy="152118"/>
+          </a:xfrm>
+          <a:prstGeom prst="ellipse">
+            <a:avLst/>
+          </a:prstGeom>
+          <a:gradFill>
+            <a:gsLst>
+              <a:gs pos="100000">
+                <a:schemeClr val="bg1"/>
+              </a:gs>
+              <a:gs pos="100000">
+                <a:schemeClr val="accent1">
+                  <a:tint val="50000"/>
+                  <a:shade val="100000"/>
+                  <a:satMod val="350000"/>
+                </a:schemeClr>
+              </a:gs>
+            </a:gsLst>
+          </a:gradFill>
+        </p:spPr>
+        <p:style>
+          <a:lnRef idx="1">
+            <a:schemeClr val="accent1"/>
+          </a:lnRef>
+          <a:fillRef idx="3">
+            <a:schemeClr val="accent1"/>
+          </a:fillRef>
+          <a:effectRef idx="2">
+            <a:schemeClr val="accent1"/>
+          </a:effectRef>
+          <a:fontRef idx="minor">
+            <a:schemeClr val="lt1"/>
+          </a:fontRef>
+        </p:style>
+        <p:txBody>
+          <a:bodyPr/>
+          <a:lstStyle>
+            <a:lvl1pPr marL="0" indent="0">
+              <a:defRPr sz="1100">
+                <a:solidFill>
+                  <a:schemeClr val="lt1"/>
+                </a:solidFill>
+                <a:latin typeface="+mn-lt"/>
+                <a:ea typeface="+mn-ea"/>
+                <a:cs typeface="+mn-cs"/>
+              </a:defRPr>
+            </a:lvl1pPr>
+            <a:lvl2pPr marL="457200" indent="0">
+              <a:defRPr sz="1100">
+                <a:solidFill>
+                  <a:schemeClr val="lt1"/>
+                </a:solidFill>
+                <a:latin typeface="+mn-lt"/>
+                <a:ea typeface="+mn-ea"/>
+                <a:cs typeface="+mn-cs"/>
+              </a:defRPr>
+            </a:lvl2pPr>
+            <a:lvl3pPr marL="914400" indent="0">
+              <a:defRPr sz="1100">
+                <a:solidFill>
+                  <a:schemeClr val="lt1"/>
+                </a:solidFill>
+                <a:latin typeface="+mn-lt"/>
+                <a:ea typeface="+mn-ea"/>
+                <a:cs typeface="+mn-cs"/>
+              </a:defRPr>
+            </a:lvl3pPr>
+            <a:lvl4pPr marL="1371600" indent="0">
+              <a:defRPr sz="1100">
+                <a:solidFill>
+                  <a:schemeClr val="lt1"/>
+                </a:solidFill>
+                <a:latin typeface="+mn-lt"/>
+                <a:ea typeface="+mn-ea"/>
+                <a:cs typeface="+mn-cs"/>
+              </a:defRPr>
+            </a:lvl4pPr>
+            <a:lvl5pPr marL="1828800" indent="0">
+              <a:defRPr sz="1100">
+                <a:solidFill>
+                  <a:schemeClr val="lt1"/>
+                </a:solidFill>
+                <a:latin typeface="+mn-lt"/>
+                <a:ea typeface="+mn-ea"/>
+                <a:cs typeface="+mn-cs"/>
+              </a:defRPr>
+            </a:lvl5pPr>
+            <a:lvl6pPr marL="2286000" indent="0">
+              <a:defRPr sz="1100">
+                <a:solidFill>
+                  <a:schemeClr val="lt1"/>
+                </a:solidFill>
+                <a:latin typeface="+mn-lt"/>
+                <a:ea typeface="+mn-ea"/>
+                <a:cs typeface="+mn-cs"/>
+              </a:defRPr>
+            </a:lvl6pPr>
+            <a:lvl7pPr marL="2743200" indent="0">
+              <a:defRPr sz="1100">
+                <a:solidFill>
+                  <a:schemeClr val="lt1"/>
+                </a:solidFill>
+                <a:latin typeface="+mn-lt"/>
+                <a:ea typeface="+mn-ea"/>
+                <a:cs typeface="+mn-cs"/>
+              </a:defRPr>
+            </a:lvl7pPr>
+            <a:lvl8pPr marL="3200400" indent="0">
+              <a:defRPr sz="1100">
+                <a:solidFill>
+                  <a:schemeClr val="lt1"/>
+                </a:solidFill>
+                <a:latin typeface="+mn-lt"/>
+                <a:ea typeface="+mn-ea"/>
+                <a:cs typeface="+mn-cs"/>
+              </a:defRPr>
+            </a:lvl8pPr>
+            <a:lvl9pPr marL="3657600" indent="0">
+              <a:defRPr sz="1100">
+                <a:solidFill>
+                  <a:schemeClr val="lt1"/>
+                </a:solidFill>
+                <a:latin typeface="+mn-lt"/>
+                <a:ea typeface="+mn-ea"/>
+                <a:cs typeface="+mn-cs"/>
+              </a:defRPr>
+            </a:lvl9pPr>
+          </a:lstStyle>
+          <a:p>
+            <a:endParaRPr lang="en-US" kern="1200"/>
+          </a:p>
+        </p:txBody>
+      </p:sp>
+      <p:sp>
+        <p:nvSpPr>
+          <p:cNvPr id="29" name="Oval 28">
+            <a:extLst>
+              <a:ext uri="{FF2B5EF4-FFF2-40B4-BE49-F238E27FC236}">
+                <a16:creationId xmlns:a16="http://schemas.microsoft.com/office/drawing/2014/main" id="{7E9DB464-3701-4929-1344-3361CE01A2C0}"/>
+              </a:ext>
+            </a:extLst>
+          </p:cNvPr>
+          <p:cNvSpPr/>
+          <p:nvPr/>
+        </p:nvSpPr>
+        <p:spPr>
+          <a:xfrm>
+            <a:off x="5693482" y="4349016"/>
+            <a:ext cx="196948" cy="152118"/>
+          </a:xfrm>
+          <a:prstGeom prst="ellipse">
+            <a:avLst/>
+          </a:prstGeom>
+          <a:gradFill>
+            <a:gsLst>
+              <a:gs pos="100000">
+                <a:schemeClr val="bg1"/>
+              </a:gs>
+              <a:gs pos="100000">
+                <a:schemeClr val="accent1">
+                  <a:tint val="50000"/>
+                  <a:shade val="100000"/>
+                  <a:satMod val="350000"/>
+                </a:schemeClr>
+              </a:gs>
+            </a:gsLst>
+          </a:gradFill>
+        </p:spPr>
+        <p:style>
+          <a:lnRef idx="1">
+            <a:schemeClr val="accent1"/>
+          </a:lnRef>
+          <a:fillRef idx="3">
+            <a:schemeClr val="accent1"/>
+          </a:fillRef>
+          <a:effectRef idx="2">
+            <a:schemeClr val="accent1"/>
+          </a:effectRef>
+          <a:fontRef idx="minor">
+            <a:schemeClr val="lt1"/>
+          </a:fontRef>
+        </p:style>
+        <p:txBody>
+          <a:bodyPr/>
+          <a:lstStyle>
+            <a:lvl1pPr marL="0" indent="0">
+              <a:defRPr sz="1100">
+                <a:solidFill>
+                  <a:schemeClr val="lt1"/>
+                </a:solidFill>
+                <a:latin typeface="+mn-lt"/>
+                <a:ea typeface="+mn-ea"/>
+                <a:cs typeface="+mn-cs"/>
+              </a:defRPr>
+            </a:lvl1pPr>
+            <a:lvl2pPr marL="457200" indent="0">
+              <a:defRPr sz="1100">
+                <a:solidFill>
+                  <a:schemeClr val="lt1"/>
+                </a:solidFill>
+                <a:latin typeface="+mn-lt"/>
+                <a:ea typeface="+mn-ea"/>
+                <a:cs typeface="+mn-cs"/>
+              </a:defRPr>
+            </a:lvl2pPr>
+            <a:lvl3pPr marL="914400" indent="0">
+              <a:defRPr sz="1100">
+                <a:solidFill>
+                  <a:schemeClr val="lt1"/>
+                </a:solidFill>
+                <a:latin typeface="+mn-lt"/>
+                <a:ea typeface="+mn-ea"/>
+                <a:cs typeface="+mn-cs"/>
+              </a:defRPr>
+            </a:lvl3pPr>
+            <a:lvl4pPr marL="1371600" indent="0">
+              <a:defRPr sz="1100">
+                <a:solidFill>
+                  <a:schemeClr val="lt1"/>
+                </a:solidFill>
+                <a:latin typeface="+mn-lt"/>
+                <a:ea typeface="+mn-ea"/>
+                <a:cs typeface="+mn-cs"/>
+              </a:defRPr>
+            </a:lvl4pPr>
+            <a:lvl5pPr marL="1828800" indent="0">
+              <a:defRPr sz="1100">
+                <a:solidFill>
+                  <a:schemeClr val="lt1"/>
+                </a:solidFill>
+                <a:latin typeface="+mn-lt"/>
+                <a:ea typeface="+mn-ea"/>
+                <a:cs typeface="+mn-cs"/>
+              </a:defRPr>
+            </a:lvl5pPr>
+            <a:lvl6pPr marL="2286000" indent="0">
+              <a:defRPr sz="1100">
+                <a:solidFill>
+                  <a:schemeClr val="lt1"/>
+                </a:solidFill>
+                <a:latin typeface="+mn-lt"/>
+                <a:ea typeface="+mn-ea"/>
+                <a:cs typeface="+mn-cs"/>
+              </a:defRPr>
+            </a:lvl6pPr>
+            <a:lvl7pPr marL="2743200" indent="0">
+              <a:defRPr sz="1100">
+                <a:solidFill>
+                  <a:schemeClr val="lt1"/>
+                </a:solidFill>
+                <a:latin typeface="+mn-lt"/>
+                <a:ea typeface="+mn-ea"/>
+                <a:cs typeface="+mn-cs"/>
+              </a:defRPr>
+            </a:lvl7pPr>
+            <a:lvl8pPr marL="3200400" indent="0">
+              <a:defRPr sz="1100">
+                <a:solidFill>
+                  <a:schemeClr val="lt1"/>
+                </a:solidFill>
+                <a:latin typeface="+mn-lt"/>
+                <a:ea typeface="+mn-ea"/>
+                <a:cs typeface="+mn-cs"/>
+              </a:defRPr>
+            </a:lvl8pPr>
+            <a:lvl9pPr marL="3657600" indent="0">
+              <a:defRPr sz="1100">
+                <a:solidFill>
+                  <a:schemeClr val="lt1"/>
+                </a:solidFill>
+                <a:latin typeface="+mn-lt"/>
+                <a:ea typeface="+mn-ea"/>
+                <a:cs typeface="+mn-cs"/>
+              </a:defRPr>
+            </a:lvl9pPr>
+          </a:lstStyle>
+          <a:p>
+            <a:endParaRPr lang="en-US" kern="1200"/>
+          </a:p>
+        </p:txBody>
+      </p:sp>
+      <p:sp>
+        <p:nvSpPr>
+          <p:cNvPr id="30" name="Oval 29">
+            <a:extLst>
+              <a:ext uri="{FF2B5EF4-FFF2-40B4-BE49-F238E27FC236}">
+                <a16:creationId xmlns:a16="http://schemas.microsoft.com/office/drawing/2014/main" id="{7E9DB464-3701-4929-1344-3361CE01A2C0}"/>
+              </a:ext>
+            </a:extLst>
+          </p:cNvPr>
+          <p:cNvSpPr/>
+          <p:nvPr/>
+        </p:nvSpPr>
+        <p:spPr>
+          <a:xfrm>
+            <a:off x="3161297" y="4584354"/>
+            <a:ext cx="196948" cy="152118"/>
+          </a:xfrm>
+          <a:prstGeom prst="ellipse">
+            <a:avLst/>
+          </a:prstGeom>
+          <a:gradFill>
+            <a:gsLst>
+              <a:gs pos="100000">
+                <a:schemeClr val="bg1"/>
+              </a:gs>
+              <a:gs pos="100000">
+                <a:schemeClr val="accent1">
+                  <a:tint val="50000"/>
+                  <a:shade val="100000"/>
+                  <a:satMod val="350000"/>
+                </a:schemeClr>
+              </a:gs>
+            </a:gsLst>
+          </a:gradFill>
+        </p:spPr>
+        <p:style>
+          <a:lnRef idx="1">
+            <a:schemeClr val="accent1"/>
+          </a:lnRef>
+          <a:fillRef idx="3">
+            <a:schemeClr val="accent1"/>
+          </a:fillRef>
+          <a:effectRef idx="2">
+            <a:schemeClr val="accent1"/>
+          </a:effectRef>
+          <a:fontRef idx="minor">
+            <a:schemeClr val="lt1"/>
+          </a:fontRef>
+        </p:style>
+        <p:txBody>
+          <a:bodyPr/>
+          <a:lstStyle>
+            <a:lvl1pPr marL="0" indent="0">
+              <a:defRPr sz="1100">
+                <a:solidFill>
+                  <a:schemeClr val="lt1"/>
+                </a:solidFill>
+                <a:latin typeface="+mn-lt"/>
+                <a:ea typeface="+mn-ea"/>
+                <a:cs typeface="+mn-cs"/>
+              </a:defRPr>
+            </a:lvl1pPr>
+            <a:lvl2pPr marL="457200" indent="0">
+              <a:defRPr sz="1100">
+                <a:solidFill>
+                  <a:schemeClr val="lt1"/>
+                </a:solidFill>
+                <a:latin typeface="+mn-lt"/>
+                <a:ea typeface="+mn-ea"/>
+                <a:cs typeface="+mn-cs"/>
+              </a:defRPr>
+            </a:lvl2pPr>
+            <a:lvl3pPr marL="914400" indent="0">
+              <a:defRPr sz="1100">
+                <a:solidFill>
+                  <a:schemeClr val="lt1"/>
+                </a:solidFill>
+                <a:latin typeface="+mn-lt"/>
+                <a:ea typeface="+mn-ea"/>
+                <a:cs typeface="+mn-cs"/>
+              </a:defRPr>
+            </a:lvl3pPr>
+            <a:lvl4pPr marL="1371600" indent="0">
+              <a:defRPr sz="1100">
+                <a:solidFill>
+                  <a:schemeClr val="lt1"/>
+                </a:solidFill>
+                <a:latin typeface="+mn-lt"/>
+                <a:ea typeface="+mn-ea"/>
+                <a:cs typeface="+mn-cs"/>
+              </a:defRPr>
+            </a:lvl4pPr>
+            <a:lvl5pPr marL="1828800" indent="0">
+              <a:defRPr sz="1100">
+                <a:solidFill>
+                  <a:schemeClr val="lt1"/>
+                </a:solidFill>
+                <a:latin typeface="+mn-lt"/>
+                <a:ea typeface="+mn-ea"/>
+                <a:cs typeface="+mn-cs"/>
+              </a:defRPr>
+            </a:lvl5pPr>
+            <a:lvl6pPr marL="2286000" indent="0">
+              <a:defRPr sz="1100">
+                <a:solidFill>
+                  <a:schemeClr val="lt1"/>
+                </a:solidFill>
+                <a:latin typeface="+mn-lt"/>
+                <a:ea typeface="+mn-ea"/>
+                <a:cs typeface="+mn-cs"/>
+              </a:defRPr>
+            </a:lvl6pPr>
+            <a:lvl7pPr marL="2743200" indent="0">
+              <a:defRPr sz="1100">
+                <a:solidFill>
+                  <a:schemeClr val="lt1"/>
+                </a:solidFill>
+                <a:latin typeface="+mn-lt"/>
+                <a:ea typeface="+mn-ea"/>
+                <a:cs typeface="+mn-cs"/>
+              </a:defRPr>
+            </a:lvl7pPr>
+            <a:lvl8pPr marL="3200400" indent="0">
+              <a:defRPr sz="1100">
+                <a:solidFill>
+                  <a:schemeClr val="lt1"/>
+                </a:solidFill>
+                <a:latin typeface="+mn-lt"/>
+                <a:ea typeface="+mn-ea"/>
+                <a:cs typeface="+mn-cs"/>
+              </a:defRPr>
+            </a:lvl8pPr>
+            <a:lvl9pPr marL="3657600" indent="0">
+              <a:defRPr sz="1100">
+                <a:solidFill>
+                  <a:schemeClr val="lt1"/>
+                </a:solidFill>
+                <a:latin typeface="+mn-lt"/>
+                <a:ea typeface="+mn-ea"/>
+                <a:cs typeface="+mn-cs"/>
+              </a:defRPr>
+            </a:lvl9pPr>
+          </a:lstStyle>
+          <a:p>
+            <a:endParaRPr lang="en-US" kern="1200"/>
+          </a:p>
+        </p:txBody>
+      </p:sp>
+      <p:sp>
+        <p:nvSpPr>
+          <p:cNvPr id="31" name="Oval 30">
+            <a:extLst>
+              <a:ext uri="{FF2B5EF4-FFF2-40B4-BE49-F238E27FC236}">
+                <a16:creationId xmlns:a16="http://schemas.microsoft.com/office/drawing/2014/main" id="{7E9DB464-3701-4929-1344-3361CE01A2C0}"/>
+              </a:ext>
+            </a:extLst>
+          </p:cNvPr>
+          <p:cNvSpPr/>
+          <p:nvPr/>
+        </p:nvSpPr>
+        <p:spPr>
+          <a:xfrm>
+            <a:off x="2310202" y="4837851"/>
+            <a:ext cx="196948" cy="152118"/>
+          </a:xfrm>
+          <a:prstGeom prst="ellipse">
+            <a:avLst/>
+          </a:prstGeom>
+          <a:gradFill>
+            <a:gsLst>
+              <a:gs pos="100000">
+                <a:schemeClr val="bg1"/>
+              </a:gs>
+              <a:gs pos="100000">
+                <a:schemeClr val="accent1">
+                  <a:tint val="50000"/>
+                  <a:shade val="100000"/>
+                  <a:satMod val="350000"/>
+                </a:schemeClr>
+              </a:gs>
+            </a:gsLst>
+          </a:gradFill>
+        </p:spPr>
+        <p:style>
+          <a:lnRef idx="1">
+            <a:schemeClr val="accent1"/>
+          </a:lnRef>
+          <a:fillRef idx="3">
+            <a:schemeClr val="accent1"/>
+          </a:fillRef>
+          <a:effectRef idx="2">
+            <a:schemeClr val="accent1"/>
+          </a:effectRef>
+          <a:fontRef idx="minor">
+            <a:schemeClr val="lt1"/>
+          </a:fontRef>
+        </p:style>
+        <p:txBody>
+          <a:bodyPr/>
+          <a:lstStyle>
+            <a:lvl1pPr marL="0" indent="0">
+              <a:defRPr sz="1100">
+                <a:solidFill>
+                  <a:schemeClr val="lt1"/>
+                </a:solidFill>
+                <a:latin typeface="+mn-lt"/>
+                <a:ea typeface="+mn-ea"/>
+                <a:cs typeface="+mn-cs"/>
+              </a:defRPr>
+            </a:lvl1pPr>
+            <a:lvl2pPr marL="457200" indent="0">
+              <a:defRPr sz="1100">
+                <a:solidFill>
+                  <a:schemeClr val="lt1"/>
+                </a:solidFill>
+                <a:latin typeface="+mn-lt"/>
+                <a:ea typeface="+mn-ea"/>
+                <a:cs typeface="+mn-cs"/>
+              </a:defRPr>
+            </a:lvl2pPr>
+            <a:lvl3pPr marL="914400" indent="0">
+              <a:defRPr sz="1100">
+                <a:solidFill>
+                  <a:schemeClr val="lt1"/>
+                </a:solidFill>
+                <a:latin typeface="+mn-lt"/>
+                <a:ea typeface="+mn-ea"/>
+                <a:cs typeface="+mn-cs"/>
+              </a:defRPr>
+            </a:lvl3pPr>
+            <a:lvl4pPr marL="1371600" indent="0">
+              <a:defRPr sz="1100">
+                <a:solidFill>
+                  <a:schemeClr val="lt1"/>
+                </a:solidFill>
+                <a:latin typeface="+mn-lt"/>
+                <a:ea typeface="+mn-ea"/>
+                <a:cs typeface="+mn-cs"/>
+              </a:defRPr>
+            </a:lvl4pPr>
+            <a:lvl5pPr marL="1828800" indent="0">
+              <a:defRPr sz="1100">
+                <a:solidFill>
+                  <a:schemeClr val="lt1"/>
+                </a:solidFill>
+                <a:latin typeface="+mn-lt"/>
+                <a:ea typeface="+mn-ea"/>
+                <a:cs typeface="+mn-cs"/>
+              </a:defRPr>
+            </a:lvl5pPr>
+            <a:lvl6pPr marL="2286000" indent="0">
+              <a:defRPr sz="1100">
+                <a:solidFill>
+                  <a:schemeClr val="lt1"/>
+                </a:solidFill>
+                <a:latin typeface="+mn-lt"/>
+                <a:ea typeface="+mn-ea"/>
+                <a:cs typeface="+mn-cs"/>
+              </a:defRPr>
+            </a:lvl6pPr>
+            <a:lvl7pPr marL="2743200" indent="0">
+              <a:defRPr sz="1100">
+                <a:solidFill>
+                  <a:schemeClr val="lt1"/>
+                </a:solidFill>
+                <a:latin typeface="+mn-lt"/>
+                <a:ea typeface="+mn-ea"/>
+                <a:cs typeface="+mn-cs"/>
+              </a:defRPr>
+            </a:lvl7pPr>
+            <a:lvl8pPr marL="3200400" indent="0">
+              <a:defRPr sz="1100">
+                <a:solidFill>
+                  <a:schemeClr val="lt1"/>
+                </a:solidFill>
+                <a:latin typeface="+mn-lt"/>
+                <a:ea typeface="+mn-ea"/>
+                <a:cs typeface="+mn-cs"/>
+              </a:defRPr>
+            </a:lvl8pPr>
+            <a:lvl9pPr marL="3657600" indent="0">
+              <a:defRPr sz="1100">
+                <a:solidFill>
+                  <a:schemeClr val="lt1"/>
+                </a:solidFill>
+                <a:latin typeface="+mn-lt"/>
+                <a:ea typeface="+mn-ea"/>
+                <a:cs typeface="+mn-cs"/>
+              </a:defRPr>
+            </a:lvl9pPr>
+          </a:lstStyle>
+          <a:p>
+            <a:endParaRPr lang="en-US" kern="1200"/>
+          </a:p>
+        </p:txBody>
+      </p:sp>
+      <p:sp>
+        <p:nvSpPr>
+          <p:cNvPr id="32" name="Oval 31">
+            <a:extLst>
+              <a:ext uri="{FF2B5EF4-FFF2-40B4-BE49-F238E27FC236}">
+                <a16:creationId xmlns:a16="http://schemas.microsoft.com/office/drawing/2014/main" id="{7E9DB464-3701-4929-1344-3361CE01A2C0}"/>
+              </a:ext>
+            </a:extLst>
+          </p:cNvPr>
+          <p:cNvSpPr/>
+          <p:nvPr/>
+        </p:nvSpPr>
+        <p:spPr>
+          <a:xfrm>
+            <a:off x="1435608" y="5059539"/>
+            <a:ext cx="196948" cy="152118"/>
+          </a:xfrm>
+          <a:prstGeom prst="ellipse">
+            <a:avLst/>
+          </a:prstGeom>
+          <a:gradFill>
+            <a:gsLst>
+              <a:gs pos="100000">
+                <a:schemeClr val="bg1"/>
+              </a:gs>
+              <a:gs pos="100000">
+                <a:schemeClr val="accent1">
+                  <a:tint val="50000"/>
+                  <a:shade val="100000"/>
+                  <a:satMod val="350000"/>
+                </a:schemeClr>
+              </a:gs>
+            </a:gsLst>
+          </a:gradFill>
+        </p:spPr>
+        <p:style>
+          <a:lnRef idx="1">
+            <a:schemeClr val="accent1"/>
+          </a:lnRef>
+          <a:fillRef idx="3">
+            <a:schemeClr val="accent1"/>
+          </a:fillRef>
+          <a:effectRef idx="2">
+            <a:schemeClr val="accent1"/>
+          </a:effectRef>
+          <a:fontRef idx="minor">
+            <a:schemeClr val="lt1"/>
+          </a:fontRef>
+        </p:style>
+        <p:txBody>
+          <a:bodyPr/>
+          <a:lstStyle>
+            <a:lvl1pPr marL="0" indent="0">
+              <a:defRPr sz="1100">
+                <a:solidFill>
+                  <a:schemeClr val="lt1"/>
+                </a:solidFill>
+                <a:latin typeface="+mn-lt"/>
+                <a:ea typeface="+mn-ea"/>
+                <a:cs typeface="+mn-cs"/>
+              </a:defRPr>
+            </a:lvl1pPr>
+            <a:lvl2pPr marL="457200" indent="0">
+              <a:defRPr sz="1100">
+                <a:solidFill>
+                  <a:schemeClr val="lt1"/>
+                </a:solidFill>
+                <a:latin typeface="+mn-lt"/>
+                <a:ea typeface="+mn-ea"/>
+                <a:cs typeface="+mn-cs"/>
+              </a:defRPr>
+            </a:lvl2pPr>
+            <a:lvl3pPr marL="914400" indent="0">
+              <a:defRPr sz="1100">
+                <a:solidFill>
+                  <a:schemeClr val="lt1"/>
+                </a:solidFill>
+                <a:latin typeface="+mn-lt"/>
+                <a:ea typeface="+mn-ea"/>
+                <a:cs typeface="+mn-cs"/>
+              </a:defRPr>
+            </a:lvl3pPr>
+            <a:lvl4pPr marL="1371600" indent="0">
+              <a:defRPr sz="1100">
+                <a:solidFill>
+                  <a:schemeClr val="lt1"/>
+                </a:solidFill>
+                <a:latin typeface="+mn-lt"/>
+                <a:ea typeface="+mn-ea"/>
+                <a:cs typeface="+mn-cs"/>
+              </a:defRPr>
+            </a:lvl4pPr>
+            <a:lvl5pPr marL="1828800" indent="0">
+              <a:defRPr sz="1100">
+                <a:solidFill>
+                  <a:schemeClr val="lt1"/>
+                </a:solidFill>
+                <a:latin typeface="+mn-lt"/>
+                <a:ea typeface="+mn-ea"/>
+                <a:cs typeface="+mn-cs"/>
+              </a:defRPr>
+            </a:lvl5pPr>
+            <a:lvl6pPr marL="2286000" indent="0">
+              <a:defRPr sz="1100">
+                <a:solidFill>
+                  <a:schemeClr val="lt1"/>
+                </a:solidFill>
+                <a:latin typeface="+mn-lt"/>
+                <a:ea typeface="+mn-ea"/>
+                <a:cs typeface="+mn-cs"/>
+              </a:defRPr>
+            </a:lvl6pPr>
+            <a:lvl7pPr marL="2743200" indent="0">
+              <a:defRPr sz="1100">
+                <a:solidFill>
+                  <a:schemeClr val="lt1"/>
+                </a:solidFill>
+                <a:latin typeface="+mn-lt"/>
+                <a:ea typeface="+mn-ea"/>
+                <a:cs typeface="+mn-cs"/>
+              </a:defRPr>
+            </a:lvl7pPr>
+            <a:lvl8pPr marL="3200400" indent="0">
+              <a:defRPr sz="1100">
+                <a:solidFill>
+                  <a:schemeClr val="lt1"/>
+                </a:solidFill>
+                <a:latin typeface="+mn-lt"/>
+                <a:ea typeface="+mn-ea"/>
+                <a:cs typeface="+mn-cs"/>
+              </a:defRPr>
+            </a:lvl8pPr>
+            <a:lvl9pPr marL="3657600" indent="0">
+              <a:defRPr sz="1100">
+                <a:solidFill>
+                  <a:schemeClr val="lt1"/>
+                </a:solidFill>
+                <a:latin typeface="+mn-lt"/>
+                <a:ea typeface="+mn-ea"/>
+                <a:cs typeface="+mn-cs"/>
+              </a:defRPr>
+            </a:lvl9pPr>
+          </a:lstStyle>
+          <a:p>
+            <a:endParaRPr lang="en-US" kern="1200"/>
           </a:p>
         </p:txBody>
       </p:sp>
@@ -4301,7 +9233,7 @@
 </file>
 
 <file path=ppt/slides/slide3.xml><?xml version="1.0" encoding="utf-8"?>
-<p:sld xmlns:a="http://schemas.openxmlformats.org/drawingml/2006/main" xmlns:p="http://schemas.openxmlformats.org/presentationml/2006/main" xmlns:r="http://schemas.openxmlformats.org/officeDocument/2006/relationships">
+<p:sld xmlns:a="http://schemas.openxmlformats.org/drawingml/2006/main" xmlns:r="http://schemas.openxmlformats.org/officeDocument/2006/relationships" xmlns:p="http://schemas.openxmlformats.org/presentationml/2006/main">
   <p:cSld>
     <p:bg>
       <p:bgPr>
@@ -4317,7 +9249,14 @@
         <p:cNvGrpSpPr/>
         <p:nvPr/>
       </p:nvGrpSpPr>
-      <p:grpSpPr/>
+      <p:grpSpPr>
+        <a:xfrm>
+          <a:off x="0" y="0"/>
+          <a:ext cx="0" cy="0"/>
+          <a:chOff x="0" y="0"/>
+          <a:chExt cx="0" cy="0"/>
+        </a:xfrm>
+      </p:grpSpPr>
       <p:sp>
         <p:nvSpPr>
           <p:cNvPr id="2" name="Rectangle 1"/>
@@ -4358,6 +9297,7 @@
           <a:lstStyle/>
           <a:p>
             <a:pPr algn="ctr"/>
+            <a:endParaRPr/>
           </a:p>
         </p:txBody>
       </p:sp>
@@ -4436,380 +9376,7 @@
           <a:lstStyle/>
           <a:p>
             <a:pPr algn="ctr"/>
-          </a:p>
-        </p:txBody>
-      </p:sp>
-      <p:sp>
-        <p:nvSpPr>
-          <p:cNvPr id="5" name="TextBox 4"/>
-          <p:cNvSpPr txBox="1"/>
-          <p:nvPr/>
-        </p:nvSpPr>
-        <p:spPr>
-          <a:xfrm>
-            <a:off x="457200" y="987552"/>
-            <a:ext cx="5486400" cy="347472"/>
-          </a:xfrm>
-          <a:prstGeom prst="rect">
-            <a:avLst/>
-          </a:prstGeom>
-          <a:noFill/>
-        </p:spPr>
-        <p:txBody>
-          <a:bodyPr wrap="square">
-            <a:spAutoFit/>
-          </a:bodyPr>
-          <a:lstStyle/>
-          <a:p>
-            <a:pPr algn="l"/>
-            <a:r>
-              <a:rPr sz="1300" b="1" i="0">
-                <a:solidFill>
-                  <a:srgbClr val="555555"/>
-                </a:solidFill>
-                <a:latin typeface="Calibri"/>
-              </a:rPr>
-              <a:t>Top 3 Categories by Return Rate</a:t>
-            </a:r>
-          </a:p>
-        </p:txBody>
-      </p:sp>
-      <p:sp>
-        <p:nvSpPr>
-          <p:cNvPr id="6" name="TextBox 5"/>
-          <p:cNvSpPr txBox="1"/>
-          <p:nvPr/>
-        </p:nvSpPr>
-        <p:spPr>
-          <a:xfrm>
-            <a:off x="457200" y="1417320"/>
-            <a:ext cx="2286000" cy="274320"/>
-          </a:xfrm>
-          <a:prstGeom prst="rect">
-            <a:avLst/>
-          </a:prstGeom>
-          <a:noFill/>
-        </p:spPr>
-        <p:txBody>
-          <a:bodyPr wrap="square">
-            <a:spAutoFit/>
-          </a:bodyPr>
-          <a:lstStyle/>
-          <a:p>
-            <a:pPr algn="l"/>
-            <a:r>
-              <a:rPr sz="1200" b="0" i="0">
-                <a:solidFill>
-                  <a:srgbClr val="1A1A1A"/>
-                </a:solidFill>
-                <a:latin typeface="Calibri"/>
-              </a:rPr>
-              <a:t>Pants</a:t>
-            </a:r>
-          </a:p>
-        </p:txBody>
-      </p:sp>
-      <p:sp>
-        <p:nvSpPr>
-          <p:cNvPr id="7" name="Rectangle 6"/>
-          <p:cNvSpPr/>
-          <p:nvPr/>
-        </p:nvSpPr>
-        <p:spPr>
-          <a:xfrm>
-            <a:off x="457200" y="1691640"/>
-            <a:ext cx="3218688" cy="384048"/>
-          </a:xfrm>
-          <a:prstGeom prst="rect">
-            <a:avLst/>
-          </a:prstGeom>
-          <a:solidFill>
-            <a:srgbClr val="E91E8C"/>
-          </a:solidFill>
-          <a:ln>
-            <a:noFill/>
-          </a:ln>
-        </p:spPr>
-        <p:style>
-          <a:lnRef idx="1">
-            <a:schemeClr val="accent1"/>
-          </a:lnRef>
-          <a:fillRef idx="3">
-            <a:schemeClr val="accent1"/>
-          </a:fillRef>
-          <a:effectRef idx="2">
-            <a:schemeClr val="accent1"/>
-          </a:effectRef>
-          <a:fontRef idx="minor">
-            <a:schemeClr val="lt1"/>
-          </a:fontRef>
-        </p:style>
-        <p:txBody>
-          <a:bodyPr rtlCol="0" anchor="ctr"/>
-          <a:lstStyle/>
-          <a:p>
-            <a:pPr algn="ctr"/>
-          </a:p>
-        </p:txBody>
-      </p:sp>
-      <p:sp>
-        <p:nvSpPr>
-          <p:cNvPr id="8" name="TextBox 7"/>
-          <p:cNvSpPr txBox="1"/>
-          <p:nvPr/>
-        </p:nvSpPr>
-        <p:spPr>
-          <a:xfrm>
-            <a:off x="3785615" y="1691640"/>
-            <a:ext cx="822960" cy="384048"/>
-          </a:xfrm>
-          <a:prstGeom prst="rect">
-            <a:avLst/>
-          </a:prstGeom>
-          <a:noFill/>
-        </p:spPr>
-        <p:txBody>
-          <a:bodyPr wrap="square">
-            <a:spAutoFit/>
-          </a:bodyPr>
-          <a:lstStyle/>
-          <a:p>
-            <a:pPr algn="l"/>
-            <a:r>
-              <a:rPr sz="1400" b="1" i="0">
-                <a:solidFill>
-                  <a:srgbClr val="E91E8C"/>
-                </a:solidFill>
-                <a:latin typeface="Calibri"/>
-              </a:rPr>
-              <a:t>11.0%</a:t>
-            </a:r>
-          </a:p>
-        </p:txBody>
-      </p:sp>
-      <p:sp>
-        <p:nvSpPr>
-          <p:cNvPr id="9" name="TextBox 8"/>
-          <p:cNvSpPr txBox="1"/>
-          <p:nvPr/>
-        </p:nvSpPr>
-        <p:spPr>
-          <a:xfrm>
-            <a:off x="457200" y="2286000"/>
-            <a:ext cx="2286000" cy="274320"/>
-          </a:xfrm>
-          <a:prstGeom prst="rect">
-            <a:avLst/>
-          </a:prstGeom>
-          <a:noFill/>
-        </p:spPr>
-        <p:txBody>
-          <a:bodyPr wrap="square">
-            <a:spAutoFit/>
-          </a:bodyPr>
-          <a:lstStyle/>
-          <a:p>
-            <a:pPr algn="l"/>
-            <a:r>
-              <a:rPr sz="1200" b="0" i="0">
-                <a:solidFill>
-                  <a:srgbClr val="1A1A1A"/>
-                </a:solidFill>
-                <a:latin typeface="Calibri"/>
-              </a:rPr>
-              <a:t>Leggings</a:t>
-            </a:r>
-          </a:p>
-        </p:txBody>
-      </p:sp>
-      <p:sp>
-        <p:nvSpPr>
-          <p:cNvPr id="10" name="Rectangle 9"/>
-          <p:cNvSpPr/>
-          <p:nvPr/>
-        </p:nvSpPr>
-        <p:spPr>
-          <a:xfrm>
-            <a:off x="457200" y="2560320"/>
-            <a:ext cx="3130905" cy="384048"/>
-          </a:xfrm>
-          <a:prstGeom prst="rect">
-            <a:avLst/>
-          </a:prstGeom>
-          <a:solidFill>
-            <a:srgbClr val="F07AC2"/>
-          </a:solidFill>
-          <a:ln>
-            <a:noFill/>
-          </a:ln>
-        </p:spPr>
-        <p:style>
-          <a:lnRef idx="1">
-            <a:schemeClr val="accent1"/>
-          </a:lnRef>
-          <a:fillRef idx="3">
-            <a:schemeClr val="accent1"/>
-          </a:fillRef>
-          <a:effectRef idx="2">
-            <a:schemeClr val="accent1"/>
-          </a:effectRef>
-          <a:fontRef idx="minor">
-            <a:schemeClr val="lt1"/>
-          </a:fontRef>
-        </p:style>
-        <p:txBody>
-          <a:bodyPr rtlCol="0" anchor="ctr"/>
-          <a:lstStyle/>
-          <a:p>
-            <a:pPr algn="ctr"/>
-          </a:p>
-        </p:txBody>
-      </p:sp>
-      <p:sp>
-        <p:nvSpPr>
-          <p:cNvPr id="11" name="TextBox 10"/>
-          <p:cNvSpPr txBox="1"/>
-          <p:nvPr/>
-        </p:nvSpPr>
-        <p:spPr>
-          <a:xfrm>
-            <a:off x="3697833" y="2560320"/>
-            <a:ext cx="822960" cy="384048"/>
-          </a:xfrm>
-          <a:prstGeom prst="rect">
-            <a:avLst/>
-          </a:prstGeom>
-          <a:noFill/>
-        </p:spPr>
-        <p:txBody>
-          <a:bodyPr wrap="square">
-            <a:spAutoFit/>
-          </a:bodyPr>
-          <a:lstStyle/>
-          <a:p>
-            <a:pPr algn="l"/>
-            <a:r>
-              <a:rPr sz="1400" b="1" i="0">
-                <a:solidFill>
-                  <a:srgbClr val="F07AC2"/>
-                </a:solidFill>
-                <a:latin typeface="Calibri"/>
-              </a:rPr>
-              <a:t>10.7%</a:t>
-            </a:r>
-          </a:p>
-        </p:txBody>
-      </p:sp>
-      <p:sp>
-        <p:nvSpPr>
-          <p:cNvPr id="12" name="TextBox 11"/>
-          <p:cNvSpPr txBox="1"/>
-          <p:nvPr/>
-        </p:nvSpPr>
-        <p:spPr>
-          <a:xfrm>
-            <a:off x="457200" y="3154680"/>
-            <a:ext cx="2286000" cy="274320"/>
-          </a:xfrm>
-          <a:prstGeom prst="rect">
-            <a:avLst/>
-          </a:prstGeom>
-          <a:noFill/>
-        </p:spPr>
-        <p:txBody>
-          <a:bodyPr wrap="square">
-            <a:spAutoFit/>
-          </a:bodyPr>
-          <a:lstStyle/>
-          <a:p>
-            <a:pPr algn="l"/>
-            <a:r>
-              <a:rPr sz="1200" b="0" i="0">
-                <a:solidFill>
-                  <a:srgbClr val="1A1A1A"/>
-                </a:solidFill>
-                <a:latin typeface="Calibri"/>
-              </a:rPr>
-              <a:t>Socks &amp; Hosiery</a:t>
-            </a:r>
-          </a:p>
-        </p:txBody>
-      </p:sp>
-      <p:sp>
-        <p:nvSpPr>
-          <p:cNvPr id="13" name="Rectangle 12"/>
-          <p:cNvSpPr/>
-          <p:nvPr/>
-        </p:nvSpPr>
-        <p:spPr>
-          <a:xfrm>
-            <a:off x="457200" y="3429000"/>
-            <a:ext cx="3130905" cy="384048"/>
-          </a:xfrm>
-          <a:prstGeom prst="rect">
-            <a:avLst/>
-          </a:prstGeom>
-          <a:solidFill>
-            <a:srgbClr val="BDBDBD"/>
-          </a:solidFill>
-          <a:ln>
-            <a:noFill/>
-          </a:ln>
-        </p:spPr>
-        <p:style>
-          <a:lnRef idx="1">
-            <a:schemeClr val="accent1"/>
-          </a:lnRef>
-          <a:fillRef idx="3">
-            <a:schemeClr val="accent1"/>
-          </a:fillRef>
-          <a:effectRef idx="2">
-            <a:schemeClr val="accent1"/>
-          </a:effectRef>
-          <a:fontRef idx="minor">
-            <a:schemeClr val="lt1"/>
-          </a:fontRef>
-        </p:style>
-        <p:txBody>
-          <a:bodyPr rtlCol="0" anchor="ctr"/>
-          <a:lstStyle/>
-          <a:p>
-            <a:pPr algn="ctr"/>
-          </a:p>
-        </p:txBody>
-      </p:sp>
-      <p:sp>
-        <p:nvSpPr>
-          <p:cNvPr id="14" name="TextBox 13"/>
-          <p:cNvSpPr txBox="1"/>
-          <p:nvPr/>
-        </p:nvSpPr>
-        <p:spPr>
-          <a:xfrm>
-            <a:off x="3697833" y="3429000"/>
-            <a:ext cx="822960" cy="384048"/>
-          </a:xfrm>
-          <a:prstGeom prst="rect">
-            <a:avLst/>
-          </a:prstGeom>
-          <a:noFill/>
-        </p:spPr>
-        <p:txBody>
-          <a:bodyPr wrap="square">
-            <a:spAutoFit/>
-          </a:bodyPr>
-          <a:lstStyle/>
-          <a:p>
-            <a:pPr algn="l"/>
-            <a:r>
-              <a:rPr sz="1400" b="1" i="0">
-                <a:solidFill>
-                  <a:srgbClr val="BDBDBD"/>
-                </a:solidFill>
-                <a:latin typeface="Calibri"/>
-              </a:rPr>
-              <a:t>10.7%</a:t>
-            </a:r>
+            <a:endParaRPr/>
           </a:p>
         </p:txBody>
       </p:sp>
@@ -4853,6 +9420,7 @@
           <a:lstStyle/>
           <a:p>
             <a:pPr algn="ctr"/>
+            <a:endParaRPr/>
           </a:p>
         </p:txBody>
       </p:sp>
@@ -4864,8 +9432,8 @@
         </p:nvSpPr>
         <p:spPr>
           <a:xfrm>
-            <a:off x="457200" y="4251960"/>
-            <a:ext cx="5486400" cy="1371600"/>
+            <a:off x="457200" y="4482869"/>
+            <a:ext cx="5486400" cy="646331"/>
           </a:xfrm>
           <a:prstGeom prst="rect">
             <a:avLst/>
@@ -4880,13 +9448,34 @@
           <a:p>
             <a:pPr algn="l"/>
             <a:r>
-              <a:rPr sz="1200" b="0">
-                <a:solidFill>
-                  <a:srgbClr val="555555"/>
-                </a:solidFill>
+              <a:rPr sz="1200" b="0" dirty="0">
                 <a:latin typeface="Calibri"/>
               </a:rPr>
-              <a:t>All three categories are fit-dependent — customers can't try them on. This suggests sizing guidance or product descriptions may need attention, not just the return policy itself.</a:t>
+              <a:t>All three categories are fit-dependent</a:t>
+            </a:r>
+            <a:r>
+              <a:rPr lang="en-US" sz="1200" dirty="0">
+                <a:latin typeface="Calibri"/>
+              </a:rPr>
+              <a:t> with</a:t>
+            </a:r>
+            <a:r>
+              <a:rPr sz="1200" b="0" dirty="0">
+                <a:latin typeface="Calibri"/>
+              </a:rPr>
+              <a:t> customers </a:t>
+            </a:r>
+            <a:r>
+              <a:rPr lang="en-US" sz="1200" dirty="0">
+                <a:latin typeface="Calibri"/>
+              </a:rPr>
+              <a:t>unable to</a:t>
+            </a:r>
+            <a:r>
+              <a:rPr sz="1200" b="0" dirty="0">
+                <a:latin typeface="Calibri"/>
+              </a:rPr>
+              <a:t> try them on. This suggests sizing guidance or product descriptions may need attention, not just the return policy itself.</a:t>
             </a:r>
           </a:p>
         </p:txBody>
@@ -4931,6 +9520,7 @@
           <a:lstStyle/>
           <a:p>
             <a:pPr algn="ctr"/>
+            <a:endParaRPr/>
           </a:p>
         </p:txBody>
       </p:sp>
@@ -4974,6 +9564,7 @@
           <a:lstStyle/>
           <a:p>
             <a:pPr algn="ctr"/>
+            <a:endParaRPr/>
           </a:p>
         </p:txBody>
       </p:sp>
@@ -4986,7 +9577,7 @@
         <p:spPr>
           <a:xfrm>
             <a:off x="6720840" y="1051560"/>
-            <a:ext cx="4892040" cy="365760"/>
+            <a:ext cx="4892040" cy="307777"/>
           </a:xfrm>
           <a:prstGeom prst="rect">
             <a:avLst/>
@@ -5001,7 +9592,7 @@
           <a:p>
             <a:pPr algn="l"/>
             <a:r>
-              <a:rPr sz="1300" b="1" i="0">
+              <a:rPr sz="1400" b="1" i="0" dirty="0">
                 <a:solidFill>
                   <a:srgbClr val="1A1A1A"/>
                 </a:solidFill>
@@ -5021,7 +9612,7 @@
         <p:spPr>
           <a:xfrm>
             <a:off x="6720840" y="1508760"/>
-            <a:ext cx="4892040" cy="777240"/>
+            <a:ext cx="4892040" cy="553998"/>
           </a:xfrm>
           <a:prstGeom prst="rect">
             <a:avLst/>
@@ -5036,10 +9627,7 @@
           <a:p>
             <a:pPr algn="ctr"/>
             <a:r>
-              <a:rPr sz="3000" b="1" i="0">
-                <a:solidFill>
-                  <a:srgbClr val="E91E8C"/>
-                </a:solidFill>
+              <a:rPr sz="3000" b="1" i="0" dirty="0">
                 <a:latin typeface="Calibri"/>
               </a:rPr>
               <a:t>$1,088,903.82</a:t>
@@ -5055,8 +9643,8 @@
         </p:nvSpPr>
         <p:spPr>
           <a:xfrm>
-            <a:off x="6720840" y="2304288"/>
-            <a:ext cx="4892040" cy="347472"/>
+            <a:off x="6729984" y="2322576"/>
+            <a:ext cx="4892040" cy="307777"/>
           </a:xfrm>
           <a:prstGeom prst="rect">
             <a:avLst/>
@@ -5071,10 +9659,7 @@
           <a:p>
             <a:pPr algn="ctr"/>
             <a:r>
-              <a:rPr sz="1100" b="0" i="1">
-                <a:solidFill>
-                  <a:srgbClr val="555555"/>
-                </a:solidFill>
+              <a:rPr sz="1400" b="0" i="1" dirty="0">
                 <a:latin typeface="Calibri"/>
               </a:rPr>
               <a:t>in total sale price across all returned orders</a:t>
@@ -5091,7 +9676,7 @@
         <p:spPr>
           <a:xfrm>
             <a:off x="6720840" y="2670048"/>
-            <a:ext cx="4892040" cy="320040"/>
+            <a:ext cx="4892040" cy="307777"/>
           </a:xfrm>
           <a:prstGeom prst="rect">
             <a:avLst/>
@@ -5106,10 +9691,7 @@
           <a:p>
             <a:pPr algn="ctr"/>
             <a:r>
-              <a:rPr sz="1000" b="0" i="0">
-                <a:solidFill>
-                  <a:srgbClr val="BDBDBD"/>
-                </a:solidFill>
+              <a:rPr sz="1400" b="0" i="0" dirty="0">
                 <a:latin typeface="Calibri"/>
               </a:rPr>
               <a:t>124,877 total orders  ·  12,531 returned</a:t>
@@ -5157,6 +9739,7 @@
           <a:lstStyle/>
           <a:p>
             <a:pPr algn="ctr"/>
+            <a:endParaRPr/>
           </a:p>
         </p:txBody>
       </p:sp>
@@ -5200,6 +9783,7 @@
           <a:lstStyle/>
           <a:p>
             <a:pPr algn="ctr"/>
+            <a:endParaRPr/>
           </a:p>
         </p:txBody>
       </p:sp>
@@ -5212,7 +9796,7 @@
         <p:spPr>
           <a:xfrm>
             <a:off x="6720840" y="3886200"/>
-            <a:ext cx="4892040" cy="365760"/>
+            <a:ext cx="4892040" cy="307777"/>
           </a:xfrm>
           <a:prstGeom prst="rect">
             <a:avLst/>
@@ -5227,7 +9811,7 @@
           <a:p>
             <a:pPr algn="l"/>
             <a:r>
-              <a:rPr sz="1300" b="1" i="0">
+              <a:rPr sz="1400" b="1" i="0" dirty="0">
                 <a:solidFill>
                   <a:srgbClr val="1A1A1A"/>
                 </a:solidFill>
@@ -5247,7 +9831,7 @@
         <p:spPr>
           <a:xfrm>
             <a:off x="6720840" y="4297680"/>
-            <a:ext cx="4892040" cy="1645920"/>
+            <a:ext cx="4892040" cy="1354217"/>
           </a:xfrm>
           <a:prstGeom prst="rect">
             <a:avLst/>
@@ -5262,10 +9846,7 @@
           <a:p>
             <a:pPr algn="l"/>
             <a:r>
-              <a:rPr sz="1100" b="0">
-                <a:solidFill>
-                  <a:srgbClr val="555555"/>
-                </a:solidFill>
+              <a:rPr sz="1400" b="0" dirty="0">
                 <a:latin typeface="Calibri"/>
               </a:rPr>
               <a:t>The $1.08M does not account for:</a:t>
@@ -5274,7 +9855,7 @@
           <a:p>
             <a:pPr algn="l"/>
             <a:r>
-              <a:rPr sz="1100" b="0">
+              <a:rPr sz="1400" b="0" dirty="0">
                 <a:solidFill>
                   <a:srgbClr val="1A1A1A"/>
                 </a:solidFill>
@@ -5286,7 +9867,7 @@
           <a:p>
             <a:pPr algn="l"/>
             <a:r>
-              <a:rPr sz="1100" b="0">
+              <a:rPr sz="1400" b="0" dirty="0">
                 <a:solidFill>
                   <a:srgbClr val="1A1A1A"/>
                 </a:solidFill>
@@ -5298,7 +9879,7 @@
           <a:p>
             <a:pPr algn="l"/>
             <a:r>
-              <a:rPr sz="1100" b="0">
+              <a:rPr sz="1400" b="0" dirty="0">
                 <a:solidFill>
                   <a:srgbClr val="1A1A1A"/>
                 </a:solidFill>
@@ -5306,14 +9887,26 @@
               </a:rPr>
               <a:t>  •   Brand damage from negative reviews</a:t>
             </a:r>
+            <a:endParaRPr lang="en-US" sz="1400" b="0" dirty="0">
+              <a:solidFill>
+                <a:srgbClr val="1A1A1A"/>
+              </a:solidFill>
+              <a:latin typeface="Calibri"/>
+            </a:endParaRPr>
+          </a:p>
+          <a:p>
+            <a:pPr algn="l"/>
+            <a:endParaRPr sz="1200" b="0" dirty="0">
+              <a:solidFill>
+                <a:srgbClr val="1A1A1A"/>
+              </a:solidFill>
+              <a:latin typeface="Calibri"/>
+            </a:endParaRPr>
           </a:p>
           <a:p>
             <a:pPr algn="l"/>
             <a:r>
-              <a:rPr sz="1100" b="1">
-                <a:solidFill>
-                  <a:srgbClr val="555555"/>
-                </a:solidFill>
+              <a:rPr sz="1400" b="1" dirty="0">
                 <a:latin typeface="Calibri"/>
               </a:rPr>
               <a:t>The true cost is higher.</a:t>
@@ -5321,6 +9914,36 @@
           </a:p>
         </p:txBody>
       </p:sp>
+      <p:graphicFrame>
+        <p:nvGraphicFramePr>
+          <p:cNvPr id="27" name="Chart 26">
+            <a:extLst>
+              <a:ext uri="{FF2B5EF4-FFF2-40B4-BE49-F238E27FC236}">
+                <a16:creationId xmlns:a16="http://schemas.microsoft.com/office/drawing/2014/main" id="{6B4E14DE-4731-EFAF-0557-C6B8360762D0}"/>
+              </a:ext>
+            </a:extLst>
+          </p:cNvPr>
+          <p:cNvGraphicFramePr>
+            <a:graphicFrameLocks/>
+          </p:cNvGraphicFramePr>
+          <p:nvPr>
+            <p:extLst>
+              <p:ext uri="{D42A27DB-BD31-4B8C-83A1-F6EECF244321}">
+                <p14:modId xmlns:p14="http://schemas.microsoft.com/office/powerpoint/2010/main" val="669730952"/>
+              </p:ext>
+            </p:extLst>
+          </p:nvPr>
+        </p:nvGraphicFramePr>
+        <p:xfrm>
+          <a:off x="393065" y="1051560"/>
+          <a:ext cx="5352600" cy="3031236"/>
+        </p:xfrm>
+        <a:graphic>
+          <a:graphicData uri="http://schemas.openxmlformats.org/drawingml/2006/chart">
+            <c:chart xmlns:c="http://schemas.openxmlformats.org/drawingml/2006/chart" xmlns:r="http://schemas.openxmlformats.org/officeDocument/2006/relationships" r:id="rId2"/>
+          </a:graphicData>
+        </a:graphic>
+      </p:graphicFrame>
     </p:spTree>
   </p:cSld>
   <p:clrMapOvr>
@@ -5330,7 +9953,7 @@
 </file>
 
 <file path=ppt/slides/slide4.xml><?xml version="1.0" encoding="utf-8"?>
-<p:sld xmlns:a="http://schemas.openxmlformats.org/drawingml/2006/main" xmlns:p="http://schemas.openxmlformats.org/presentationml/2006/main" xmlns:r="http://schemas.openxmlformats.org/officeDocument/2006/relationships">
+<p:sld xmlns:a="http://schemas.openxmlformats.org/drawingml/2006/main" xmlns:r="http://schemas.openxmlformats.org/officeDocument/2006/relationships" xmlns:p="http://schemas.openxmlformats.org/presentationml/2006/main">
   <p:cSld>
     <p:bg>
       <p:bgPr>
@@ -5346,7 +9969,14 @@
         <p:cNvGrpSpPr/>
         <p:nvPr/>
       </p:nvGrpSpPr>
-      <p:grpSpPr/>
+      <p:grpSpPr>
+        <a:xfrm>
+          <a:off x="0" y="0"/>
+          <a:ext cx="0" cy="0"/>
+          <a:chOff x="0" y="0"/>
+          <a:chExt cx="0" cy="0"/>
+        </a:xfrm>
+      </p:grpSpPr>
       <p:sp>
         <p:nvSpPr>
           <p:cNvPr id="2" name="Rectangle 1"/>
@@ -5387,6 +10017,7 @@
           <a:lstStyle/>
           <a:p>
             <a:pPr algn="ctr"/>
+            <a:endParaRPr/>
           </a:p>
         </p:txBody>
       </p:sp>
@@ -5465,6 +10096,7 @@
           <a:lstStyle/>
           <a:p>
             <a:pPr algn="ctr"/>
+            <a:endParaRPr/>
           </a:p>
         </p:txBody>
       </p:sp>
@@ -5476,8 +10108,8 @@
         </p:nvSpPr>
         <p:spPr>
           <a:xfrm>
-            <a:off x="457200" y="987552"/>
-            <a:ext cx="5303520" cy="347472"/>
+            <a:off x="498348" y="1001268"/>
+            <a:ext cx="5303520" cy="307777"/>
           </a:xfrm>
           <a:prstGeom prst="rect">
             <a:avLst/>
@@ -5492,10 +10124,7 @@
           <a:p>
             <a:pPr algn="l"/>
             <a:r>
-              <a:rPr sz="1300" b="1" i="0">
-                <a:solidFill>
-                  <a:srgbClr val="E91E8C"/>
-                </a:solidFill>
+              <a:rPr sz="1400" b="1" i="0" dirty="0">
                 <a:latin typeface="Calibri"/>
               </a:rPr>
               <a:t>How the Policy Is Hurting Us</a:t>
@@ -5511,7 +10140,7 @@
         </p:nvSpPr>
         <p:spPr>
           <a:xfrm>
-            <a:off x="457200" y="1417320"/>
+            <a:off x="470916" y="1559051"/>
             <a:ext cx="54864" cy="777240"/>
           </a:xfrm>
           <a:prstGeom prst="rect">
@@ -5543,6 +10172,7 @@
           <a:lstStyle/>
           <a:p>
             <a:pPr algn="ctr"/>
+            <a:endParaRPr/>
           </a:p>
         </p:txBody>
       </p:sp>
@@ -5554,8 +10184,8 @@
         </p:nvSpPr>
         <p:spPr>
           <a:xfrm>
-            <a:off x="658368" y="1417320"/>
-            <a:ext cx="4389120" cy="292608"/>
+            <a:off x="658368" y="1563007"/>
+            <a:ext cx="4389120" cy="307777"/>
           </a:xfrm>
           <a:prstGeom prst="rect">
             <a:avLst/>
@@ -5570,7 +10200,7 @@
           <a:p>
             <a:pPr algn="l"/>
             <a:r>
-              <a:rPr sz="1200" b="1" i="0">
+              <a:rPr sz="1400" b="1" i="0" dirty="0">
                 <a:solidFill>
                   <a:srgbClr val="1A1A1A"/>
                 </a:solidFill>
@@ -5578,6 +10208,12 @@
               </a:rPr>
               <a:t>Sales</a:t>
             </a:r>
+            <a:endParaRPr sz="1200" b="1" i="0" dirty="0">
+              <a:solidFill>
+                <a:srgbClr val="1A1A1A"/>
+              </a:solidFill>
+              <a:latin typeface="Calibri"/>
+            </a:endParaRPr>
           </a:p>
         </p:txBody>
       </p:sp>
@@ -5589,8 +10225,8 @@
         </p:nvSpPr>
         <p:spPr>
           <a:xfrm>
-            <a:off x="658368" y="1691640"/>
-            <a:ext cx="4389120" cy="548640"/>
+            <a:off x="658368" y="1927204"/>
+            <a:ext cx="4389120" cy="461665"/>
           </a:xfrm>
           <a:prstGeom prst="rect">
             <a:avLst/>
@@ -5605,10 +10241,7 @@
           <a:p>
             <a:pPr algn="l"/>
             <a:r>
-              <a:rPr sz="1100" b="0" i="0">
-                <a:solidFill>
-                  <a:srgbClr val="555555"/>
-                </a:solidFill>
+              <a:rPr sz="1200" b="0" i="0" dirty="0">
                 <a:latin typeface="Calibri"/>
               </a:rPr>
               <a:t>Deters uncertain buyers from purchasing at all. Lost revenue that never appears in return data — the hidden cost of friction.</a:t>
@@ -5624,7 +10257,7 @@
         </p:nvSpPr>
         <p:spPr>
           <a:xfrm>
-            <a:off x="457200" y="2377440"/>
+            <a:off x="470916" y="2944368"/>
             <a:ext cx="54864" cy="777240"/>
           </a:xfrm>
           <a:prstGeom prst="rect">
@@ -5656,6 +10289,7 @@
           <a:lstStyle/>
           <a:p>
             <a:pPr algn="ctr"/>
+            <a:endParaRPr/>
           </a:p>
         </p:txBody>
       </p:sp>
@@ -5667,8 +10301,8 @@
         </p:nvSpPr>
         <p:spPr>
           <a:xfrm>
-            <a:off x="658368" y="2377440"/>
-            <a:ext cx="4389120" cy="292608"/>
+            <a:off x="658368" y="2944368"/>
+            <a:ext cx="4389120" cy="307777"/>
           </a:xfrm>
           <a:prstGeom prst="rect">
             <a:avLst/>
@@ -5683,7 +10317,7 @@
           <a:p>
             <a:pPr algn="l"/>
             <a:r>
-              <a:rPr sz="1200" b="1" i="0">
+              <a:rPr sz="1400" b="1" i="0" dirty="0">
                 <a:solidFill>
                   <a:srgbClr val="1A1A1A"/>
                 </a:solidFill>
@@ -5691,6 +10325,12 @@
               </a:rPr>
               <a:t>Reputation</a:t>
             </a:r>
+            <a:endParaRPr sz="1200" b="1" i="0" dirty="0">
+              <a:solidFill>
+                <a:srgbClr val="1A1A1A"/>
+              </a:solidFill>
+              <a:latin typeface="Calibri"/>
+            </a:endParaRPr>
           </a:p>
         </p:txBody>
       </p:sp>
@@ -5702,8 +10342,8 @@
         </p:nvSpPr>
         <p:spPr>
           <a:xfrm>
-            <a:off x="658368" y="2651760"/>
-            <a:ext cx="4389120" cy="548640"/>
+            <a:off x="658368" y="3285982"/>
+            <a:ext cx="4389120" cy="461665"/>
           </a:xfrm>
           <a:prstGeom prst="rect">
             <a:avLst/>
@@ -5718,10 +10358,7 @@
           <a:p>
             <a:pPr algn="l"/>
             <a:r>
-              <a:rPr sz="1100" b="0" i="0">
-                <a:solidFill>
-                  <a:srgbClr val="555555"/>
-                </a:solidFill>
+              <a:rPr sz="1200" b="0" i="0" dirty="0">
                 <a:latin typeface="Calibri"/>
               </a:rPr>
               <a:t>Difficult return experiences drive negative reviews, social media complaints, and word-of-mouth damage a refund alone can't undo.</a:t>
@@ -5737,7 +10374,7 @@
         </p:nvSpPr>
         <p:spPr>
           <a:xfrm>
-            <a:off x="457200" y="3337560"/>
+            <a:off x="443484" y="4343400"/>
             <a:ext cx="54864" cy="777240"/>
           </a:xfrm>
           <a:prstGeom prst="rect">
@@ -5769,6 +10406,7 @@
           <a:lstStyle/>
           <a:p>
             <a:pPr algn="ctr"/>
+            <a:endParaRPr/>
           </a:p>
         </p:txBody>
       </p:sp>
@@ -5780,8 +10418,8 @@
         </p:nvSpPr>
         <p:spPr>
           <a:xfrm>
-            <a:off x="658368" y="3337560"/>
-            <a:ext cx="4389120" cy="292608"/>
+            <a:off x="658368" y="4304647"/>
+            <a:ext cx="4389120" cy="307777"/>
           </a:xfrm>
           <a:prstGeom prst="rect">
             <a:avLst/>
@@ -5796,7 +10434,7 @@
           <a:p>
             <a:pPr algn="l"/>
             <a:r>
-              <a:rPr sz="1200" b="1" i="0">
+              <a:rPr sz="1400" b="1" i="0" dirty="0">
                 <a:solidFill>
                   <a:srgbClr val="1A1A1A"/>
                 </a:solidFill>
@@ -5815,8 +10453,8 @@
         </p:nvSpPr>
         <p:spPr>
           <a:xfrm>
-            <a:off x="658368" y="3611880"/>
-            <a:ext cx="4389120" cy="548640"/>
+            <a:off x="658368" y="4604833"/>
+            <a:ext cx="4389120" cy="646331"/>
           </a:xfrm>
           <a:prstGeom prst="rect">
             <a:avLst/>
@@ -5831,10 +10469,7 @@
           <a:p>
             <a:pPr algn="l"/>
             <a:r>
-              <a:rPr sz="1100" b="0" i="0">
-                <a:solidFill>
-                  <a:srgbClr val="555555"/>
-                </a:solidFill>
+              <a:rPr sz="1200" b="0" i="0" dirty="0">
                 <a:latin typeface="Calibri"/>
               </a:rPr>
               <a:t>Strict policies don't eliminate returns. They make them harder to manage and push customers toward chargebacks and churn instead.</a:t>
@@ -5851,7 +10486,7 @@
         <p:spPr>
           <a:xfrm>
             <a:off x="457200" y="6309360"/>
-            <a:ext cx="5486400" cy="347472"/>
+            <a:ext cx="5486400" cy="230832"/>
           </a:xfrm>
           <a:prstGeom prst="rect">
             <a:avLst/>
@@ -5866,10 +10501,7 @@
           <a:p>
             <a:pPr algn="l"/>
             <a:r>
-              <a:rPr sz="900" b="0" i="1">
-                <a:solidFill>
-                  <a:srgbClr val="BDBDBD"/>
-                </a:solidFill>
+              <a:rPr sz="900" b="0" i="1" dirty="0">
                 <a:latin typeface="Calibri"/>
               </a:rPr>
               <a:t>Petersen &amp; Kumar (2009); Bower &amp; Maxham (2012) — Journal of Marketing</a:t>
@@ -5917,6 +10549,7 @@
           <a:lstStyle/>
           <a:p>
             <a:pPr algn="ctr"/>
+            <a:endParaRPr/>
           </a:p>
         </p:txBody>
       </p:sp>
@@ -5929,7 +10562,7 @@
         <p:spPr>
           <a:xfrm>
             <a:off x="6217920" y="987552"/>
-            <a:ext cx="5486400" cy="347472"/>
+            <a:ext cx="5486400" cy="307777"/>
           </a:xfrm>
           <a:prstGeom prst="rect">
             <a:avLst/>
@@ -5944,10 +10577,7 @@
           <a:p>
             <a:pPr algn="l"/>
             <a:r>
-              <a:rPr sz="1300" b="1" i="0">
-                <a:solidFill>
-                  <a:srgbClr val="E91E8C"/>
-                </a:solidFill>
+              <a:rPr sz="1400" b="1" i="0" dirty="0">
                 <a:latin typeface="Calibri"/>
               </a:rPr>
               <a:t>Recommended Changes</a:t>
@@ -5995,6 +10625,7 @@
           <a:lstStyle/>
           <a:p>
             <a:pPr algn="ctr"/>
+            <a:endParaRPr/>
           </a:p>
         </p:txBody>
       </p:sp>
@@ -6007,7 +10638,7 @@
         <p:spPr>
           <a:xfrm>
             <a:off x="6217920" y="1481328"/>
-            <a:ext cx="5394960" cy="292608"/>
+            <a:ext cx="5394960" cy="307777"/>
           </a:xfrm>
           <a:prstGeom prst="rect">
             <a:avLst/>
@@ -6022,7 +10653,7 @@
           <a:p>
             <a:pPr algn="l"/>
             <a:r>
-              <a:rPr sz="1200" b="1" i="0">
+              <a:rPr sz="1400" b="1" i="0" dirty="0">
                 <a:solidFill>
                   <a:srgbClr val="1A1A1A"/>
                 </a:solidFill>
@@ -6042,7 +10673,7 @@
         <p:spPr>
           <a:xfrm>
             <a:off x="6217920" y="1764792"/>
-            <a:ext cx="5394960" cy="566928"/>
+            <a:ext cx="5394960" cy="461665"/>
           </a:xfrm>
           <a:prstGeom prst="rect">
             <a:avLst/>
@@ -6057,10 +10688,7 @@
           <a:p>
             <a:pPr algn="l"/>
             <a:r>
-              <a:rPr sz="1100" b="0" i="0">
-                <a:solidFill>
-                  <a:srgbClr val="555555"/>
-                </a:solidFill>
+              <a:rPr sz="1200" b="0" i="0" dirty="0">
                 <a:latin typeface="Calibri"/>
               </a:rPr>
               <a:t>Current industry standard for online apparel. Competitors like Nordstrom (no time limit) and Zappos (365 days) set a high bar. 30 days is the minimum.</a:t>
@@ -6108,6 +10736,7 @@
           <a:lstStyle/>
           <a:p>
             <a:pPr algn="ctr"/>
+            <a:endParaRPr/>
           </a:p>
         </p:txBody>
       </p:sp>
@@ -6120,7 +10749,7 @@
         <p:spPr>
           <a:xfrm>
             <a:off x="6217920" y="2441448"/>
-            <a:ext cx="5394960" cy="292608"/>
+            <a:ext cx="5394960" cy="307777"/>
           </a:xfrm>
           <a:prstGeom prst="rect">
             <a:avLst/>
@@ -6135,7 +10764,7 @@
           <a:p>
             <a:pPr algn="l"/>
             <a:r>
-              <a:rPr sz="1200" b="1" i="0">
+              <a:rPr sz="1400" b="1" i="0" dirty="0">
                 <a:solidFill>
                   <a:srgbClr val="1A1A1A"/>
                 </a:solidFill>
@@ -6155,7 +10784,7 @@
         <p:spPr>
           <a:xfrm>
             <a:off x="6217920" y="2724912"/>
-            <a:ext cx="5394960" cy="566928"/>
+            <a:ext cx="5394960" cy="461665"/>
           </a:xfrm>
           <a:prstGeom prst="rect">
             <a:avLst/>
@@ -6170,10 +10799,7 @@
           <a:p>
             <a:pPr algn="l"/>
             <a:r>
-              <a:rPr sz="1100" b="0" i="0">
-                <a:solidFill>
-                  <a:srgbClr val="555555"/>
-                </a:solidFill>
+              <a:rPr sz="1200" b="0" i="0" dirty="0">
                 <a:latin typeface="Calibri"/>
               </a:rPr>
               <a:t>Paying for return shipping is the #1 reason shoppers abandon a brand after a bad experience. A prepaid label communicates trust and fairness.</a:t>
@@ -6221,6 +10847,7 @@
           <a:lstStyle/>
           <a:p>
             <a:pPr algn="ctr"/>
+            <a:endParaRPr/>
           </a:p>
         </p:txBody>
       </p:sp>
@@ -6233,7 +10860,7 @@
         <p:spPr>
           <a:xfrm>
             <a:off x="6217920" y="3401568"/>
-            <a:ext cx="5394960" cy="292608"/>
+            <a:ext cx="5394960" cy="307777"/>
           </a:xfrm>
           <a:prstGeom prst="rect">
             <a:avLst/>
@@ -6248,7 +10875,7 @@
           <a:p>
             <a:pPr algn="l"/>
             <a:r>
-              <a:rPr sz="1200" b="1" i="0">
+              <a:rPr sz="1400" b="1" i="0" dirty="0">
                 <a:solidFill>
                   <a:srgbClr val="1A1A1A"/>
                 </a:solidFill>
@@ -6268,7 +10895,7 @@
         <p:spPr>
           <a:xfrm>
             <a:off x="6217920" y="3685032"/>
-            <a:ext cx="5394960" cy="566928"/>
+            <a:ext cx="5394960" cy="461665"/>
           </a:xfrm>
           <a:prstGeom prst="rect">
             <a:avLst/>
@@ -6283,10 +10910,7 @@
           <a:p>
             <a:pPr algn="l"/>
             <a:r>
-              <a:rPr sz="1100" b="0" i="0">
-                <a:solidFill>
-                  <a:srgbClr val="555555"/>
-                </a:solidFill>
+              <a:rPr sz="1200" b="0" i="0" dirty="0">
                 <a:latin typeface="Calibri"/>
               </a:rPr>
               <a:t>This is standard practice and widely accepted by consumers. Tighter rules on discounted items are reasonable — the main policy should not be.</a:t>
@@ -6303,7 +10927,7 @@
         <p:spPr>
           <a:xfrm>
             <a:off x="6217920" y="6309360"/>
-            <a:ext cx="5486400" cy="347472"/>
+            <a:ext cx="5486400" cy="230832"/>
           </a:xfrm>
           <a:prstGeom prst="rect">
             <a:avLst/>
@@ -6318,10 +10942,7 @@
           <a:p>
             <a:pPr algn="l"/>
             <a:r>
-              <a:rPr sz="900" b="0" i="1">
-                <a:solidFill>
-                  <a:srgbClr val="BDBDBD"/>
-                </a:solidFill>
+              <a:rPr sz="900" b="0" i="1" dirty="0">
                 <a:latin typeface="Calibri"/>
               </a:rPr>
               <a:t>NRF, 2025; Bower &amp; Maxham, 2012; Petersen &amp; Kumar, 2009</a:t>
